--- a/critique_D/DSA5206_Critique_D.pptx
+++ b/critique_D/DSA5206_Critique_D.pptx
@@ -9,9 +9,11 @@
     <p:sldId id="257" r:id="rId3"/>
     <p:sldId id="258" r:id="rId4"/>
     <p:sldId id="259" r:id="rId5"/>
+    <p:sldId id="260" r:id="rId6"/>
+    <p:sldId id="261" r:id="rId7"/>
   </p:sldIdLst>
   <p:notesMasterIdLst>
-    <p:notesMasterId r:id="rId6"/>
+    <p:notesMasterId r:id="rId8"/>
   </p:notesMasterIdLst>
   <p:sldSz cx="12192000" cy="6858000"/>
   <p:notesSz cx="6858000" cy="12192000"/>
@@ -769,7 +771,7 @@
           <a:p>
             <a:r>
               <a:rPr lang="en-US" dirty="0"/>
-              <a:t>Three deployment problems. First, the output is unconstrained: 3.8 percent of opacity predictions and 5.9 percent of extent predictions fall outside the valid score range, mostly as negative severity. That involves only 5 and 11 distinct images, but a clinician would see a meaningless number. Simply clipping to the valid range would have lowered extent MAE from 1.16 to 1.10, and opacity from 0.79 to 0.77. Second, the use case is the ICU, where most films are portable bedside AP views, but the study evaluates PA films only. And even the PA label is not reliable: in the current dataset metadata, 11 of the 94 images have been relabelled AP or AP supine, and one has been removed. Third, compare what the authors admit with what they do not. They acknowledge the small sample, no external cohort, no link to outcomes, and the limits of saliency maps. They do not mention the test-set selection, the out-of-range outputs, the underestimation of severe cases, the PA versus AP mismatch, or any plan for uncertainty, concept drift or automation bias. Conclusion: a useful proof-of-concept study, but not ready for clinical deployment.</a:t>
+              <a:t>This slide covers the remaining training questions from the lecture checklist. First, credit where it is due: the split is done by patient. There are 65 patients and some contribute up to four films, but all films of one patient always land on the same side, which we verified in all 50 splits, so there is no data leakage of the kind the lecture warns about. Second, imbalance. Only 7 of 94 images have an opacity score of 5 or more, and 18 have extent 6 or more. The paper does nothing about this, no reweighting and no stratified splits, which is one reason the severe cases are underestimated, as shown on the previous slide. Third, explainability. The paper shows four saliency maps that the authors picked, two correct and two wrong, and notes the model looks at the heart and diaphragm. There is no quantitative check and no SHAP. Comparing 1, 4, 18 and 1024 features is effectively the only ablation. Fourth, subgroup performance, which the lecture recommends reporting, is not reported. We computed it from the Part I predictions: errors are similar for women and men, and extent error is highest for patients aged 50 to 64. With only 19 to 29 images per group this is a signal, not a conclusion.</a:t>
             </a:r>
             <a:endParaRPr lang="en-US" dirty="0"/>
           </a:p>
@@ -793,6 +795,182 @@
             <a:fld id="{F7021451-1387-4CA6-816F-3879F97B5CBC}" type="slidenum">
               <a:rPr lang="en-US"/>
               <a:t>4</a:t>
+            </a:fld>
+            <a:endParaRPr lang="en-US"/>
+          </a:p>
+        </p:txBody>
+      </p:sp>
+    </p:spTree>
+    <p:extLst>
+      <p:ext uri="{BB962C8B-B14F-4D97-AF65-F5344CB8AC3E}">
+        <p14:creationId xmlns:p14="http://schemas.microsoft.com/office/powerpoint/2010/main" val="1024086991"/>
+      </p:ext>
+    </p:extLst>
+  </p:cSld>
+  <p:clrMapOvr>
+    <a:masterClrMapping/>
+  </p:clrMapOvr>
+</p:notes>
+</file>
+
+<file path=ppt/notesSlides/notesSlide5.xml><?xml version="1.0" encoding="utf-8"?>
+<p:notes xmlns:a="http://schemas.openxmlformats.org/drawingml/2006/main" xmlns:r="http://schemas.openxmlformats.org/officeDocument/2006/relationships" xmlns:p="http://schemas.openxmlformats.org/presentationml/2006/main">
+  <p:cSld>
+    <p:spTree>
+      <p:nvGrpSpPr>
+        <p:cNvPr id="1" name=""/>
+        <p:cNvGrpSpPr/>
+        <p:nvPr/>
+      </p:nvGrpSpPr>
+      <p:grpSpPr>
+        <a:xfrm>
+          <a:off x="0" y="0"/>
+          <a:ext cx="0" cy="0"/>
+          <a:chOff x="0" y="0"/>
+          <a:chExt cx="0" cy="0"/>
+        </a:xfrm>
+      </p:grpSpPr>
+      <p:sp>
+        <p:nvSpPr>
+          <p:cNvPr id="2" name="Slide Image Placeholder 1"/>
+          <p:cNvSpPr>
+            <a:spLocks noGrp="1" noRot="1" noChangeAspect="1"/>
+          </p:cNvSpPr>
+          <p:nvPr>
+            <p:ph type="sldImg"/>
+          </p:nvPr>
+        </p:nvSpPr>
+        <p:spPr/>
+      </p:sp>
+      <p:sp>
+        <p:nvSpPr>
+          <p:cNvPr id="3" name="Notes Placeholder 2"/>
+          <p:cNvSpPr>
+            <a:spLocks noGrp="1"/>
+          </p:cNvSpPr>
+          <p:nvPr>
+            <p:ph type="body" idx="1"/>
+          </p:nvPr>
+        </p:nvSpPr>
+        <p:spPr/>
+        <p:txBody>
+          <a:bodyPr/>
+          <a:lstStyle/>
+          <a:p>
+            <a:r>
+              <a:rPr lang="en-US" dirty="0"/>
+              <a:t>Three deployment problems. First, the output is unconstrained: 3.8 percent of opacity predictions and 5.9 percent of extent predictions fall outside the valid score range, mostly as negative severity. That involves only 5 and 11 distinct images, but a clinician would see a meaningless number. Simply clipping to the valid range would have lowered extent MAE from 1.16 to 1.10, and opacity from 0.79 to 0.77. Second, the use case is the ICU, where most films are portable bedside AP views, but the study evaluates PA films only. And even the PA label is not reliable: in the current dataset metadata, 11 of the 94 images have been relabelled AP or AP supine, and one has been removed. Third, compare what the authors admit with what they do not. They acknowledge the small sample, no external cohort, no link to outcomes, and the limits of saliency maps. They do not mention the test-set selection, the out-of-range outputs, the underestimation of severe cases, the PA versus AP mismatch, or any plan for uncertainty, concept drift, or the human–AI biases from the lecture: automation bias, where an ICU team over-trusts a low score, and feedback-loop bias if the tool is later retrained on its own accepted outputs. Conclusion: a useful proof-of-concept study, but not ready for clinical deployment.</a:t>
+            </a:r>
+            <a:endParaRPr lang="en-US" dirty="0"/>
+          </a:p>
+        </p:txBody>
+      </p:sp>
+      <p:sp>
+        <p:nvSpPr>
+          <p:cNvPr id="4" name="Slide Number Placeholder 3"/>
+          <p:cNvSpPr>
+            <a:spLocks noGrp="1"/>
+          </p:cNvSpPr>
+          <p:nvPr>
+            <p:ph type="sldNum" sz="quarter" idx="10"/>
+          </p:nvPr>
+        </p:nvSpPr>
+        <p:spPr/>
+        <p:txBody>
+          <a:bodyPr/>
+          <a:lstStyle/>
+          <a:p>
+            <a:fld id="{F7021451-1387-4CA6-816F-3879F97B5CBC}" type="slidenum">
+              <a:rPr lang="en-US"/>
+              <a:t>5</a:t>
+            </a:fld>
+            <a:endParaRPr lang="en-US"/>
+          </a:p>
+        </p:txBody>
+      </p:sp>
+    </p:spTree>
+    <p:extLst>
+      <p:ext uri="{BB962C8B-B14F-4D97-AF65-F5344CB8AC3E}">
+        <p14:creationId xmlns:p14="http://schemas.microsoft.com/office/powerpoint/2010/main" val="1024086991"/>
+      </p:ext>
+    </p:extLst>
+  </p:cSld>
+  <p:clrMapOvr>
+    <a:masterClrMapping/>
+  </p:clrMapOvr>
+</p:notes>
+</file>
+
+<file path=ppt/notesSlides/notesSlide6.xml><?xml version="1.0" encoding="utf-8"?>
+<p:notes xmlns:a="http://schemas.openxmlformats.org/drawingml/2006/main" xmlns:r="http://schemas.openxmlformats.org/officeDocument/2006/relationships" xmlns:p="http://schemas.openxmlformats.org/presentationml/2006/main">
+  <p:cSld>
+    <p:spTree>
+      <p:nvGrpSpPr>
+        <p:cNvPr id="1" name=""/>
+        <p:cNvGrpSpPr/>
+        <p:nvPr/>
+      </p:nvGrpSpPr>
+      <p:grpSpPr>
+        <a:xfrm>
+          <a:off x="0" y="0"/>
+          <a:ext cx="0" cy="0"/>
+          <a:chOff x="0" y="0"/>
+          <a:chExt cx="0" cy="0"/>
+        </a:xfrm>
+      </p:grpSpPr>
+      <p:sp>
+        <p:nvSpPr>
+          <p:cNvPr id="2" name="Slide Image Placeholder 1"/>
+          <p:cNvSpPr>
+            <a:spLocks noGrp="1" noRot="1" noChangeAspect="1"/>
+          </p:cNvSpPr>
+          <p:nvPr>
+            <p:ph type="sldImg"/>
+          </p:nvPr>
+        </p:nvSpPr>
+        <p:spPr/>
+      </p:sp>
+      <p:sp>
+        <p:nvSpPr>
+          <p:cNvPr id="3" name="Notes Placeholder 2"/>
+          <p:cNvSpPr>
+            <a:spLocks noGrp="1"/>
+          </p:cNvSpPr>
+          <p:nvPr>
+            <p:ph type="body" idx="1"/>
+          </p:nvPr>
+        </p:nvSpPr>
+        <p:spPr/>
+        <p:txBody>
+          <a:bodyPr/>
+          <a:lstStyle/>
+          <a:p>
+            <a:r>
+              <a:rPr lang="en-US" dirty="0"/>
+              <a:t>To wrap up the critique, this table goes through every question on the Lecture 9 checklist, from data collection to deployment, with our verdict and one line of evidence. The study does well on openness: code, data and labels are public, and our Part I reproduced the results within 0.02 MAE. It also avoids patient leakage. But most other boxes are only partly met or not met: a convenience sample from web sources, a PA inclusion criterion that 17 images fail, missing data the paper says does not exist, a single model family compared only with a constant, model selection on the test set, no calibration, imbalance or subgroup analysis, and only hand-picked saliency maps for explainability. Our overall verdict matches the lecture’s wording for its own example: a useful proof-of-concept study, but not ready for clinical deployment.</a:t>
+            </a:r>
+            <a:endParaRPr lang="en-US" dirty="0"/>
+          </a:p>
+        </p:txBody>
+      </p:sp>
+      <p:sp>
+        <p:nvSpPr>
+          <p:cNvPr id="4" name="Slide Number Placeholder 3"/>
+          <p:cNvSpPr>
+            <a:spLocks noGrp="1"/>
+          </p:cNvSpPr>
+          <p:nvPr>
+            <p:ph type="sldNum" sz="quarter" idx="10"/>
+          </p:nvPr>
+        </p:nvSpPr>
+        <p:spPr/>
+        <p:txBody>
+          <a:bodyPr/>
+          <a:lstStyle/>
+          <a:p>
+            <a:fld id="{F7021451-1387-4CA6-816F-3879F97B5CBC}" type="slidenum">
+              <a:rPr lang="en-US"/>
+              <a:t>6</a:t>
             </a:fld>
             <a:endParaRPr lang="en-US"/>
           </a:p>
@@ -876,7 +1054,7 @@
         <p:spPr>
           <a:xfrm>
             <a:off x="812800" y="1102320"/>
-            <a:ext cx="10566400" cy="408914"/>
+            <a:ext cx="10566400" cy="408930"/>
           </a:xfrm>
           <a:prstGeom prst="rect">
             <a:avLst/>
@@ -923,8 +1101,8 @@
         </p:nvSpPr>
         <p:spPr>
           <a:xfrm>
-            <a:off x="812800" y="1816034"/>
-            <a:ext cx="10566400" cy="4229166"/>
+            <a:off x="812800" y="1816050"/>
+            <a:ext cx="10566400" cy="4229150"/>
           </a:xfrm>
           <a:prstGeom prst="rect">
             <a:avLst/>
@@ -1004,7 +1182,7 @@
         <p:spPr>
           <a:xfrm>
             <a:off x="812800" y="1102320"/>
-            <a:ext cx="10566400" cy="408914"/>
+            <a:ext cx="10566400" cy="408930"/>
           </a:xfrm>
           <a:prstGeom prst="rect">
             <a:avLst/>
@@ -1051,8 +1229,8 @@
         </p:nvSpPr>
         <p:spPr>
           <a:xfrm>
-            <a:off x="812800" y="1816034"/>
-            <a:ext cx="10566400" cy="4229166"/>
+            <a:off x="812800" y="1816050"/>
+            <a:ext cx="10566400" cy="4229150"/>
           </a:xfrm>
           <a:prstGeom prst="rect">
             <a:avLst/>
@@ -1429,7 +1607,7 @@
         <p:spPr>
           <a:xfrm>
             <a:off x="812800" y="1102320"/>
-            <a:ext cx="10883392" cy="434314"/>
+            <a:ext cx="10883392" cy="434330"/>
           </a:xfrm>
           <a:prstGeom prst="rect">
             <a:avLst/>
@@ -1472,8 +1650,8 @@
         </p:nvSpPr>
         <p:spPr>
           <a:xfrm>
-            <a:off x="815975" y="1717609"/>
-            <a:ext cx="5175250" cy="3534503"/>
+            <a:off x="815975" y="1717625"/>
+            <a:ext cx="5175250" cy="3534470"/>
           </a:xfrm>
           <a:prstGeom prst="roundRect">
             <a:avLst>
@@ -1499,8 +1677,8 @@
         </p:nvSpPr>
         <p:spPr>
           <a:xfrm>
-            <a:off x="1020233" y="1921867"/>
-            <a:ext cx="4909735" cy="223507"/>
+            <a:off x="1022350" y="1924000"/>
+            <a:ext cx="4905375" cy="223490"/>
           </a:xfrm>
           <a:prstGeom prst="rect">
             <a:avLst/>
@@ -1550,18 +1728,18 @@
           </p:nvPr>
         </p:nvGraphicFramePr>
         <p:xfrm>
-          <a:off x="1032933" y="2259674"/>
-          <a:ext cx="4754033" cy="1995884"/>
+          <a:off x="1035050" y="2261791"/>
+          <a:ext cx="4749800" cy="1996083"/>
         </p:xfrm>
         <a:graphic>
           <a:graphicData uri="http://schemas.openxmlformats.org/drawingml/2006/table">
             <a:tbl>
               <a:tblPr/>
               <a:tblGrid>
-                <a:gridCol w="2947501"/>
-                <a:gridCol w="1806533"/>
+                <a:gridCol w="2944876"/>
+                <a:gridCol w="1804924"/>
               </a:tblGrid>
-              <a:tr h="332647">
+              <a:tr h="332680">
                 <a:tc>
                   <a:txBody>
                     <a:bodyPr/>
@@ -1705,7 +1883,7 @@
                   </a:tcPr>
                 </a:tc>
               </a:tr>
-              <a:tr h="332647">
+              <a:tr h="332680">
                 <a:tc>
                   <a:txBody>
                     <a:bodyPr/>
@@ -1843,7 +2021,7 @@
                   </a:tcPr>
                 </a:tc>
               </a:tr>
-              <a:tr h="332647">
+              <a:tr h="332680">
                 <a:tc>
                   <a:txBody>
                     <a:bodyPr/>
@@ -1981,7 +2159,7 @@
                   </a:tcPr>
                 </a:tc>
               </a:tr>
-              <a:tr h="332647">
+              <a:tr h="332680">
                 <a:tc>
                   <a:txBody>
                     <a:bodyPr/>
@@ -2119,7 +2297,7 @@
                   </a:tcPr>
                 </a:tc>
               </a:tr>
-              <a:tr h="332647">
+              <a:tr h="332680">
                 <a:tc>
                   <a:txBody>
                     <a:bodyPr/>
@@ -2257,7 +2435,7 @@
                   </a:tcPr>
                 </a:tc>
               </a:tr>
-              <a:tr h="332647">
+              <a:tr h="332680">
                 <a:tc>
                   <a:txBody>
                     <a:bodyPr/>
@@ -2407,8 +2585,8 @@
         </p:nvSpPr>
         <p:spPr>
           <a:xfrm>
-            <a:off x="1020233" y="4382558"/>
-            <a:ext cx="4909735" cy="452041"/>
+            <a:off x="1022350" y="4384873"/>
+            <a:ext cx="4905375" cy="452041"/>
           </a:xfrm>
           <a:prstGeom prst="rect">
             <a:avLst/>
@@ -2451,8 +2629,8 @@
         </p:nvSpPr>
         <p:spPr>
           <a:xfrm>
-            <a:off x="6200775" y="1717609"/>
-            <a:ext cx="5175250" cy="3534503"/>
+            <a:off x="6200775" y="1717625"/>
+            <a:ext cx="5175250" cy="3534470"/>
           </a:xfrm>
           <a:prstGeom prst="roundRect">
             <a:avLst>
@@ -2478,8 +2656,8 @@
         </p:nvSpPr>
         <p:spPr>
           <a:xfrm>
-            <a:off x="6405033" y="1921867"/>
-            <a:ext cx="4909735" cy="223507"/>
+            <a:off x="6407150" y="1924000"/>
+            <a:ext cx="4905375" cy="223490"/>
           </a:xfrm>
           <a:prstGeom prst="rect">
             <a:avLst/>
@@ -2522,8 +2700,8 @@
         </p:nvSpPr>
         <p:spPr>
           <a:xfrm>
-            <a:off x="6516539" y="2246974"/>
-            <a:ext cx="4790609" cy="1092002"/>
+            <a:off x="6518656" y="2249091"/>
+            <a:ext cx="4786249" cy="1092002"/>
           </a:xfrm>
           <a:prstGeom prst="rect">
             <a:avLst/>
@@ -2651,8 +2829,8 @@
         </p:nvSpPr>
         <p:spPr>
           <a:xfrm>
-            <a:off x="6405033" y="3440576"/>
-            <a:ext cx="4909735" cy="238720"/>
+            <a:off x="6407150" y="3442692"/>
+            <a:ext cx="4905375" cy="238720"/>
           </a:xfrm>
           <a:prstGeom prst="rect">
             <a:avLst/>
@@ -2695,12 +2873,12 @@
         </p:nvSpPr>
         <p:spPr>
           <a:xfrm>
-            <a:off x="812800" y="5458487"/>
-            <a:ext cx="10566400" cy="586714"/>
+            <a:off x="812800" y="5458470"/>
+            <a:ext cx="10566400" cy="586730"/>
           </a:xfrm>
           <a:prstGeom prst="roundRect">
             <a:avLst>
-              <a:gd name="adj" fmla="val 17317"/>
+              <a:gd name="adj" fmla="val 17316"/>
             </a:avLst>
           </a:prstGeom>
           <a:solidFill>
@@ -2805,7 +2983,7 @@
                 <a:ea typeface="Arial" pitchFamily="34" charset="-122"/>
                 <a:cs typeface="Arial" pitchFamily="34" charset="-120"/>
               </a:rPr>
-              <a:t>PART II · CRITIQUE ④ MODEL TRAINING (1/2)</a:t>
+              <a:t>PART II · CRITIQUE ④ MODEL TRAINING (1/3) · DEVELOPER COGNITIVE BIAS</a:t>
             </a:r>
             <a:endParaRPr lang="en-US" sz="1200" dirty="0"/>
           </a:p>
@@ -2822,7 +3000,7 @@
         <p:spPr>
           <a:xfrm>
             <a:off x="812800" y="1102320"/>
-            <a:ext cx="10883392" cy="434314"/>
+            <a:ext cx="10883392" cy="434330"/>
           </a:xfrm>
           <a:prstGeom prst="rect">
             <a:avLst/>
@@ -2865,8 +3043,8 @@
         </p:nvSpPr>
         <p:spPr>
           <a:xfrm>
-            <a:off x="815975" y="1717609"/>
-            <a:ext cx="6292850" cy="3491376"/>
+            <a:off x="815975" y="1717625"/>
+            <a:ext cx="6292850" cy="3491359"/>
           </a:xfrm>
           <a:prstGeom prst="roundRect">
             <a:avLst>
@@ -2892,8 +3070,8 @@
         </p:nvSpPr>
         <p:spPr>
           <a:xfrm>
-            <a:off x="1020233" y="1921867"/>
-            <a:ext cx="6060863" cy="452041"/>
+            <a:off x="1022350" y="1924000"/>
+            <a:ext cx="6056503" cy="452041"/>
           </a:xfrm>
           <a:prstGeom prst="rect">
             <a:avLst/>
@@ -2943,19 +3121,19 @@
           </p:nvPr>
         </p:nvGraphicFramePr>
         <p:xfrm>
-          <a:off x="1032933" y="2488208"/>
-          <a:ext cx="5871633" cy="1876557"/>
+          <a:off x="1035050" y="2490341"/>
+          <a:ext cx="5867400" cy="1876723"/>
         </p:xfrm>
         <a:graphic>
           <a:graphicData uri="http://schemas.openxmlformats.org/drawingml/2006/table">
             <a:tbl>
               <a:tblPr/>
               <a:tblGrid>
-                <a:gridCol w="3640413"/>
-                <a:gridCol w="1115610"/>
-                <a:gridCol w="1115610"/>
+                <a:gridCol w="3637788"/>
+                <a:gridCol w="1114806"/>
+                <a:gridCol w="1114806"/>
               </a:tblGrid>
-              <a:tr h="545968">
+              <a:tr h="546001">
                 <a:tc>
                   <a:txBody>
                     <a:bodyPr/>
@@ -3170,7 +3348,7 @@
                   </a:tcPr>
                 </a:tc>
               </a:tr>
-              <a:tr h="332647">
+              <a:tr h="332680">
                 <a:tc>
                   <a:txBody>
                     <a:bodyPr/>
@@ -3376,7 +3554,7 @@
                   </a:tcPr>
                 </a:tc>
               </a:tr>
-              <a:tr h="332647">
+              <a:tr h="332680">
                 <a:tc>
                   <a:txBody>
                     <a:bodyPr/>
@@ -3582,7 +3760,7 @@
                   </a:tcPr>
                 </a:tc>
               </a:tr>
-              <a:tr h="332647">
+              <a:tr h="332680">
                 <a:tc>
                   <a:txBody>
                     <a:bodyPr/>
@@ -3797,7 +3975,7 @@
                   </a:tcPr>
                 </a:tc>
               </a:tr>
-              <a:tr h="332647">
+              <a:tr h="332680">
                 <a:tc>
                   <a:txBody>
                     <a:bodyPr/>
@@ -4015,8 +4193,8 @@
         </p:nvSpPr>
         <p:spPr>
           <a:xfrm>
-            <a:off x="1020233" y="4491765"/>
-            <a:ext cx="6060863" cy="452041"/>
+            <a:off x="1022350" y="4494064"/>
+            <a:ext cx="6056503" cy="452041"/>
           </a:xfrm>
           <a:prstGeom prst="rect">
             <a:avLst/>
@@ -4070,8 +4248,8 @@
         </p:nvSpPr>
         <p:spPr>
           <a:xfrm>
-            <a:off x="7318375" y="1717609"/>
-            <a:ext cx="4057650" cy="3491376"/>
+            <a:off x="7318375" y="1717625"/>
+            <a:ext cx="4057650" cy="3491359"/>
           </a:xfrm>
           <a:prstGeom prst="roundRect">
             <a:avLst>
@@ -4097,8 +4275,8 @@
         </p:nvSpPr>
         <p:spPr>
           <a:xfrm>
-            <a:off x="7522634" y="1921867"/>
-            <a:ext cx="3758607" cy="223507"/>
+            <a:off x="7524750" y="1924000"/>
+            <a:ext cx="3754247" cy="223490"/>
           </a:xfrm>
           <a:prstGeom prst="rect">
             <a:avLst/>
@@ -4148,7 +4326,7 @@
         </p:blipFill>
         <p:spPr>
           <a:xfrm>
-            <a:off x="7522634" y="2221574"/>
+            <a:off x="7524750" y="2223691"/>
             <a:ext cx="3657600" cy="1333500"/>
           </a:xfrm>
           <a:prstGeom prst="rect">
@@ -4164,8 +4342,8 @@
         </p:nvSpPr>
         <p:spPr>
           <a:xfrm>
-            <a:off x="7522634" y="3656674"/>
-            <a:ext cx="3758607" cy="452041"/>
+            <a:off x="7524750" y="3658791"/>
+            <a:ext cx="3754247" cy="452041"/>
           </a:xfrm>
           <a:prstGeom prst="rect">
             <a:avLst/>
@@ -4209,7 +4387,7 @@
         <p:spPr>
           <a:xfrm>
             <a:off x="812800" y="5415359"/>
-            <a:ext cx="3420533" cy="629841"/>
+            <a:ext cx="3420517" cy="629841"/>
           </a:xfrm>
           <a:prstGeom prst="roundRect">
             <a:avLst>
@@ -4256,8 +4434,8 @@
         </p:nvSpPr>
         <p:spPr>
           <a:xfrm>
-            <a:off x="4385733" y="5415359"/>
-            <a:ext cx="3420533" cy="629841"/>
+            <a:off x="4385717" y="5415359"/>
+            <a:ext cx="3420566" cy="629841"/>
           </a:xfrm>
           <a:prstGeom prst="roundRect">
             <a:avLst>
@@ -4270,7 +4448,7 @@
           <a:ln/>
         </p:spPr>
         <p:txBody>
-          <a:bodyPr wrap="square" lIns="130082" tIns="79282" rIns="36610" bIns="53882" rtlCol="0" anchor="t">
+          <a:bodyPr wrap="square" lIns="130082" tIns="79282" rIns="36609" bIns="53882" rtlCol="0" anchor="t">
             <a:normAutofit/>
           </a:bodyPr>
           <a:lstStyle/>
@@ -4304,8 +4482,8 @@
         </p:nvSpPr>
         <p:spPr>
           <a:xfrm>
-            <a:off x="7958667" y="5415359"/>
-            <a:ext cx="3420533" cy="629841"/>
+            <a:off x="7958683" y="5415359"/>
+            <a:ext cx="3420517" cy="629841"/>
           </a:xfrm>
           <a:prstGeom prst="roundRect">
             <a:avLst>
@@ -4414,7 +4592,7 @@
                 <a:ea typeface="Arial" pitchFamily="34" charset="-122"/>
                 <a:cs typeface="Arial" pitchFamily="34" charset="-120"/>
               </a:rPr>
-              <a:t>PART II · CRITIQUE ④ MODEL TRAINING (2/2)</a:t>
+              <a:t>PART II · CRITIQUE ④ MODEL TRAINING (2/3) · METRICS AND CALIBRATION</a:t>
             </a:r>
             <a:endParaRPr lang="en-US" sz="1200" dirty="0"/>
           </a:p>
@@ -4431,7 +4609,7 @@
         <p:spPr>
           <a:xfrm>
             <a:off x="812800" y="1102320"/>
-            <a:ext cx="10883392" cy="434314"/>
+            <a:ext cx="10883392" cy="434330"/>
           </a:xfrm>
           <a:prstGeom prst="rect">
             <a:avLst/>
@@ -4474,8 +4652,8 @@
         </p:nvSpPr>
         <p:spPr>
           <a:xfrm>
-            <a:off x="815975" y="1717610"/>
-            <a:ext cx="5200650" cy="4324416"/>
+            <a:off x="815975" y="1717625"/>
+            <a:ext cx="5200650" cy="4324400"/>
           </a:xfrm>
           <a:prstGeom prst="roundRect">
             <a:avLst>
@@ -4503,13 +4681,13 @@
         </p:nvPicPr>
         <p:blipFill>
           <a:blip r:embed="rId1"/>
-          <a:srcRect l="0" r="0" t="-106" b="-106"/>
+          <a:srcRect l="0" r="0" t="-148" b="-148"/>
           <a:stretch/>
         </p:blipFill>
         <p:spPr>
           <a:xfrm>
-            <a:off x="918633" y="1831910"/>
-            <a:ext cx="4995333" cy="4095750"/>
+            <a:off x="920750" y="1831925"/>
+            <a:ext cx="4991100" cy="4095750"/>
           </a:xfrm>
           <a:prstGeom prst="rect">
             <a:avLst/>
@@ -4524,8 +4702,8 @@
         </p:nvSpPr>
         <p:spPr>
           <a:xfrm>
-            <a:off x="6223000" y="1714435"/>
-            <a:ext cx="1320800" cy="523214"/>
+            <a:off x="6223000" y="1714450"/>
+            <a:ext cx="1320800" cy="523230"/>
           </a:xfrm>
           <a:prstGeom prst="rect">
             <a:avLst/>
@@ -4568,7 +4746,7 @@
         </p:nvSpPr>
         <p:spPr>
           <a:xfrm>
-            <a:off x="7645400" y="1856648"/>
+            <a:off x="7645400" y="1856680"/>
             <a:ext cx="3845814" cy="238720"/>
           </a:xfrm>
           <a:prstGeom prst="rect">
@@ -4612,8 +4790,8 @@
         </p:nvSpPr>
         <p:spPr>
           <a:xfrm>
-            <a:off x="6223000" y="2364648"/>
-            <a:ext cx="1320800" cy="523214"/>
+            <a:off x="6223000" y="2364680"/>
+            <a:ext cx="1320800" cy="523230"/>
           </a:xfrm>
           <a:prstGeom prst="rect">
             <a:avLst/>
@@ -4656,7 +4834,7 @@
         </p:nvSpPr>
         <p:spPr>
           <a:xfrm>
-            <a:off x="7645400" y="2506861"/>
+            <a:off x="7645400" y="2506911"/>
             <a:ext cx="3845814" cy="238720"/>
           </a:xfrm>
           <a:prstGeom prst="rect">
@@ -4700,8 +4878,8 @@
         </p:nvSpPr>
         <p:spPr>
           <a:xfrm>
-            <a:off x="6223000" y="3014861"/>
-            <a:ext cx="1320800" cy="523214"/>
+            <a:off x="6223000" y="3014911"/>
+            <a:ext cx="1320800" cy="523230"/>
           </a:xfrm>
           <a:prstGeom prst="rect">
             <a:avLst/>
@@ -4744,7 +4922,7 @@
         </p:nvSpPr>
         <p:spPr>
           <a:xfrm>
-            <a:off x="7645400" y="3050448"/>
+            <a:off x="7645400" y="3050480"/>
             <a:ext cx="3845814" cy="452041"/>
           </a:xfrm>
           <a:prstGeom prst="rect">
@@ -4788,7 +4966,7 @@
         </p:nvSpPr>
         <p:spPr>
           <a:xfrm>
-            <a:off x="6223000" y="3665076"/>
+            <a:off x="6223000" y="3665141"/>
             <a:ext cx="5156200" cy="944761"/>
           </a:xfrm>
           <a:prstGeom prst="roundRect">
@@ -4839,6 +5017,884 @@
 <file path=ppt/slides/slide4.xml><?xml version="1.0" encoding="utf-8"?>
 <p:sld xmlns:a="http://schemas.openxmlformats.org/drawingml/2006/main" xmlns:r="http://schemas.openxmlformats.org/officeDocument/2006/relationships" xmlns:p="http://schemas.openxmlformats.org/presentationml/2006/main">
   <p:cSld name="Slide 4">
+    <p:bg>
+      <p:bgPr>
+        <a:solidFill>
+          <a:srgbClr val="F7F6F2"/>
+        </a:solidFill>
+      </p:bgPr>
+    </p:bg>
+    <p:spTree>
+      <p:nvGrpSpPr>
+        <p:cNvPr id="1" name=""/>
+        <p:cNvGrpSpPr/>
+        <p:nvPr/>
+      </p:nvGrpSpPr>
+      <p:grpSpPr>
+        <a:xfrm>
+          <a:off x="0" y="0"/>
+          <a:ext cx="0" cy="0"/>
+          <a:chOff x="0" y="0"/>
+          <a:chExt cx="0" cy="0"/>
+        </a:xfrm>
+      </p:grpSpPr>
+      <p:sp>
+        <p:nvSpPr>
+          <p:cNvPr id="2" name="Text 0"/>
+          <p:cNvSpPr/>
+          <p:nvPr/>
+        </p:nvSpPr>
+        <p:spPr>
+          <a:xfrm>
+            <a:off x="812800" y="812800"/>
+            <a:ext cx="10883392" cy="238720"/>
+          </a:xfrm>
+          <a:prstGeom prst="rect">
+            <a:avLst/>
+          </a:prstGeom>
+          <a:noFill/>
+          <a:ln/>
+        </p:spPr>
+        <p:txBody>
+          <a:bodyPr wrap="square" lIns="0" tIns="0" rIns="0" bIns="0" rtlCol="0" anchor="t">
+            <a:normAutofit/>
+          </a:bodyPr>
+          <a:lstStyle/>
+          <a:p>
+            <a:pPr algn="l" indent="0" marL="0">
+              <a:lnSpc>
+                <a:spcPts val="1680"/>
+              </a:lnSpc>
+              <a:buNone/>
+            </a:pPr>
+            <a:r>
+              <a:rPr lang="en-US" sz="1200" b="1" spc="100" kern="0" dirty="0">
+                <a:solidFill>
+                  <a:srgbClr val="B5521B"/>
+                </a:solidFill>
+                <a:latin typeface="Arial" pitchFamily="34" charset="0"/>
+                <a:ea typeface="Arial" pitchFamily="34" charset="-122"/>
+                <a:cs typeface="Arial" pitchFamily="34" charset="-120"/>
+              </a:rPr>
+              <a:t>PART II · CRITIQUE ④ MODEL TRAINING (3/3) · LEAKAGE, IMBALANCE, EXPLAINABILITY</a:t>
+            </a:r>
+            <a:endParaRPr lang="en-US" sz="1200" dirty="0"/>
+          </a:p>
+        </p:txBody>
+      </p:sp>
+      <p:sp>
+        <p:nvSpPr>
+          <p:cNvPr id="3" name="Text 1"/>
+          <p:cNvSpPr/>
+          <p:nvPr>
+            <p:ph type="title"/>
+          </p:nvPr>
+        </p:nvSpPr>
+        <p:spPr>
+          <a:xfrm>
+            <a:off x="812800" y="1102320"/>
+            <a:ext cx="10883392" cy="434330"/>
+          </a:xfrm>
+          <a:prstGeom prst="rect">
+            <a:avLst/>
+          </a:prstGeom>
+          <a:noFill/>
+          <a:ln/>
+        </p:spPr>
+        <p:txBody>
+          <a:bodyPr wrap="square" lIns="0" tIns="0" rIns="0" bIns="0" rtlCol="0" anchor="t">
+            <a:normAutofit/>
+          </a:bodyPr>
+          <a:lstStyle/>
+          <a:p>
+            <a:pPr algn="l" indent="0" marL="0">
+              <a:lnSpc>
+                <a:spcPts val="3220"/>
+              </a:lnSpc>
+              <a:buNone/>
+            </a:pPr>
+            <a:r>
+              <a:rPr lang="en-US" sz="2800" b="1" i="0" dirty="0">
+                <a:solidFill>
+                  <a:srgbClr val="14213D"/>
+                </a:solidFill>
+                <a:latin typeface="Georgia" pitchFamily="18" charset="0"/>
+                <a:ea typeface="Georgia" pitchFamily="18" charset="-122"/>
+                <a:cs typeface="Georgia" pitchFamily="18" charset="-120"/>
+              </a:rPr>
+              <a:t>No leakage, but imbalance and explainability left open</a:t>
+            </a:r>
+            <a:endParaRPr lang="en-US" sz="2800" dirty="0"/>
+          </a:p>
+        </p:txBody>
+      </p:sp>
+      <p:sp>
+        <p:nvSpPr>
+          <p:cNvPr id="4" name="Shape 2"/>
+          <p:cNvSpPr/>
+          <p:nvPr/>
+        </p:nvSpPr>
+        <p:spPr>
+          <a:xfrm>
+            <a:off x="815975" y="1717625"/>
+            <a:ext cx="5200650" cy="2082800"/>
+          </a:xfrm>
+          <a:prstGeom prst="roundRect">
+            <a:avLst>
+              <a:gd name="adj" fmla="val 4726"/>
+            </a:avLst>
+          </a:prstGeom>
+          <a:solidFill>
+            <a:srgbClr val="FDFDFB"/>
+          </a:solidFill>
+          <a:ln w="6350">
+            <a:solidFill>
+              <a:srgbClr val="DAD7CE"/>
+            </a:solidFill>
+            <a:prstDash val="solid"/>
+          </a:ln>
+        </p:spPr>
+      </p:sp>
+      <p:sp>
+        <p:nvSpPr>
+          <p:cNvPr id="5" name="Text 3"/>
+          <p:cNvSpPr/>
+          <p:nvPr/>
+        </p:nvSpPr>
+        <p:spPr>
+          <a:xfrm>
+            <a:off x="996950" y="1898600"/>
+            <a:ext cx="914549" cy="264120"/>
+          </a:xfrm>
+          <a:custGeom>
+            <a:avLst/>
+            <a:gdLst/>
+            <a:ahLst/>
+            <a:cxnLst/>
+            <a:rect l="l" t="t" r="r" b="b"/>
+            <a:pathLst>
+              <a:path w="914549" h="264120">
+                <a:moveTo>
+                  <a:pt x="132060" y="0"/>
+                </a:moveTo>
+                <a:lnTo>
+                  <a:pt x="782489" y="0"/>
+                </a:lnTo>
+                <a:arcTo hR="132060" wR="132060" stAng="16200000" swAng="5400000"/>
+                <a:lnTo>
+                  <a:pt x="914549" y="132060"/>
+                </a:lnTo>
+                <a:arcTo hR="132060" wR="132060" stAng="0" swAng="5400000"/>
+                <a:lnTo>
+                  <a:pt x="132060" y="264120"/>
+                </a:lnTo>
+                <a:arcTo hR="132060" wR="132060" stAng="5400000" swAng="5400000"/>
+                <a:lnTo>
+                  <a:pt x="0" y="132060"/>
+                </a:lnTo>
+                <a:arcTo hR="132060" wR="132060" stAng="10800000" swAng="5400000"/>
+                <a:close/>
+              </a:path>
+            </a:pathLst>
+          </a:custGeom>
+          <a:solidFill>
+            <a:srgbClr val="14213D"/>
+          </a:solidFill>
+          <a:ln/>
+        </p:spPr>
+        <p:txBody>
+          <a:bodyPr wrap="none" lIns="0" tIns="0" rIns="0" bIns="0" rtlCol="0" anchor="ctr">
+            <a:normAutofit/>
+          </a:bodyPr>
+          <a:lstStyle/>
+          <a:p>
+            <a:pPr algn="ctr" indent="0" marL="0">
+              <a:lnSpc>
+                <a:spcPts val="1680"/>
+              </a:lnSpc>
+              <a:buNone/>
+            </a:pPr>
+            <a:r>
+              <a:rPr lang="en-US" sz="1200" b="1" dirty="0">
+                <a:solidFill>
+                  <a:srgbClr val="F7F6F2"/>
+                </a:solidFill>
+                <a:latin typeface="Arial" pitchFamily="34" charset="0"/>
+                <a:ea typeface="Arial" pitchFamily="34" charset="-122"/>
+                <a:cs typeface="Arial" pitchFamily="34" charset="-120"/>
+              </a:rPr>
+              <a:t>Done well</a:t>
+            </a:r>
+            <a:endParaRPr lang="en-US" sz="1200" dirty="0"/>
+          </a:p>
+        </p:txBody>
+      </p:sp>
+      <p:sp>
+        <p:nvSpPr>
+          <p:cNvPr id="6" name="Text 4"/>
+          <p:cNvSpPr/>
+          <p:nvPr/>
+        </p:nvSpPr>
+        <p:spPr>
+          <a:xfrm>
+            <a:off x="996950" y="2238921"/>
+            <a:ext cx="4983861" cy="223490"/>
+          </a:xfrm>
+          <a:prstGeom prst="rect">
+            <a:avLst/>
+          </a:prstGeom>
+          <a:noFill/>
+          <a:ln/>
+        </p:spPr>
+        <p:txBody>
+          <a:bodyPr wrap="square" lIns="0" tIns="0" rIns="0" bIns="0" rtlCol="0" anchor="t">
+            <a:normAutofit/>
+          </a:bodyPr>
+          <a:lstStyle/>
+          <a:p>
+            <a:pPr algn="l" indent="0" marL="0">
+              <a:lnSpc>
+                <a:spcPts val="1560"/>
+              </a:lnSpc>
+              <a:buNone/>
+            </a:pPr>
+            <a:r>
+              <a:rPr lang="en-US" sz="1300" b="1" dirty="0">
+                <a:solidFill>
+                  <a:srgbClr val="14213D"/>
+                </a:solidFill>
+                <a:latin typeface="Arial" pitchFamily="34" charset="0"/>
+                <a:ea typeface="Arial" pitchFamily="34" charset="-122"/>
+                <a:cs typeface="Arial" pitchFamily="34" charset="-120"/>
+              </a:rPr>
+              <a:t>Patient-grouped splits</a:t>
+            </a:r>
+            <a:endParaRPr lang="en-US" sz="1300" dirty="0"/>
+          </a:p>
+        </p:txBody>
+      </p:sp>
+      <p:sp>
+        <p:nvSpPr>
+          <p:cNvPr id="7" name="Text 5"/>
+          <p:cNvSpPr/>
+          <p:nvPr/>
+        </p:nvSpPr>
+        <p:spPr>
+          <a:xfrm>
+            <a:off x="996950" y="2513211"/>
+            <a:ext cx="4983861" cy="452041"/>
+          </a:xfrm>
+          <a:prstGeom prst="rect">
+            <a:avLst/>
+          </a:prstGeom>
+          <a:noFill/>
+          <a:ln/>
+        </p:spPr>
+        <p:txBody>
+          <a:bodyPr wrap="square" lIns="0" tIns="0" rIns="0" bIns="0" rtlCol="0" anchor="t">
+            <a:normAutofit/>
+          </a:bodyPr>
+          <a:lstStyle/>
+          <a:p>
+            <a:pPr algn="l" indent="0" marL="0">
+              <a:lnSpc>
+                <a:spcPts val="1680"/>
+              </a:lnSpc>
+              <a:buNone/>
+            </a:pPr>
+            <a:r>
+              <a:rPr lang="en-US" sz="1200" dirty="0">
+                <a:solidFill>
+                  <a:srgbClr val="3E4A5C"/>
+                </a:solidFill>
+                <a:latin typeface="Arial" pitchFamily="34" charset="0"/>
+                <a:ea typeface="Arial" pitchFamily="34" charset="-122"/>
+                <a:cs typeface="Arial" pitchFamily="34" charset="-120"/>
+              </a:rPr>
+              <a:t>65 patients, up to 4 films each. All films of a patient stay on one side of every split: no data leakage (checked in all 50 splits).</a:t>
+            </a:r>
+            <a:endParaRPr lang="en-US" sz="1200" dirty="0"/>
+          </a:p>
+        </p:txBody>
+      </p:sp>
+      <p:sp>
+        <p:nvSpPr>
+          <p:cNvPr id="8" name="Shape 6"/>
+          <p:cNvSpPr/>
+          <p:nvPr/>
+        </p:nvSpPr>
+        <p:spPr>
+          <a:xfrm>
+            <a:off x="6178550" y="1720800"/>
+            <a:ext cx="5194300" cy="2076450"/>
+          </a:xfrm>
+          <a:prstGeom prst="roundRect">
+            <a:avLst>
+              <a:gd name="adj" fmla="val 4587"/>
+            </a:avLst>
+          </a:prstGeom>
+          <a:solidFill>
+            <a:srgbClr val="FDFDFB"/>
+          </a:solidFill>
+          <a:ln w="12700">
+            <a:solidFill>
+              <a:srgbClr val="B5521B"/>
+            </a:solidFill>
+            <a:prstDash val="solid"/>
+          </a:ln>
+        </p:spPr>
+      </p:sp>
+      <p:sp>
+        <p:nvSpPr>
+          <p:cNvPr id="9" name="Text 7"/>
+          <p:cNvSpPr/>
+          <p:nvPr/>
+        </p:nvSpPr>
+        <p:spPr>
+          <a:xfrm>
+            <a:off x="6362700" y="1904950"/>
+            <a:ext cx="1261814" cy="264120"/>
+          </a:xfrm>
+          <a:custGeom>
+            <a:avLst/>
+            <a:gdLst/>
+            <a:ahLst/>
+            <a:cxnLst/>
+            <a:rect l="l" t="t" r="r" b="b"/>
+            <a:pathLst>
+              <a:path w="1261814" h="264120">
+                <a:moveTo>
+                  <a:pt x="132060" y="0"/>
+                </a:moveTo>
+                <a:lnTo>
+                  <a:pt x="1129754" y="0"/>
+                </a:lnTo>
+                <a:arcTo hR="132060" wR="132060" stAng="16200000" swAng="5400000"/>
+                <a:lnTo>
+                  <a:pt x="1261814" y="132060"/>
+                </a:lnTo>
+                <a:arcTo hR="132060" wR="132060" stAng="0" swAng="5400000"/>
+                <a:lnTo>
+                  <a:pt x="132060" y="264120"/>
+                </a:lnTo>
+                <a:arcTo hR="132060" wR="132060" stAng="5400000" swAng="5400000"/>
+                <a:lnTo>
+                  <a:pt x="0" y="132060"/>
+                </a:lnTo>
+                <a:arcTo hR="132060" wR="132060" stAng="10800000" swAng="5400000"/>
+                <a:close/>
+              </a:path>
+            </a:pathLst>
+          </a:custGeom>
+          <a:solidFill>
+            <a:srgbClr val="F3E3D8"/>
+          </a:solidFill>
+          <a:ln/>
+        </p:spPr>
+        <p:txBody>
+          <a:bodyPr wrap="none" lIns="0" tIns="0" rIns="0" bIns="0" rtlCol="0" anchor="ctr">
+            <a:normAutofit/>
+          </a:bodyPr>
+          <a:lstStyle/>
+          <a:p>
+            <a:pPr algn="ctr" indent="0" marL="0">
+              <a:lnSpc>
+                <a:spcPts val="1680"/>
+              </a:lnSpc>
+              <a:buNone/>
+            </a:pPr>
+            <a:r>
+              <a:rPr lang="en-US" sz="1200" b="1" dirty="0">
+                <a:solidFill>
+                  <a:srgbClr val="14213D"/>
+                </a:solidFill>
+                <a:latin typeface="Arial" pitchFamily="34" charset="0"/>
+                <a:ea typeface="Arial" pitchFamily="34" charset="-122"/>
+                <a:cs typeface="Arial" pitchFamily="34" charset="-120"/>
+              </a:rPr>
+              <a:t>Not addressed</a:t>
+            </a:r>
+            <a:endParaRPr lang="en-US" sz="1200" dirty="0"/>
+          </a:p>
+        </p:txBody>
+      </p:sp>
+      <p:sp>
+        <p:nvSpPr>
+          <p:cNvPr id="10" name="Text 8"/>
+          <p:cNvSpPr/>
+          <p:nvPr/>
+        </p:nvSpPr>
+        <p:spPr>
+          <a:xfrm>
+            <a:off x="6362700" y="2245271"/>
+            <a:ext cx="4970780" cy="223490"/>
+          </a:xfrm>
+          <a:prstGeom prst="rect">
+            <a:avLst/>
+          </a:prstGeom>
+          <a:noFill/>
+          <a:ln/>
+        </p:spPr>
+        <p:txBody>
+          <a:bodyPr wrap="square" lIns="0" tIns="0" rIns="0" bIns="0" rtlCol="0" anchor="t">
+            <a:normAutofit/>
+          </a:bodyPr>
+          <a:lstStyle/>
+          <a:p>
+            <a:pPr algn="l" indent="0" marL="0">
+              <a:lnSpc>
+                <a:spcPts val="1560"/>
+              </a:lnSpc>
+              <a:buNone/>
+            </a:pPr>
+            <a:r>
+              <a:rPr lang="en-US" sz="1300" b="1" dirty="0">
+                <a:solidFill>
+                  <a:srgbClr val="14213D"/>
+                </a:solidFill>
+                <a:latin typeface="Arial" pitchFamily="34" charset="0"/>
+                <a:ea typeface="Arial" pitchFamily="34" charset="-122"/>
+                <a:cs typeface="Arial" pitchFamily="34" charset="-120"/>
+              </a:rPr>
+              <a:t>Imbalance: 7 of 94 images score opacity ≥ 5</a:t>
+            </a:r>
+            <a:endParaRPr lang="en-US" sz="1300" dirty="0"/>
+          </a:p>
+        </p:txBody>
+      </p:sp>
+      <p:sp>
+        <p:nvSpPr>
+          <p:cNvPr id="11" name="Text 9"/>
+          <p:cNvSpPr/>
+          <p:nvPr/>
+        </p:nvSpPr>
+        <p:spPr>
+          <a:xfrm>
+            <a:off x="6362700" y="2519561"/>
+            <a:ext cx="4970780" cy="452041"/>
+          </a:xfrm>
+          <a:prstGeom prst="rect">
+            <a:avLst/>
+          </a:prstGeom>
+          <a:noFill/>
+          <a:ln/>
+        </p:spPr>
+        <p:txBody>
+          <a:bodyPr wrap="square" lIns="0" tIns="0" rIns="0" bIns="0" rtlCol="0" anchor="t">
+            <a:normAutofit/>
+          </a:bodyPr>
+          <a:lstStyle/>
+          <a:p>
+            <a:pPr algn="l" indent="0" marL="0">
+              <a:lnSpc>
+                <a:spcPts val="1680"/>
+              </a:lnSpc>
+              <a:buNone/>
+            </a:pPr>
+            <a:r>
+              <a:rPr lang="en-US" sz="1200" dirty="0">
+                <a:solidFill>
+                  <a:srgbClr val="3E4A5C"/>
+                </a:solidFill>
+                <a:latin typeface="Arial" pitchFamily="34" charset="0"/>
+                <a:ea typeface="Arial" pitchFamily="34" charset="-122"/>
+                <a:cs typeface="Arial" pitchFamily="34" charset="-120"/>
+              </a:rPr>
+              <a:t>18 of 94 score extent ≥ 6. No reweighting or stratified splits, so the few severe cases are under-learned (slide 2/3).</a:t>
+            </a:r>
+            <a:endParaRPr lang="en-US" sz="1200" dirty="0"/>
+          </a:p>
+        </p:txBody>
+      </p:sp>
+      <p:sp>
+        <p:nvSpPr>
+          <p:cNvPr id="12" name="Shape 10"/>
+          <p:cNvSpPr/>
+          <p:nvPr/>
+        </p:nvSpPr>
+        <p:spPr>
+          <a:xfrm>
+            <a:off x="819150" y="3962350"/>
+            <a:ext cx="5194300" cy="2076500"/>
+          </a:xfrm>
+          <a:prstGeom prst="roundRect">
+            <a:avLst>
+              <a:gd name="adj" fmla="val 4587"/>
+            </a:avLst>
+          </a:prstGeom>
+          <a:solidFill>
+            <a:srgbClr val="FDFDFB"/>
+          </a:solidFill>
+          <a:ln w="12700">
+            <a:solidFill>
+              <a:srgbClr val="B5521B"/>
+            </a:solidFill>
+            <a:prstDash val="solid"/>
+          </a:ln>
+        </p:spPr>
+      </p:sp>
+      <p:sp>
+        <p:nvSpPr>
+          <p:cNvPr id="13" name="Text 11"/>
+          <p:cNvSpPr/>
+          <p:nvPr/>
+        </p:nvSpPr>
+        <p:spPr>
+          <a:xfrm>
+            <a:off x="1003300" y="4146500"/>
+            <a:ext cx="598587" cy="264120"/>
+          </a:xfrm>
+          <a:custGeom>
+            <a:avLst/>
+            <a:gdLst/>
+            <a:ahLst/>
+            <a:cxnLst/>
+            <a:rect l="l" t="t" r="r" b="b"/>
+            <a:pathLst>
+              <a:path w="598587" h="264120">
+                <a:moveTo>
+                  <a:pt x="132060" y="0"/>
+                </a:moveTo>
+                <a:lnTo>
+                  <a:pt x="466527" y="0"/>
+                </a:lnTo>
+                <a:arcTo hR="132060" wR="132060" stAng="16200000" swAng="5400000"/>
+                <a:lnTo>
+                  <a:pt x="598587" y="132060"/>
+                </a:lnTo>
+                <a:arcTo hR="132060" wR="132060" stAng="0" swAng="5400000"/>
+                <a:lnTo>
+                  <a:pt x="132060" y="264120"/>
+                </a:lnTo>
+                <a:arcTo hR="132060" wR="132060" stAng="5400000" swAng="5400000"/>
+                <a:lnTo>
+                  <a:pt x="0" y="132060"/>
+                </a:lnTo>
+                <a:arcTo hR="132060" wR="132060" stAng="10800000" swAng="5400000"/>
+                <a:close/>
+              </a:path>
+            </a:pathLst>
+          </a:custGeom>
+          <a:solidFill>
+            <a:srgbClr val="F3E3D8"/>
+          </a:solidFill>
+          <a:ln/>
+        </p:spPr>
+        <p:txBody>
+          <a:bodyPr wrap="none" lIns="0" tIns="0" rIns="0" bIns="0" rtlCol="0" anchor="ctr">
+            <a:normAutofit/>
+          </a:bodyPr>
+          <a:lstStyle/>
+          <a:p>
+            <a:pPr algn="ctr" indent="0" marL="0">
+              <a:lnSpc>
+                <a:spcPts val="1680"/>
+              </a:lnSpc>
+              <a:buNone/>
+            </a:pPr>
+            <a:r>
+              <a:rPr lang="en-US" sz="1200" b="1" dirty="0">
+                <a:solidFill>
+                  <a:srgbClr val="14213D"/>
+                </a:solidFill>
+                <a:latin typeface="Arial" pitchFamily="34" charset="0"/>
+                <a:ea typeface="Arial" pitchFamily="34" charset="-122"/>
+                <a:cs typeface="Arial" pitchFamily="34" charset="-120"/>
+              </a:rPr>
+              <a:t>Weak</a:t>
+            </a:r>
+            <a:endParaRPr lang="en-US" sz="1200" dirty="0"/>
+          </a:p>
+        </p:txBody>
+      </p:sp>
+      <p:sp>
+        <p:nvSpPr>
+          <p:cNvPr id="14" name="Text 12"/>
+          <p:cNvSpPr/>
+          <p:nvPr/>
+        </p:nvSpPr>
+        <p:spPr>
+          <a:xfrm>
+            <a:off x="1003300" y="4486821"/>
+            <a:ext cx="4970780" cy="223490"/>
+          </a:xfrm>
+          <a:prstGeom prst="rect">
+            <a:avLst/>
+          </a:prstGeom>
+          <a:noFill/>
+          <a:ln/>
+        </p:spPr>
+        <p:txBody>
+          <a:bodyPr wrap="square" lIns="0" tIns="0" rIns="0" bIns="0" rtlCol="0" anchor="t">
+            <a:normAutofit/>
+          </a:bodyPr>
+          <a:lstStyle/>
+          <a:p>
+            <a:pPr algn="l" indent="0" marL="0">
+              <a:lnSpc>
+                <a:spcPts val="1560"/>
+              </a:lnSpc>
+              <a:buNone/>
+            </a:pPr>
+            <a:r>
+              <a:rPr lang="en-US" sz="1300" b="1" dirty="0">
+                <a:solidFill>
+                  <a:srgbClr val="14213D"/>
+                </a:solidFill>
+                <a:latin typeface="Arial" pitchFamily="34" charset="0"/>
+                <a:ea typeface="Arial" pitchFamily="34" charset="-122"/>
+                <a:cs typeface="Arial" pitchFamily="34" charset="-120"/>
+              </a:rPr>
+              <a:t>Explainability: 4 hand-picked saliency maps</a:t>
+            </a:r>
+            <a:endParaRPr lang="en-US" sz="1300" dirty="0"/>
+          </a:p>
+        </p:txBody>
+      </p:sp>
+      <p:sp>
+        <p:nvSpPr>
+          <p:cNvPr id="15" name="Text 13"/>
+          <p:cNvSpPr/>
+          <p:nvPr/>
+        </p:nvSpPr>
+        <p:spPr>
+          <a:xfrm>
+            <a:off x="1003300" y="4761111"/>
+            <a:ext cx="4970780" cy="452041"/>
+          </a:xfrm>
+          <a:prstGeom prst="rect">
+            <a:avLst/>
+          </a:prstGeom>
+          <a:noFill/>
+          <a:ln/>
+        </p:spPr>
+        <p:txBody>
+          <a:bodyPr wrap="square" lIns="0" tIns="0" rIns="0" bIns="0" rtlCol="0" anchor="t">
+            <a:normAutofit/>
+          </a:bodyPr>
+          <a:lstStyle/>
+          <a:p>
+            <a:pPr algn="l" indent="0" marL="0">
+              <a:lnSpc>
+                <a:spcPts val="1680"/>
+              </a:lnSpc>
+              <a:buNone/>
+            </a:pPr>
+            <a:r>
+              <a:rPr lang="en-US" sz="1200" dirty="0">
+                <a:solidFill>
+                  <a:srgbClr val="3E4A5C"/>
+                </a:solidFill>
+                <a:latin typeface="Arial" pitchFamily="34" charset="0"/>
+                <a:ea typeface="Arial" pitchFamily="34" charset="-122"/>
+                <a:cs typeface="Arial" pitchFamily="34" charset="-120"/>
+              </a:rPr>
+              <a:t>2 right, 2 wrong; focus on heart and diaphragm. No quantitative check or SHAP. The 1 / 4 / 18 / 1024 feature comparison is the only ablation.</a:t>
+            </a:r>
+            <a:endParaRPr lang="en-US" sz="1200" dirty="0"/>
+          </a:p>
+        </p:txBody>
+      </p:sp>
+      <p:sp>
+        <p:nvSpPr>
+          <p:cNvPr id="16" name="Shape 14"/>
+          <p:cNvSpPr/>
+          <p:nvPr/>
+        </p:nvSpPr>
+        <p:spPr>
+          <a:xfrm>
+            <a:off x="6175375" y="3959175"/>
+            <a:ext cx="5200650" cy="2082850"/>
+          </a:xfrm>
+          <a:prstGeom prst="roundRect">
+            <a:avLst>
+              <a:gd name="adj" fmla="val 4725"/>
+            </a:avLst>
+          </a:prstGeom>
+          <a:solidFill>
+            <a:srgbClr val="FDFDFB"/>
+          </a:solidFill>
+          <a:ln w="6350">
+            <a:solidFill>
+              <a:srgbClr val="DAD7CE"/>
+            </a:solidFill>
+            <a:prstDash val="solid"/>
+          </a:ln>
+        </p:spPr>
+      </p:sp>
+      <p:sp>
+        <p:nvSpPr>
+          <p:cNvPr id="17" name="Text 15"/>
+          <p:cNvSpPr/>
+          <p:nvPr/>
+        </p:nvSpPr>
+        <p:spPr>
+          <a:xfrm>
+            <a:off x="6356350" y="4140150"/>
+            <a:ext cx="1117600" cy="264120"/>
+          </a:xfrm>
+          <a:custGeom>
+            <a:avLst/>
+            <a:gdLst/>
+            <a:ahLst/>
+            <a:cxnLst/>
+            <a:rect l="l" t="t" r="r" b="b"/>
+            <a:pathLst>
+              <a:path w="1117600" h="264120">
+                <a:moveTo>
+                  <a:pt x="132060" y="0"/>
+                </a:moveTo>
+                <a:lnTo>
+                  <a:pt x="985540" y="0"/>
+                </a:lnTo>
+                <a:arcTo hR="132060" wR="132060" stAng="16200000" swAng="5400000"/>
+                <a:lnTo>
+                  <a:pt x="1117600" y="132060"/>
+                </a:lnTo>
+                <a:arcTo hR="132060" wR="132060" stAng="0" swAng="5400000"/>
+                <a:lnTo>
+                  <a:pt x="132060" y="264120"/>
+                </a:lnTo>
+                <a:arcTo hR="132060" wR="132060" stAng="5400000" swAng="5400000"/>
+                <a:lnTo>
+                  <a:pt x="0" y="132060"/>
+                </a:lnTo>
+                <a:arcTo hR="132060" wR="132060" stAng="10800000" swAng="5400000"/>
+                <a:close/>
+              </a:path>
+            </a:pathLst>
+          </a:custGeom>
+          <a:solidFill>
+            <a:srgbClr val="F3E3D8"/>
+          </a:solidFill>
+          <a:ln/>
+        </p:spPr>
+        <p:txBody>
+          <a:bodyPr wrap="none" lIns="0" tIns="0" rIns="0" bIns="0" rtlCol="0" anchor="ctr">
+            <a:normAutofit/>
+          </a:bodyPr>
+          <a:lstStyle/>
+          <a:p>
+            <a:pPr algn="ctr" indent="0" marL="0">
+              <a:lnSpc>
+                <a:spcPts val="1680"/>
+              </a:lnSpc>
+              <a:buNone/>
+            </a:pPr>
+            <a:r>
+              <a:rPr lang="en-US" sz="1200" b="1" dirty="0">
+                <a:solidFill>
+                  <a:srgbClr val="14213D"/>
+                </a:solidFill>
+                <a:latin typeface="Arial" pitchFamily="34" charset="0"/>
+                <a:ea typeface="Arial" pitchFamily="34" charset="-122"/>
+                <a:cs typeface="Arial" pitchFamily="34" charset="-120"/>
+              </a:rPr>
+              <a:t>Not reported</a:t>
+            </a:r>
+            <a:endParaRPr lang="en-US" sz="1200" dirty="0"/>
+          </a:p>
+        </p:txBody>
+      </p:sp>
+      <p:sp>
+        <p:nvSpPr>
+          <p:cNvPr id="18" name="Text 16"/>
+          <p:cNvSpPr/>
+          <p:nvPr/>
+        </p:nvSpPr>
+        <p:spPr>
+          <a:xfrm>
+            <a:off x="6356350" y="4480471"/>
+            <a:ext cx="4983861" cy="223490"/>
+          </a:xfrm>
+          <a:prstGeom prst="rect">
+            <a:avLst/>
+          </a:prstGeom>
+          <a:noFill/>
+          <a:ln/>
+        </p:spPr>
+        <p:txBody>
+          <a:bodyPr wrap="square" lIns="0" tIns="0" rIns="0" bIns="0" rtlCol="0" anchor="t">
+            <a:normAutofit/>
+          </a:bodyPr>
+          <a:lstStyle/>
+          <a:p>
+            <a:pPr algn="l" indent="0" marL="0">
+              <a:lnSpc>
+                <a:spcPts val="1560"/>
+              </a:lnSpc>
+              <a:buNone/>
+            </a:pPr>
+            <a:r>
+              <a:rPr lang="en-US" sz="1300" b="1" dirty="0">
+                <a:solidFill>
+                  <a:srgbClr val="14213D"/>
+                </a:solidFill>
+                <a:latin typeface="Arial" pitchFamily="34" charset="0"/>
+                <a:ea typeface="Arial" pitchFamily="34" charset="-122"/>
+                <a:cs typeface="Arial" pitchFamily="34" charset="-120"/>
+              </a:rPr>
+              <a:t>Subgroups (our check, opacity / extent MAE)</a:t>
+            </a:r>
+            <a:endParaRPr lang="en-US" sz="1300" dirty="0"/>
+          </a:p>
+        </p:txBody>
+      </p:sp>
+      <p:sp>
+        <p:nvSpPr>
+          <p:cNvPr id="19" name="Text 17"/>
+          <p:cNvSpPr/>
+          <p:nvPr/>
+        </p:nvSpPr>
+        <p:spPr>
+          <a:xfrm>
+            <a:off x="6356350" y="4754761"/>
+            <a:ext cx="4983861" cy="452041"/>
+          </a:xfrm>
+          <a:prstGeom prst="rect">
+            <a:avLst/>
+          </a:prstGeom>
+          <a:noFill/>
+          <a:ln/>
+        </p:spPr>
+        <p:txBody>
+          <a:bodyPr wrap="square" lIns="0" tIns="0" rIns="0" bIns="0" rtlCol="0" anchor="t">
+            <a:normAutofit/>
+          </a:bodyPr>
+          <a:lstStyle/>
+          <a:p>
+            <a:pPr algn="l" indent="0" marL="0">
+              <a:lnSpc>
+                <a:spcPts val="1680"/>
+              </a:lnSpc>
+              <a:buNone/>
+            </a:pPr>
+            <a:r>
+              <a:rPr lang="en-US" sz="1200" dirty="0">
+                <a:solidFill>
+                  <a:srgbClr val="3E4A5C"/>
+                </a:solidFill>
+                <a:latin typeface="Arial" pitchFamily="34" charset="0"/>
+                <a:ea typeface="Arial" pitchFamily="34" charset="-122"/>
+                <a:cs typeface="Arial" pitchFamily="34" charset="-120"/>
+              </a:rPr>
+              <a:t>Female 0.84 / 1.15, male 0.81 / 1.27. Age 50–64: extent 1.59 vs 1.10 at 65+. Only 19–29 images per group: a signal, not proof.</a:t>
+            </a:r>
+            <a:endParaRPr lang="en-US" sz="1200" dirty="0"/>
+          </a:p>
+        </p:txBody>
+      </p:sp>
+    </p:spTree>
+  </p:cSld>
+  <p:clrMapOvr>
+    <a:masterClrMapping/>
+  </p:clrMapOvr>
+</p:sld>
+</file>
+
+<file path=ppt/slides/slide5.xml><?xml version="1.0" encoding="utf-8"?>
+<p:sld xmlns:a="http://schemas.openxmlformats.org/drawingml/2006/main" xmlns:r="http://schemas.openxmlformats.org/officeDocument/2006/relationships" xmlns:p="http://schemas.openxmlformats.org/presentationml/2006/main">
+  <p:cSld name="Slide 5">
     <p:bg>
       <p:bgPr>
         <a:solidFill>
@@ -4898,7 +5954,7 @@
                 <a:ea typeface="Arial" pitchFamily="34" charset="-122"/>
                 <a:cs typeface="Arial" pitchFamily="34" charset="-120"/>
               </a:rPr>
-              <a:t>PART II · CRITIQUE ⑤ MODEL DEPLOYMENT</a:t>
+              <a:t>PART II · CRITIQUE ⑤ MODEL DEPLOYMENT · DEPLOYMENT, UNCERTAINTY AND AUTOMATION BIAS</a:t>
             </a:r>
             <a:endParaRPr lang="en-US" sz="1200" dirty="0"/>
           </a:p>
@@ -4915,7 +5971,7 @@
         <p:spPr>
           <a:xfrm>
             <a:off x="812800" y="1102320"/>
-            <a:ext cx="10883392" cy="434314"/>
+            <a:ext cx="10883392" cy="434330"/>
           </a:xfrm>
           <a:prstGeom prst="rect">
             <a:avLst/>
@@ -4958,8 +6014,8 @@
         </p:nvSpPr>
         <p:spPr>
           <a:xfrm>
-            <a:off x="812800" y="1714435"/>
-            <a:ext cx="3420533" cy="1330854"/>
+            <a:off x="812800" y="1714450"/>
+            <a:ext cx="3420517" cy="1330871"/>
           </a:xfrm>
           <a:prstGeom prst="roundRect">
             <a:avLst>
@@ -4980,8 +6036,8 @@
         </p:nvSpPr>
         <p:spPr>
           <a:xfrm>
-            <a:off x="990600" y="1892235"/>
-            <a:ext cx="3156881" cy="523214"/>
+            <a:off x="990600" y="1892250"/>
+            <a:ext cx="3156864" cy="523230"/>
           </a:xfrm>
           <a:prstGeom prst="rect">
             <a:avLst/>
@@ -5024,8 +6080,8 @@
         </p:nvSpPr>
         <p:spPr>
           <a:xfrm>
-            <a:off x="990600" y="2440848"/>
-            <a:ext cx="3156881" cy="452041"/>
+            <a:off x="990600" y="2440880"/>
+            <a:ext cx="3156864" cy="452041"/>
           </a:xfrm>
           <a:prstGeom prst="rect">
             <a:avLst/>
@@ -5068,8 +6124,8 @@
         </p:nvSpPr>
         <p:spPr>
           <a:xfrm>
-            <a:off x="4385733" y="1714435"/>
-            <a:ext cx="3420533" cy="1330854"/>
+            <a:off x="4385717" y="1714450"/>
+            <a:ext cx="3420566" cy="1330871"/>
           </a:xfrm>
           <a:prstGeom prst="roundRect">
             <a:avLst>
@@ -5090,8 +6146,8 @@
         </p:nvSpPr>
         <p:spPr>
           <a:xfrm>
-            <a:off x="4563533" y="1892235"/>
-            <a:ext cx="3156881" cy="523214"/>
+            <a:off x="4563517" y="1892250"/>
+            <a:ext cx="3156915" cy="523230"/>
           </a:xfrm>
           <a:prstGeom prst="rect">
             <a:avLst/>
@@ -5134,8 +6190,8 @@
         </p:nvSpPr>
         <p:spPr>
           <a:xfrm>
-            <a:off x="4563533" y="2440848"/>
-            <a:ext cx="3156881" cy="452041"/>
+            <a:off x="4563517" y="2440880"/>
+            <a:ext cx="3156915" cy="452041"/>
           </a:xfrm>
           <a:prstGeom prst="rect">
             <a:avLst/>
@@ -5178,8 +6234,8 @@
         </p:nvSpPr>
         <p:spPr>
           <a:xfrm>
-            <a:off x="7958667" y="1714435"/>
-            <a:ext cx="3420533" cy="1330854"/>
+            <a:off x="7958683" y="1714450"/>
+            <a:ext cx="3420517" cy="1330871"/>
           </a:xfrm>
           <a:prstGeom prst="roundRect">
             <a:avLst>
@@ -5200,8 +6256,8 @@
         </p:nvSpPr>
         <p:spPr>
           <a:xfrm>
-            <a:off x="8136467" y="1892235"/>
-            <a:ext cx="3156881" cy="523214"/>
+            <a:off x="8136483" y="1892250"/>
+            <a:ext cx="3156864" cy="523230"/>
           </a:xfrm>
           <a:prstGeom prst="rect">
             <a:avLst/>
@@ -5244,8 +6300,8 @@
         </p:nvSpPr>
         <p:spPr>
           <a:xfrm>
-            <a:off x="8136467" y="2440848"/>
-            <a:ext cx="3156881" cy="452041"/>
+            <a:off x="8136483" y="2440880"/>
+            <a:ext cx="3156864" cy="452041"/>
           </a:xfrm>
           <a:prstGeom prst="rect">
             <a:avLst/>
@@ -5288,8 +6344,8 @@
         </p:nvSpPr>
         <p:spPr>
           <a:xfrm>
-            <a:off x="812800" y="3248489"/>
-            <a:ext cx="5194300" cy="2796712"/>
+            <a:off x="812800" y="3248521"/>
+            <a:ext cx="5194300" cy="2796679"/>
           </a:xfrm>
           <a:prstGeom prst="roundRect">
             <a:avLst>
@@ -5310,8 +6366,8 @@
         </p:nvSpPr>
         <p:spPr>
           <a:xfrm>
-            <a:off x="990600" y="3426289"/>
-            <a:ext cx="4983861" cy="223507"/>
+            <a:off x="990600" y="3426321"/>
+            <a:ext cx="4983861" cy="223490"/>
           </a:xfrm>
           <a:prstGeom prst="rect">
             <a:avLst/>
@@ -5354,7 +6410,7 @@
         </p:nvSpPr>
         <p:spPr>
           <a:xfrm>
-            <a:off x="1102106" y="3725996"/>
+            <a:off x="1102106" y="3726011"/>
             <a:ext cx="4864735" cy="878681"/>
           </a:xfrm>
           <a:prstGeom prst="rect">
@@ -5462,8 +6518,8 @@
         </p:nvSpPr>
         <p:spPr>
           <a:xfrm>
-            <a:off x="6165850" y="3254839"/>
-            <a:ext cx="5207000" cy="2784012"/>
+            <a:off x="6165850" y="3254871"/>
+            <a:ext cx="5207000" cy="2783979"/>
           </a:xfrm>
           <a:prstGeom prst="roundRect">
             <a:avLst>
@@ -5489,8 +6545,8 @@
         </p:nvSpPr>
         <p:spPr>
           <a:xfrm>
-            <a:off x="6350000" y="3438989"/>
-            <a:ext cx="4983861" cy="223507"/>
+            <a:off x="6350000" y="3439021"/>
+            <a:ext cx="4983861" cy="223490"/>
           </a:xfrm>
           <a:prstGeom prst="rect">
             <a:avLst/>
@@ -5533,7 +6589,7 @@
         </p:nvSpPr>
         <p:spPr>
           <a:xfrm>
-            <a:off x="6461506" y="3738696"/>
+            <a:off x="6461506" y="3738711"/>
             <a:ext cx="4864735" cy="1092002"/>
           </a:xfrm>
           <a:prstGeom prst="rect">
@@ -5648,12 +6704,3740 @@
                 <a:ea typeface="Arial" pitchFamily="34" charset="-122"/>
                 <a:cs typeface="Arial" pitchFamily="34" charset="-120"/>
               </a:rPr>
-              <a:t>No uncertainty, drift or automation-bias plan</a:t>
+              <a:t>No plan for uncertainty, drift, automation or feedback-loop bias</a:t>
             </a:r>
             <a:endParaRPr lang="en-US" sz="1200" dirty="0"/>
           </a:p>
         </p:txBody>
       </p:sp>
+    </p:spTree>
+  </p:cSld>
+  <p:clrMapOvr>
+    <a:masterClrMapping/>
+  </p:clrMapOvr>
+</p:sld>
+</file>
+
+<file path=ppt/slides/slide6.xml><?xml version="1.0" encoding="utf-8"?>
+<p:sld xmlns:a="http://schemas.openxmlformats.org/drawingml/2006/main" xmlns:r="http://schemas.openxmlformats.org/officeDocument/2006/relationships" xmlns:p="http://schemas.openxmlformats.org/presentationml/2006/main">
+  <p:cSld name="Slide 6">
+    <p:bg>
+      <p:bgPr>
+        <a:solidFill>
+          <a:srgbClr val="F7F6F2"/>
+        </a:solidFill>
+      </p:bgPr>
+    </p:bg>
+    <p:spTree>
+      <p:nvGrpSpPr>
+        <p:cNvPr id="1" name=""/>
+        <p:cNvGrpSpPr/>
+        <p:nvPr/>
+      </p:nvGrpSpPr>
+      <p:grpSpPr>
+        <a:xfrm>
+          <a:off x="0" y="0"/>
+          <a:ext cx="0" cy="0"/>
+          <a:chOff x="0" y="0"/>
+          <a:chExt cx="0" cy="0"/>
+        </a:xfrm>
+      </p:grpSpPr>
+      <p:sp>
+        <p:nvSpPr>
+          <p:cNvPr id="2" name="Text 0"/>
+          <p:cNvSpPr/>
+          <p:nvPr/>
+        </p:nvSpPr>
+        <p:spPr>
+          <a:xfrm>
+            <a:off x="812800" y="812800"/>
+            <a:ext cx="10883392" cy="238720"/>
+          </a:xfrm>
+          <a:prstGeom prst="rect">
+            <a:avLst/>
+          </a:prstGeom>
+          <a:noFill/>
+          <a:ln/>
+        </p:spPr>
+        <p:txBody>
+          <a:bodyPr wrap="square" lIns="0" tIns="0" rIns="0" bIns="0" rtlCol="0" anchor="t">
+            <a:normAutofit/>
+          </a:bodyPr>
+          <a:lstStyle/>
+          <a:p>
+            <a:pPr algn="l" indent="0" marL="0">
+              <a:lnSpc>
+                <a:spcPts val="1680"/>
+              </a:lnSpc>
+              <a:buNone/>
+            </a:pPr>
+            <a:r>
+              <a:rPr lang="en-US" sz="1200" b="1" spc="100" kern="0" dirty="0">
+                <a:solidFill>
+                  <a:srgbClr val="B5521B"/>
+                </a:solidFill>
+                <a:latin typeface="Arial" pitchFamily="34" charset="0"/>
+                <a:ea typeface="Arial" pitchFamily="34" charset="-122"/>
+                <a:cs typeface="Arial" pitchFamily="34" charset="-120"/>
+              </a:rPr>
+              <a:t>PART II · CRITIQUE SUMMARY · LECTURE 9 CHECKLIST</a:t>
+            </a:r>
+            <a:endParaRPr lang="en-US" sz="1200" dirty="0"/>
+          </a:p>
+        </p:txBody>
+      </p:sp>
+      <p:sp>
+        <p:nvSpPr>
+          <p:cNvPr id="3" name="Text 1"/>
+          <p:cNvSpPr/>
+          <p:nvPr>
+            <p:ph type="title"/>
+          </p:nvPr>
+        </p:nvSpPr>
+        <p:spPr>
+          <a:xfrm>
+            <a:off x="812800" y="1102320"/>
+            <a:ext cx="10883392" cy="434330"/>
+          </a:xfrm>
+          <a:prstGeom prst="rect">
+            <a:avLst/>
+          </a:prstGeom>
+          <a:noFill/>
+          <a:ln/>
+        </p:spPr>
+        <p:txBody>
+          <a:bodyPr wrap="square" lIns="0" tIns="0" rIns="0" bIns="0" rtlCol="0" anchor="t">
+            <a:normAutofit/>
+          </a:bodyPr>
+          <a:lstStyle/>
+          <a:p>
+            <a:pPr algn="l" indent="0" marL="0">
+              <a:lnSpc>
+                <a:spcPts val="3220"/>
+              </a:lnSpc>
+              <a:buNone/>
+            </a:pPr>
+            <a:r>
+              <a:rPr lang="en-US" sz="2800" b="1" i="0" dirty="0">
+                <a:solidFill>
+                  <a:srgbClr val="14213D"/>
+                </a:solidFill>
+                <a:latin typeface="Georgia" pitchFamily="18" charset="0"/>
+                <a:ea typeface="Georgia" pitchFamily="18" charset="-122"/>
+                <a:cs typeface="Georgia" pitchFamily="18" charset="-120"/>
+              </a:rPr>
+              <a:t>Where the study stands on the checklist</a:t>
+            </a:r>
+            <a:endParaRPr lang="en-US" sz="2800" dirty="0"/>
+          </a:p>
+        </p:txBody>
+      </p:sp>
+      <p:graphicFrame>
+        <p:nvGraphicFramePr>
+          <p:cNvPr id="4" name="Table 0"/>
+          <p:cNvGraphicFramePr>
+            <a:graphicFrameLocks noGrp="1"/>
+          </p:cNvGraphicFramePr>
+          <p:nvPr>
+            <p:extLst>
+              <p:ext uri="{D42A27DB-BD31-4B8C-83A1-F6EECF244321}">
+                <p14:modId xmlns:p14="http://schemas.microsoft.com/office/powerpoint/2010/main" val="1579011935"/>
+              </p:ext>
+            </p:extLst>
+          </p:nvPr>
+        </p:nvGraphicFramePr>
+        <p:xfrm>
+          <a:off x="825500" y="1676350"/>
+          <a:ext cx="10553700" cy="4324846"/>
+        </p:xfrm>
+        <a:graphic>
+          <a:graphicData uri="http://schemas.openxmlformats.org/drawingml/2006/table">
+            <a:tbl>
+              <a:tblPr/>
+              <a:tblGrid>
+                <a:gridCol w="633222"/>
+                <a:gridCol w="2955036"/>
+                <a:gridCol w="1266444"/>
+                <a:gridCol w="5698998"/>
+              </a:tblGrid>
+              <a:tr h="332680">
+                <a:tc>
+                  <a:txBody>
+                    <a:bodyPr/>
+                    <a:lstStyle/>
+                    <a:p>
+                      <a:pPr indent="0" marL="0">
+                        <a:lnSpc>
+                          <a:spcPts val="1680"/>
+                        </a:lnSpc>
+                        <a:buNone/>
+                      </a:pPr>
+                      <a:r>
+                        <a:rPr lang="en-US" sz="1200" b="1" dirty="0">
+                          <a:solidFill>
+                            <a:srgbClr val="3E4A5C"/>
+                          </a:solidFill>
+                          <a:latin typeface="Arial" pitchFamily="34" charset="0"/>
+                          <a:ea typeface="Arial" pitchFamily="34" charset="-122"/>
+                          <a:cs typeface="Arial" pitchFamily="34" charset="-120"/>
+                        </a:rPr>
+                        <a:t>Stage</a:t>
+                      </a:r>
+                      <a:endParaRPr lang="en-US" sz="1200" dirty="0">
+                        <a:latin typeface="Arial" charset="0"/>
+                        <a:ea typeface="Arial" charset="0"/>
+                        <a:cs typeface="Arial" charset="0"/>
+                      </a:endParaRPr>
+                    </a:p>
+                  </a:txBody>
+                  <a:tcPr marL="53340" marR="53340" marT="53340" marB="53340" anchor="t">
+                    <a:lnL w="12700" cap="flat" cmpd="sng" algn="ctr">
+                      <a:solidFill>
+                        <a:srgbClr val="C5C4C1"/>
+                      </a:solidFill>
+                      <a:prstDash val="solid"/>
+                      <a:round/>
+                      <a:headEnd type="none" w="med" len="med"/>
+                      <a:tailEnd type="none" w="med" len="med"/>
+                    </a:lnL>
+                    <a:lnR w="12700" cap="flat" cmpd="sng" algn="ctr">
+                      <a:solidFill>
+                        <a:srgbClr val="B7B6B3"/>
+                      </a:solidFill>
+                      <a:prstDash val="solid"/>
+                      <a:round/>
+                      <a:headEnd type="none" w="med" len="med"/>
+                      <a:tailEnd type="none" w="med" len="med"/>
+                    </a:lnR>
+                    <a:lnT w="12700" cap="flat" cmpd="sng" algn="ctr">
+                      <a:solidFill>
+                        <a:srgbClr val="C5C4C1"/>
+                      </a:solidFill>
+                      <a:prstDash val="solid"/>
+                      <a:round/>
+                      <a:headEnd type="none" w="med" len="med"/>
+                      <a:tailEnd type="none" w="med" len="med"/>
+                    </a:lnT>
+                    <a:lnB w="12700" cap="flat" cmpd="sng" algn="ctr">
+                      <a:solidFill>
+                        <a:srgbClr val="B7B6B3"/>
+                      </a:solidFill>
+                      <a:prstDash val="solid"/>
+                      <a:round/>
+                      <a:headEnd type="none" w="med" len="med"/>
+                      <a:tailEnd type="none" w="med" len="med"/>
+                    </a:lnB>
+                    <a:solidFill>
+                      <a:srgbClr val="E5E4E0"/>
+                    </a:solidFill>
+                  </a:tcPr>
+                </a:tc>
+                <a:tc>
+                  <a:txBody>
+                    <a:bodyPr/>
+                    <a:lstStyle/>
+                    <a:p>
+                      <a:pPr indent="0" marL="0">
+                        <a:lnSpc>
+                          <a:spcPts val="1680"/>
+                        </a:lnSpc>
+                        <a:buNone/>
+                      </a:pPr>
+                      <a:r>
+                        <a:rPr lang="en-US" sz="1200" b="1" dirty="0">
+                          <a:solidFill>
+                            <a:srgbClr val="3E4A5C"/>
+                          </a:solidFill>
+                          <a:latin typeface="Arial" pitchFamily="34" charset="0"/>
+                          <a:ea typeface="Arial" pitchFamily="34" charset="-122"/>
+                          <a:cs typeface="Arial" pitchFamily="34" charset="-120"/>
+                        </a:rPr>
+                        <a:t>Question</a:t>
+                      </a:r>
+                      <a:endParaRPr lang="en-US" sz="1200" dirty="0">
+                        <a:latin typeface="Arial" charset="0"/>
+                        <a:ea typeface="Arial" charset="0"/>
+                        <a:cs typeface="Arial" charset="0"/>
+                      </a:endParaRPr>
+                    </a:p>
+                  </a:txBody>
+                  <a:tcPr marL="53340" marR="53340" marT="53340" marB="53340" anchor="t">
+                    <a:lnL w="12700" cap="flat" cmpd="sng" algn="ctr">
+                      <a:solidFill>
+                        <a:srgbClr val="B7B6B3"/>
+                      </a:solidFill>
+                      <a:prstDash val="solid"/>
+                      <a:round/>
+                      <a:headEnd type="none" w="med" len="med"/>
+                      <a:tailEnd type="none" w="med" len="med"/>
+                    </a:lnL>
+                    <a:lnR w="12700" cap="flat" cmpd="sng" algn="ctr">
+                      <a:solidFill>
+                        <a:srgbClr val="B7B6B3"/>
+                      </a:solidFill>
+                      <a:prstDash val="solid"/>
+                      <a:round/>
+                      <a:headEnd type="none" w="med" len="med"/>
+                      <a:tailEnd type="none" w="med" len="med"/>
+                    </a:lnR>
+                    <a:lnT w="12700" cap="flat" cmpd="sng" algn="ctr">
+                      <a:solidFill>
+                        <a:srgbClr val="C5C4C1"/>
+                      </a:solidFill>
+                      <a:prstDash val="solid"/>
+                      <a:round/>
+                      <a:headEnd type="none" w="med" len="med"/>
+                      <a:tailEnd type="none" w="med" len="med"/>
+                    </a:lnT>
+                    <a:lnB w="12700" cap="flat" cmpd="sng" algn="ctr">
+                      <a:solidFill>
+                        <a:srgbClr val="B7B6B3"/>
+                      </a:solidFill>
+                      <a:prstDash val="solid"/>
+                      <a:round/>
+                      <a:headEnd type="none" w="med" len="med"/>
+                      <a:tailEnd type="none" w="med" len="med"/>
+                    </a:lnB>
+                    <a:solidFill>
+                      <a:srgbClr val="E5E4E0"/>
+                    </a:solidFill>
+                  </a:tcPr>
+                </a:tc>
+                <a:tc>
+                  <a:txBody>
+                    <a:bodyPr/>
+                    <a:lstStyle/>
+                    <a:p>
+                      <a:pPr indent="0" marL="0">
+                        <a:lnSpc>
+                          <a:spcPts val="1680"/>
+                        </a:lnSpc>
+                        <a:buNone/>
+                      </a:pPr>
+                      <a:r>
+                        <a:rPr lang="en-US" sz="1200" b="1" dirty="0">
+                          <a:solidFill>
+                            <a:srgbClr val="3E4A5C"/>
+                          </a:solidFill>
+                          <a:latin typeface="Arial" pitchFamily="34" charset="0"/>
+                          <a:ea typeface="Arial" pitchFamily="34" charset="-122"/>
+                          <a:cs typeface="Arial" pitchFamily="34" charset="-120"/>
+                        </a:rPr>
+                        <a:t>Verdict</a:t>
+                      </a:r>
+                      <a:endParaRPr lang="en-US" sz="1200" dirty="0">
+                        <a:latin typeface="Arial" charset="0"/>
+                        <a:ea typeface="Arial" charset="0"/>
+                        <a:cs typeface="Arial" charset="0"/>
+                      </a:endParaRPr>
+                    </a:p>
+                  </a:txBody>
+                  <a:tcPr marL="53340" marR="53340" marT="53340" marB="53340" anchor="t">
+                    <a:lnL w="12700" cap="flat" cmpd="sng" algn="ctr">
+                      <a:solidFill>
+                        <a:srgbClr val="B7B6B3"/>
+                      </a:solidFill>
+                      <a:prstDash val="solid"/>
+                      <a:round/>
+                      <a:headEnd type="none" w="med" len="med"/>
+                      <a:tailEnd type="none" w="med" len="med"/>
+                    </a:lnL>
+                    <a:lnR w="12700" cap="flat" cmpd="sng" algn="ctr">
+                      <a:solidFill>
+                        <a:srgbClr val="B7B6B3"/>
+                      </a:solidFill>
+                      <a:prstDash val="solid"/>
+                      <a:round/>
+                      <a:headEnd type="none" w="med" len="med"/>
+                      <a:tailEnd type="none" w="med" len="med"/>
+                    </a:lnR>
+                    <a:lnT w="12700" cap="flat" cmpd="sng" algn="ctr">
+                      <a:solidFill>
+                        <a:srgbClr val="C5C4C1"/>
+                      </a:solidFill>
+                      <a:prstDash val="solid"/>
+                      <a:round/>
+                      <a:headEnd type="none" w="med" len="med"/>
+                      <a:tailEnd type="none" w="med" len="med"/>
+                    </a:lnT>
+                    <a:lnB w="12700" cap="flat" cmpd="sng" algn="ctr">
+                      <a:solidFill>
+                        <a:srgbClr val="B7B6B3"/>
+                      </a:solidFill>
+                      <a:prstDash val="solid"/>
+                      <a:round/>
+                      <a:headEnd type="none" w="med" len="med"/>
+                      <a:tailEnd type="none" w="med" len="med"/>
+                    </a:lnB>
+                    <a:solidFill>
+                      <a:srgbClr val="E5E4E0"/>
+                    </a:solidFill>
+                  </a:tcPr>
+                </a:tc>
+                <a:tc>
+                  <a:txBody>
+                    <a:bodyPr/>
+                    <a:lstStyle/>
+                    <a:p>
+                      <a:pPr indent="0" marL="0">
+                        <a:lnSpc>
+                          <a:spcPts val="1680"/>
+                        </a:lnSpc>
+                        <a:buNone/>
+                      </a:pPr>
+                      <a:r>
+                        <a:rPr lang="en-US" sz="1200" b="1" dirty="0">
+                          <a:solidFill>
+                            <a:srgbClr val="3E4A5C"/>
+                          </a:solidFill>
+                          <a:latin typeface="Arial" pitchFamily="34" charset="0"/>
+                          <a:ea typeface="Arial" pitchFamily="34" charset="-122"/>
+                          <a:cs typeface="Arial" pitchFamily="34" charset="-120"/>
+                        </a:rPr>
+                        <a:t>Evidence</a:t>
+                      </a:r>
+                      <a:endParaRPr lang="en-US" sz="1200" dirty="0">
+                        <a:latin typeface="Arial" charset="0"/>
+                        <a:ea typeface="Arial" charset="0"/>
+                        <a:cs typeface="Arial" charset="0"/>
+                      </a:endParaRPr>
+                    </a:p>
+                  </a:txBody>
+                  <a:tcPr marL="53340" marR="53340" marT="53340" marB="53340" anchor="t">
+                    <a:lnL w="12700" cap="flat" cmpd="sng" algn="ctr">
+                      <a:solidFill>
+                        <a:srgbClr val="B7B6B3"/>
+                      </a:solidFill>
+                      <a:prstDash val="solid"/>
+                      <a:round/>
+                      <a:headEnd type="none" w="med" len="med"/>
+                      <a:tailEnd type="none" w="med" len="med"/>
+                    </a:lnL>
+                    <a:lnR w="12700" cap="flat" cmpd="sng" algn="ctr">
+                      <a:solidFill>
+                        <a:srgbClr val="B7B6B3"/>
+                      </a:solidFill>
+                      <a:prstDash val="solid"/>
+                      <a:round/>
+                      <a:headEnd type="none" w="med" len="med"/>
+                      <a:tailEnd type="none" w="med" len="med"/>
+                    </a:lnR>
+                    <a:lnT w="12700" cap="flat" cmpd="sng" algn="ctr">
+                      <a:solidFill>
+                        <a:srgbClr val="C5C4C1"/>
+                      </a:solidFill>
+                      <a:prstDash val="solid"/>
+                      <a:round/>
+                      <a:headEnd type="none" w="med" len="med"/>
+                      <a:tailEnd type="none" w="med" len="med"/>
+                    </a:lnT>
+                    <a:lnB w="12700" cap="flat" cmpd="sng" algn="ctr">
+                      <a:solidFill>
+                        <a:srgbClr val="B7B6B3"/>
+                      </a:solidFill>
+                      <a:prstDash val="solid"/>
+                      <a:round/>
+                      <a:headEnd type="none" w="med" len="med"/>
+                      <a:tailEnd type="none" w="med" len="med"/>
+                    </a:lnB>
+                    <a:solidFill>
+                      <a:srgbClr val="E5E4E0"/>
+                    </a:solidFill>
+                  </a:tcPr>
+                </a:tc>
+              </a:tr>
+              <a:tr h="332680">
+                <a:tc>
+                  <a:txBody>
+                    <a:bodyPr/>
+                    <a:lstStyle/>
+                    <a:p>
+                      <a:pPr indent="0" marL="0">
+                        <a:lnSpc>
+                          <a:spcPts val="1680"/>
+                        </a:lnSpc>
+                        <a:buNone/>
+                      </a:pPr>
+                      <a:r>
+                        <a:rPr lang="en-US" sz="1200" dirty="0">
+                          <a:solidFill>
+                            <a:srgbClr val="3E4A5C"/>
+                          </a:solidFill>
+                          <a:latin typeface="Arial" pitchFamily="34" charset="0"/>
+                          <a:ea typeface="Arial" pitchFamily="34" charset="-122"/>
+                          <a:cs typeface="Arial" pitchFamily="34" charset="-120"/>
+                        </a:rPr>
+                        <a:t>①</a:t>
+                      </a:r>
+                      <a:endParaRPr lang="en-US" sz="1200" dirty="0">
+                        <a:latin typeface="Arial" charset="0"/>
+                        <a:ea typeface="Arial" charset="0"/>
+                        <a:cs typeface="Arial" charset="0"/>
+                      </a:endParaRPr>
+                    </a:p>
+                  </a:txBody>
+                  <a:tcPr marL="53340" marR="53340" marT="53340" marB="53340" anchor="t">
+                    <a:lnL w="12700" cap="flat" cmpd="sng" algn="ctr">
+                      <a:solidFill>
+                        <a:srgbClr val="C5C4C1"/>
+                      </a:solidFill>
+                      <a:prstDash val="solid"/>
+                      <a:round/>
+                      <a:headEnd type="none" w="med" len="med"/>
+                      <a:tailEnd type="none" w="med" len="med"/>
+                    </a:lnL>
+                    <a:lnR w="12700" cap="flat" cmpd="sng" algn="ctr">
+                      <a:solidFill>
+                        <a:srgbClr val="C5C4C1"/>
+                      </a:solidFill>
+                      <a:prstDash val="solid"/>
+                      <a:round/>
+                      <a:headEnd type="none" w="med" len="med"/>
+                      <a:tailEnd type="none" w="med" len="med"/>
+                    </a:lnR>
+                    <a:lnT w="12700" cap="flat" cmpd="sng" algn="ctr">
+                      <a:solidFill>
+                        <a:srgbClr val="B7B6B3"/>
+                      </a:solidFill>
+                      <a:prstDash val="solid"/>
+                      <a:round/>
+                      <a:headEnd type="none" w="med" len="med"/>
+                      <a:tailEnd type="none" w="med" len="med"/>
+                    </a:lnT>
+                    <a:lnB w="12700" cap="flat" cmpd="sng" algn="ctr">
+                      <a:solidFill>
+                        <a:srgbClr val="C5C4C1"/>
+                      </a:solidFill>
+                      <a:prstDash val="solid"/>
+                      <a:round/>
+                      <a:headEnd type="none" w="med" len="med"/>
+                      <a:tailEnd type="none" w="med" len="med"/>
+                    </a:lnB>
+                  </a:tcPr>
+                </a:tc>
+                <a:tc>
+                  <a:txBody>
+                    <a:bodyPr/>
+                    <a:lstStyle/>
+                    <a:p>
+                      <a:pPr indent="0" marL="0">
+                        <a:lnSpc>
+                          <a:spcPts val="1680"/>
+                        </a:lnSpc>
+                        <a:buNone/>
+                      </a:pPr>
+                      <a:r>
+                        <a:rPr lang="en-US" sz="1200" dirty="0">
+                          <a:solidFill>
+                            <a:srgbClr val="3E4A5C"/>
+                          </a:solidFill>
+                          <a:latin typeface="Arial" pitchFamily="34" charset="0"/>
+                          <a:ea typeface="Arial" pitchFamily="34" charset="-122"/>
+                          <a:cs typeface="Arial" pitchFamily="34" charset="-120"/>
+                        </a:rPr>
+                        <a:t>Approved, consented, registered?</a:t>
+                      </a:r>
+                      <a:endParaRPr lang="en-US" sz="1200" dirty="0">
+                        <a:latin typeface="Arial" charset="0"/>
+                        <a:ea typeface="Arial" charset="0"/>
+                        <a:cs typeface="Arial" charset="0"/>
+                      </a:endParaRPr>
+                    </a:p>
+                  </a:txBody>
+                  <a:tcPr marL="53340" marR="53340" marT="53340" marB="53340" anchor="t">
+                    <a:lnL w="12700" cap="flat" cmpd="sng" algn="ctr">
+                      <a:solidFill>
+                        <a:srgbClr val="C5C4C1"/>
+                      </a:solidFill>
+                      <a:prstDash val="solid"/>
+                      <a:round/>
+                      <a:headEnd type="none" w="med" len="med"/>
+                      <a:tailEnd type="none" w="med" len="med"/>
+                    </a:lnL>
+                    <a:lnR w="12700" cap="flat" cmpd="sng" algn="ctr">
+                      <a:solidFill>
+                        <a:srgbClr val="C5C4C1"/>
+                      </a:solidFill>
+                      <a:prstDash val="solid"/>
+                      <a:round/>
+                      <a:headEnd type="none" w="med" len="med"/>
+                      <a:tailEnd type="none" w="med" len="med"/>
+                    </a:lnR>
+                    <a:lnT w="12700" cap="flat" cmpd="sng" algn="ctr">
+                      <a:solidFill>
+                        <a:srgbClr val="B7B6B3"/>
+                      </a:solidFill>
+                      <a:prstDash val="solid"/>
+                      <a:round/>
+                      <a:headEnd type="none" w="med" len="med"/>
+                      <a:tailEnd type="none" w="med" len="med"/>
+                    </a:lnT>
+                    <a:lnB w="12700" cap="flat" cmpd="sng" algn="ctr">
+                      <a:solidFill>
+                        <a:srgbClr val="C5C4C1"/>
+                      </a:solidFill>
+                      <a:prstDash val="solid"/>
+                      <a:round/>
+                      <a:headEnd type="none" w="med" len="med"/>
+                      <a:tailEnd type="none" w="med" len="med"/>
+                    </a:lnB>
+                  </a:tcPr>
+                </a:tc>
+                <a:tc>
+                  <a:txBody>
+                    <a:bodyPr/>
+                    <a:lstStyle/>
+                    <a:p>
+                      <a:pPr indent="0" marL="0">
+                        <a:lnSpc>
+                          <a:spcPts val="1680"/>
+                        </a:lnSpc>
+                        <a:buNone/>
+                      </a:pPr>
+                      <a:r>
+                        <a:rPr lang="en-US" sz="1200" dirty="0">
+                          <a:solidFill>
+                            <a:srgbClr val="3E4A5C"/>
+                          </a:solidFill>
+                          <a:latin typeface="Arial" pitchFamily="34" charset="0"/>
+                          <a:ea typeface="Arial" pitchFamily="34" charset="-122"/>
+                          <a:cs typeface="Arial" pitchFamily="34" charset="-120"/>
+                        </a:rPr>
+                        <a:t>Partly</a:t>
+                      </a:r>
+                      <a:endParaRPr lang="en-US" sz="1200" dirty="0">
+                        <a:latin typeface="Arial" charset="0"/>
+                        <a:ea typeface="Arial" charset="0"/>
+                        <a:cs typeface="Arial" charset="0"/>
+                      </a:endParaRPr>
+                    </a:p>
+                  </a:txBody>
+                  <a:tcPr marL="53340" marR="53340" marT="53340" marB="53340" anchor="t">
+                    <a:lnL w="12700" cap="flat" cmpd="sng" algn="ctr">
+                      <a:solidFill>
+                        <a:srgbClr val="C5C4C1"/>
+                      </a:solidFill>
+                      <a:prstDash val="solid"/>
+                      <a:round/>
+                      <a:headEnd type="none" w="med" len="med"/>
+                      <a:tailEnd type="none" w="med" len="med"/>
+                    </a:lnL>
+                    <a:lnR w="12700" cap="flat" cmpd="sng" algn="ctr">
+                      <a:solidFill>
+                        <a:srgbClr val="C5C4C1"/>
+                      </a:solidFill>
+                      <a:prstDash val="solid"/>
+                      <a:round/>
+                      <a:headEnd type="none" w="med" len="med"/>
+                      <a:tailEnd type="none" w="med" len="med"/>
+                    </a:lnR>
+                    <a:lnT w="12700" cap="flat" cmpd="sng" algn="ctr">
+                      <a:solidFill>
+                        <a:srgbClr val="B7B6B3"/>
+                      </a:solidFill>
+                      <a:prstDash val="solid"/>
+                      <a:round/>
+                      <a:headEnd type="none" w="med" len="med"/>
+                      <a:tailEnd type="none" w="med" len="med"/>
+                    </a:lnT>
+                    <a:lnB w="12700" cap="flat" cmpd="sng" algn="ctr">
+                      <a:solidFill>
+                        <a:srgbClr val="C5C4C1"/>
+                      </a:solidFill>
+                      <a:prstDash val="solid"/>
+                      <a:round/>
+                      <a:headEnd type="none" w="med" len="med"/>
+                      <a:tailEnd type="none" w="med" len="med"/>
+                    </a:lnB>
+                  </a:tcPr>
+                </a:tc>
+                <a:tc>
+                  <a:txBody>
+                    <a:bodyPr/>
+                    <a:lstStyle/>
+                    <a:p>
+                      <a:pPr indent="0" marL="0">
+                        <a:lnSpc>
+                          <a:spcPts val="1680"/>
+                        </a:lnSpc>
+                        <a:buNone/>
+                      </a:pPr>
+                      <a:r>
+                        <a:rPr lang="en-US" sz="1200" dirty="0">
+                          <a:solidFill>
+                            <a:srgbClr val="3E4A5C"/>
+                          </a:solidFill>
+                          <a:latin typeface="Arial" pitchFamily="34" charset="0"/>
+                          <a:ea typeface="Arial" pitchFamily="34" charset="-122"/>
+                          <a:cs typeface="Arial" pitchFamily="34" charset="-120"/>
+                        </a:rPr>
+                        <a:t>CERSES approval; consent waived; not registered</a:t>
+                      </a:r>
+                      <a:endParaRPr lang="en-US" sz="1200" dirty="0">
+                        <a:latin typeface="Arial" charset="0"/>
+                        <a:ea typeface="Arial" charset="0"/>
+                        <a:cs typeface="Arial" charset="0"/>
+                      </a:endParaRPr>
+                    </a:p>
+                  </a:txBody>
+                  <a:tcPr marL="53340" marR="53340" marT="53340" marB="53340" anchor="t">
+                    <a:lnL w="12700" cap="flat" cmpd="sng" algn="ctr">
+                      <a:solidFill>
+                        <a:srgbClr val="C5C4C1"/>
+                      </a:solidFill>
+                      <a:prstDash val="solid"/>
+                      <a:round/>
+                      <a:headEnd type="none" w="med" len="med"/>
+                      <a:tailEnd type="none" w="med" len="med"/>
+                    </a:lnL>
+                    <a:lnR w="12700" cap="flat" cmpd="sng" algn="ctr">
+                      <a:solidFill>
+                        <a:srgbClr val="C5C4C1"/>
+                      </a:solidFill>
+                      <a:prstDash val="solid"/>
+                      <a:round/>
+                      <a:headEnd type="none" w="med" len="med"/>
+                      <a:tailEnd type="none" w="med" len="med"/>
+                    </a:lnR>
+                    <a:lnT w="12700" cap="flat" cmpd="sng" algn="ctr">
+                      <a:solidFill>
+                        <a:srgbClr val="B7B6B3"/>
+                      </a:solidFill>
+                      <a:prstDash val="solid"/>
+                      <a:round/>
+                      <a:headEnd type="none" w="med" len="med"/>
+                      <a:tailEnd type="none" w="med" len="med"/>
+                    </a:lnT>
+                    <a:lnB w="12700" cap="flat" cmpd="sng" algn="ctr">
+                      <a:solidFill>
+                        <a:srgbClr val="C5C4C1"/>
+                      </a:solidFill>
+                      <a:prstDash val="solid"/>
+                      <a:round/>
+                      <a:headEnd type="none" w="med" len="med"/>
+                      <a:tailEnd type="none" w="med" len="med"/>
+                    </a:lnB>
+                  </a:tcPr>
+                </a:tc>
+              </a:tr>
+              <a:tr h="332680">
+                <a:tc>
+                  <a:txBody>
+                    <a:bodyPr/>
+                    <a:lstStyle/>
+                    <a:p>
+                      <a:pPr indent="0" marL="0">
+                        <a:lnSpc>
+                          <a:spcPts val="1680"/>
+                        </a:lnSpc>
+                        <a:buNone/>
+                      </a:pPr>
+                      <a:r>
+                        <a:rPr lang="en-US" sz="1200" dirty="0">
+                          <a:solidFill>
+                            <a:srgbClr val="3E4A5C"/>
+                          </a:solidFill>
+                          <a:latin typeface="Arial" pitchFamily="34" charset="0"/>
+                          <a:ea typeface="Arial" pitchFamily="34" charset="-122"/>
+                          <a:cs typeface="Arial" pitchFamily="34" charset="-120"/>
+                        </a:rPr>
+                        <a:t>①</a:t>
+                      </a:r>
+                      <a:endParaRPr lang="en-US" sz="1200" dirty="0">
+                        <a:latin typeface="Arial" charset="0"/>
+                        <a:ea typeface="Arial" charset="0"/>
+                        <a:cs typeface="Arial" charset="0"/>
+                      </a:endParaRPr>
+                    </a:p>
+                  </a:txBody>
+                  <a:tcPr marL="53340" marR="53340" marT="53340" marB="53340" anchor="t">
+                    <a:lnL w="12700" cap="flat" cmpd="sng" algn="ctr">
+                      <a:solidFill>
+                        <a:srgbClr val="C5C4C1"/>
+                      </a:solidFill>
+                      <a:prstDash val="solid"/>
+                      <a:round/>
+                      <a:headEnd type="none" w="med" len="med"/>
+                      <a:tailEnd type="none" w="med" len="med"/>
+                    </a:lnL>
+                    <a:lnR w="12700" cap="flat" cmpd="sng" algn="ctr">
+                      <a:solidFill>
+                        <a:srgbClr val="C5C4C1"/>
+                      </a:solidFill>
+                      <a:prstDash val="solid"/>
+                      <a:round/>
+                      <a:headEnd type="none" w="med" len="med"/>
+                      <a:tailEnd type="none" w="med" len="med"/>
+                    </a:lnR>
+                    <a:lnT w="12700" cap="flat" cmpd="sng" algn="ctr">
+                      <a:solidFill>
+                        <a:srgbClr val="C5C4C1"/>
+                      </a:solidFill>
+                      <a:prstDash val="solid"/>
+                      <a:round/>
+                      <a:headEnd type="none" w="med" len="med"/>
+                      <a:tailEnd type="none" w="med" len="med"/>
+                    </a:lnT>
+                    <a:lnB w="12700" cap="flat" cmpd="sng" algn="ctr">
+                      <a:solidFill>
+                        <a:srgbClr val="C5C4C1"/>
+                      </a:solidFill>
+                      <a:prstDash val="solid"/>
+                      <a:round/>
+                      <a:headEnd type="none" w="med" len="med"/>
+                      <a:tailEnd type="none" w="med" len="med"/>
+                    </a:lnB>
+                  </a:tcPr>
+                </a:tc>
+                <a:tc>
+                  <a:txBody>
+                    <a:bodyPr/>
+                    <a:lstStyle/>
+                    <a:p>
+                      <a:pPr indent="0" marL="0">
+                        <a:lnSpc>
+                          <a:spcPts val="1680"/>
+                        </a:lnSpc>
+                        <a:buNone/>
+                      </a:pPr>
+                      <a:r>
+                        <a:rPr lang="en-US" sz="1200" dirty="0">
+                          <a:solidFill>
+                            <a:srgbClr val="3E4A5C"/>
+                          </a:solidFill>
+                          <a:latin typeface="Arial" pitchFamily="34" charset="0"/>
+                          <a:ea typeface="Arial" pitchFamily="34" charset="-122"/>
+                          <a:cs typeface="Arial" pitchFamily="34" charset="-120"/>
+                        </a:rPr>
+                        <a:t>Sources described, representative?</a:t>
+                      </a:r>
+                      <a:endParaRPr lang="en-US" sz="1200" dirty="0">
+                        <a:latin typeface="Arial" charset="0"/>
+                        <a:ea typeface="Arial" charset="0"/>
+                        <a:cs typeface="Arial" charset="0"/>
+                      </a:endParaRPr>
+                    </a:p>
+                  </a:txBody>
+                  <a:tcPr marL="53340" marR="53340" marT="53340" marB="53340" anchor="t">
+                    <a:lnL w="12700" cap="flat" cmpd="sng" algn="ctr">
+                      <a:solidFill>
+                        <a:srgbClr val="C5C4C1"/>
+                      </a:solidFill>
+                      <a:prstDash val="solid"/>
+                      <a:round/>
+                      <a:headEnd type="none" w="med" len="med"/>
+                      <a:tailEnd type="none" w="med" len="med"/>
+                    </a:lnL>
+                    <a:lnR w="12700" cap="flat" cmpd="sng" algn="ctr">
+                      <a:solidFill>
+                        <a:srgbClr val="C5C4C1"/>
+                      </a:solidFill>
+                      <a:prstDash val="solid"/>
+                      <a:round/>
+                      <a:headEnd type="none" w="med" len="med"/>
+                      <a:tailEnd type="none" w="med" len="med"/>
+                    </a:lnR>
+                    <a:lnT w="12700" cap="flat" cmpd="sng" algn="ctr">
+                      <a:solidFill>
+                        <a:srgbClr val="C5C4C1"/>
+                      </a:solidFill>
+                      <a:prstDash val="solid"/>
+                      <a:round/>
+                      <a:headEnd type="none" w="med" len="med"/>
+                      <a:tailEnd type="none" w="med" len="med"/>
+                    </a:lnT>
+                    <a:lnB w="12700" cap="flat" cmpd="sng" algn="ctr">
+                      <a:solidFill>
+                        <a:srgbClr val="C5C4C1"/>
+                      </a:solidFill>
+                      <a:prstDash val="solid"/>
+                      <a:round/>
+                      <a:headEnd type="none" w="med" len="med"/>
+                      <a:tailEnd type="none" w="med" len="med"/>
+                    </a:lnB>
+                  </a:tcPr>
+                </a:tc>
+                <a:tc>
+                  <a:txBody>
+                    <a:bodyPr/>
+                    <a:lstStyle/>
+                    <a:p>
+                      <a:pPr indent="0" marL="0">
+                        <a:lnSpc>
+                          <a:spcPts val="1680"/>
+                        </a:lnSpc>
+                        <a:buNone/>
+                      </a:pPr>
+                      <a:r>
+                        <a:rPr lang="en-US" sz="1200" dirty="0">
+                          <a:solidFill>
+                            <a:srgbClr val="B5521B"/>
+                          </a:solidFill>
+                          <a:latin typeface="Arial" pitchFamily="34" charset="0"/>
+                          <a:ea typeface="Arial" pitchFamily="34" charset="-122"/>
+                          <a:cs typeface="Arial" pitchFamily="34" charset="-120"/>
+                        </a:rPr>
+                        <a:t>Not met</a:t>
+                      </a:r>
+                      <a:endParaRPr lang="en-US" sz="1200" dirty="0">
+                        <a:latin typeface="Arial" charset="0"/>
+                        <a:ea typeface="Arial" charset="0"/>
+                        <a:cs typeface="Arial" charset="0"/>
+                      </a:endParaRPr>
+                    </a:p>
+                  </a:txBody>
+                  <a:tcPr marL="53340" marR="53340" marT="53340" marB="53340" anchor="t">
+                    <a:lnL w="12700" cap="flat" cmpd="sng" algn="ctr">
+                      <a:solidFill>
+                        <a:srgbClr val="C5C4C1"/>
+                      </a:solidFill>
+                      <a:prstDash val="solid"/>
+                      <a:round/>
+                      <a:headEnd type="none" w="med" len="med"/>
+                      <a:tailEnd type="none" w="med" len="med"/>
+                    </a:lnL>
+                    <a:lnR w="12700" cap="flat" cmpd="sng" algn="ctr">
+                      <a:solidFill>
+                        <a:srgbClr val="C5C4C1"/>
+                      </a:solidFill>
+                      <a:prstDash val="solid"/>
+                      <a:round/>
+                      <a:headEnd type="none" w="med" len="med"/>
+                      <a:tailEnd type="none" w="med" len="med"/>
+                    </a:lnR>
+                    <a:lnT w="12700" cap="flat" cmpd="sng" algn="ctr">
+                      <a:solidFill>
+                        <a:srgbClr val="C5C4C1"/>
+                      </a:solidFill>
+                      <a:prstDash val="solid"/>
+                      <a:round/>
+                      <a:headEnd type="none" w="med" len="med"/>
+                      <a:tailEnd type="none" w="med" len="med"/>
+                    </a:lnT>
+                    <a:lnB w="12700" cap="flat" cmpd="sng" algn="ctr">
+                      <a:solidFill>
+                        <a:srgbClr val="C5C4C1"/>
+                      </a:solidFill>
+                      <a:prstDash val="solid"/>
+                      <a:round/>
+                      <a:headEnd type="none" w="med" len="med"/>
+                      <a:tailEnd type="none" w="med" len="med"/>
+                    </a:lnB>
+                  </a:tcPr>
+                </a:tc>
+                <a:tc>
+                  <a:txBody>
+                    <a:bodyPr/>
+                    <a:lstStyle/>
+                    <a:p>
+                      <a:pPr indent="0" marL="0">
+                        <a:lnSpc>
+                          <a:spcPts val="1680"/>
+                        </a:lnSpc>
+                        <a:buNone/>
+                      </a:pPr>
+                      <a:r>
+                        <a:rPr lang="en-US" sz="1200" dirty="0">
+                          <a:solidFill>
+                            <a:srgbClr val="3E4A5C"/>
+                          </a:solidFill>
+                          <a:latin typeface="Arial" pitchFamily="34" charset="0"/>
+                          <a:ea typeface="Arial" pitchFamily="34" charset="-122"/>
+                          <a:cs typeface="Arial" pitchFamily="34" charset="-120"/>
+                        </a:rPr>
+                        <a:t>5 web sources, Italy 29, location missing 19</a:t>
+                      </a:r>
+                      <a:endParaRPr lang="en-US" sz="1200" dirty="0">
+                        <a:latin typeface="Arial" charset="0"/>
+                        <a:ea typeface="Arial" charset="0"/>
+                        <a:cs typeface="Arial" charset="0"/>
+                      </a:endParaRPr>
+                    </a:p>
+                  </a:txBody>
+                  <a:tcPr marL="53340" marR="53340" marT="53340" marB="53340" anchor="t">
+                    <a:lnL w="12700" cap="flat" cmpd="sng" algn="ctr">
+                      <a:solidFill>
+                        <a:srgbClr val="C5C4C1"/>
+                      </a:solidFill>
+                      <a:prstDash val="solid"/>
+                      <a:round/>
+                      <a:headEnd type="none" w="med" len="med"/>
+                      <a:tailEnd type="none" w="med" len="med"/>
+                    </a:lnL>
+                    <a:lnR w="12700" cap="flat" cmpd="sng" algn="ctr">
+                      <a:solidFill>
+                        <a:srgbClr val="C5C4C1"/>
+                      </a:solidFill>
+                      <a:prstDash val="solid"/>
+                      <a:round/>
+                      <a:headEnd type="none" w="med" len="med"/>
+                      <a:tailEnd type="none" w="med" len="med"/>
+                    </a:lnR>
+                    <a:lnT w="12700" cap="flat" cmpd="sng" algn="ctr">
+                      <a:solidFill>
+                        <a:srgbClr val="C5C4C1"/>
+                      </a:solidFill>
+                      <a:prstDash val="solid"/>
+                      <a:round/>
+                      <a:headEnd type="none" w="med" len="med"/>
+                      <a:tailEnd type="none" w="med" len="med"/>
+                    </a:lnT>
+                    <a:lnB w="12700" cap="flat" cmpd="sng" algn="ctr">
+                      <a:solidFill>
+                        <a:srgbClr val="C5C4C1"/>
+                      </a:solidFill>
+                      <a:prstDash val="solid"/>
+                      <a:round/>
+                      <a:headEnd type="none" w="med" len="med"/>
+                      <a:tailEnd type="none" w="med" len="med"/>
+                    </a:lnB>
+                  </a:tcPr>
+                </a:tc>
+              </a:tr>
+              <a:tr h="332680">
+                <a:tc>
+                  <a:txBody>
+                    <a:bodyPr/>
+                    <a:lstStyle/>
+                    <a:p>
+                      <a:pPr indent="0" marL="0">
+                        <a:lnSpc>
+                          <a:spcPts val="1680"/>
+                        </a:lnSpc>
+                        <a:buNone/>
+                      </a:pPr>
+                      <a:r>
+                        <a:rPr lang="en-US" sz="1200" dirty="0">
+                          <a:solidFill>
+                            <a:srgbClr val="3E4A5C"/>
+                          </a:solidFill>
+                          <a:latin typeface="Arial" pitchFamily="34" charset="0"/>
+                          <a:ea typeface="Arial" pitchFamily="34" charset="-122"/>
+                          <a:cs typeface="Arial" pitchFamily="34" charset="-120"/>
+                        </a:rPr>
+                        <a:t>①</a:t>
+                      </a:r>
+                      <a:endParaRPr lang="en-US" sz="1200" dirty="0">
+                        <a:latin typeface="Arial" charset="0"/>
+                        <a:ea typeface="Arial" charset="0"/>
+                        <a:cs typeface="Arial" charset="0"/>
+                      </a:endParaRPr>
+                    </a:p>
+                  </a:txBody>
+                  <a:tcPr marL="53340" marR="53340" marT="53340" marB="53340" anchor="t">
+                    <a:lnL w="12700" cap="flat" cmpd="sng" algn="ctr">
+                      <a:solidFill>
+                        <a:srgbClr val="C5C4C1"/>
+                      </a:solidFill>
+                      <a:prstDash val="solid"/>
+                      <a:round/>
+                      <a:headEnd type="none" w="med" len="med"/>
+                      <a:tailEnd type="none" w="med" len="med"/>
+                    </a:lnL>
+                    <a:lnR w="12700" cap="flat" cmpd="sng" algn="ctr">
+                      <a:solidFill>
+                        <a:srgbClr val="C5C4C1"/>
+                      </a:solidFill>
+                      <a:prstDash val="solid"/>
+                      <a:round/>
+                      <a:headEnd type="none" w="med" len="med"/>
+                      <a:tailEnd type="none" w="med" len="med"/>
+                    </a:lnR>
+                    <a:lnT w="12700" cap="flat" cmpd="sng" algn="ctr">
+                      <a:solidFill>
+                        <a:srgbClr val="C5C4C1"/>
+                      </a:solidFill>
+                      <a:prstDash val="solid"/>
+                      <a:round/>
+                      <a:headEnd type="none" w="med" len="med"/>
+                      <a:tailEnd type="none" w="med" len="med"/>
+                    </a:lnT>
+                    <a:lnB w="12700" cap="flat" cmpd="sng" algn="ctr">
+                      <a:solidFill>
+                        <a:srgbClr val="C5C4C1"/>
+                      </a:solidFill>
+                      <a:prstDash val="solid"/>
+                      <a:round/>
+                      <a:headEnd type="none" w="med" len="med"/>
+                      <a:tailEnd type="none" w="med" len="med"/>
+                    </a:lnB>
+                  </a:tcPr>
+                </a:tc>
+                <a:tc>
+                  <a:txBody>
+                    <a:bodyPr/>
+                    <a:lstStyle/>
+                    <a:p>
+                      <a:pPr indent="0" marL="0">
+                        <a:lnSpc>
+                          <a:spcPts val="1680"/>
+                        </a:lnSpc>
+                        <a:buNone/>
+                      </a:pPr>
+                      <a:r>
+                        <a:rPr lang="en-US" sz="1200" dirty="0">
+                          <a:solidFill>
+                            <a:srgbClr val="3E4A5C"/>
+                          </a:solidFill>
+                          <a:latin typeface="Arial" pitchFamily="34" charset="0"/>
+                          <a:ea typeface="Arial" pitchFamily="34" charset="-122"/>
+                          <a:cs typeface="Arial" pitchFamily="34" charset="-120"/>
+                        </a:rPr>
+                        <a:t>Inclusion / exclusion criteria clear?</a:t>
+                      </a:r>
+                      <a:endParaRPr lang="en-US" sz="1200" dirty="0">
+                        <a:latin typeface="Arial" charset="0"/>
+                        <a:ea typeface="Arial" charset="0"/>
+                        <a:cs typeface="Arial" charset="0"/>
+                      </a:endParaRPr>
+                    </a:p>
+                  </a:txBody>
+                  <a:tcPr marL="53340" marR="53340" marT="53340" marB="53340" anchor="t">
+                    <a:lnL w="12700" cap="flat" cmpd="sng" algn="ctr">
+                      <a:solidFill>
+                        <a:srgbClr val="C5C4C1"/>
+                      </a:solidFill>
+                      <a:prstDash val="solid"/>
+                      <a:round/>
+                      <a:headEnd type="none" w="med" len="med"/>
+                      <a:tailEnd type="none" w="med" len="med"/>
+                    </a:lnL>
+                    <a:lnR w="12700" cap="flat" cmpd="sng" algn="ctr">
+                      <a:solidFill>
+                        <a:srgbClr val="C5C4C1"/>
+                      </a:solidFill>
+                      <a:prstDash val="solid"/>
+                      <a:round/>
+                      <a:headEnd type="none" w="med" len="med"/>
+                      <a:tailEnd type="none" w="med" len="med"/>
+                    </a:lnR>
+                    <a:lnT w="12700" cap="flat" cmpd="sng" algn="ctr">
+                      <a:solidFill>
+                        <a:srgbClr val="C5C4C1"/>
+                      </a:solidFill>
+                      <a:prstDash val="solid"/>
+                      <a:round/>
+                      <a:headEnd type="none" w="med" len="med"/>
+                      <a:tailEnd type="none" w="med" len="med"/>
+                    </a:lnT>
+                    <a:lnB w="12700" cap="flat" cmpd="sng" algn="ctr">
+                      <a:solidFill>
+                        <a:srgbClr val="C5C4C1"/>
+                      </a:solidFill>
+                      <a:prstDash val="solid"/>
+                      <a:round/>
+                      <a:headEnd type="none" w="med" len="med"/>
+                      <a:tailEnd type="none" w="med" len="med"/>
+                    </a:lnB>
+                  </a:tcPr>
+                </a:tc>
+                <a:tc>
+                  <a:txBody>
+                    <a:bodyPr/>
+                    <a:lstStyle/>
+                    <a:p>
+                      <a:pPr indent="0" marL="0">
+                        <a:lnSpc>
+                          <a:spcPts val="1680"/>
+                        </a:lnSpc>
+                        <a:buNone/>
+                      </a:pPr>
+                      <a:r>
+                        <a:rPr lang="en-US" sz="1200" dirty="0">
+                          <a:solidFill>
+                            <a:srgbClr val="B5521B"/>
+                          </a:solidFill>
+                          <a:latin typeface="Arial" pitchFamily="34" charset="0"/>
+                          <a:ea typeface="Arial" pitchFamily="34" charset="-122"/>
+                          <a:cs typeface="Arial" pitchFamily="34" charset="-120"/>
+                        </a:rPr>
+                        <a:t>Not met</a:t>
+                      </a:r>
+                      <a:endParaRPr lang="en-US" sz="1200" dirty="0">
+                        <a:latin typeface="Arial" charset="0"/>
+                        <a:ea typeface="Arial" charset="0"/>
+                        <a:cs typeface="Arial" charset="0"/>
+                      </a:endParaRPr>
+                    </a:p>
+                  </a:txBody>
+                  <a:tcPr marL="53340" marR="53340" marT="53340" marB="53340" anchor="t">
+                    <a:lnL w="12700" cap="flat" cmpd="sng" algn="ctr">
+                      <a:solidFill>
+                        <a:srgbClr val="C5C4C1"/>
+                      </a:solidFill>
+                      <a:prstDash val="solid"/>
+                      <a:round/>
+                      <a:headEnd type="none" w="med" len="med"/>
+                      <a:tailEnd type="none" w="med" len="med"/>
+                    </a:lnL>
+                    <a:lnR w="12700" cap="flat" cmpd="sng" algn="ctr">
+                      <a:solidFill>
+                        <a:srgbClr val="C5C4C1"/>
+                      </a:solidFill>
+                      <a:prstDash val="solid"/>
+                      <a:round/>
+                      <a:headEnd type="none" w="med" len="med"/>
+                      <a:tailEnd type="none" w="med" len="med"/>
+                    </a:lnR>
+                    <a:lnT w="12700" cap="flat" cmpd="sng" algn="ctr">
+                      <a:solidFill>
+                        <a:srgbClr val="C5C4C1"/>
+                      </a:solidFill>
+                      <a:prstDash val="solid"/>
+                      <a:round/>
+                      <a:headEnd type="none" w="med" len="med"/>
+                      <a:tailEnd type="none" w="med" len="med"/>
+                    </a:lnT>
+                    <a:lnB w="12700" cap="flat" cmpd="sng" algn="ctr">
+                      <a:solidFill>
+                        <a:srgbClr val="C5C4C1"/>
+                      </a:solidFill>
+                      <a:prstDash val="solid"/>
+                      <a:round/>
+                      <a:headEnd type="none" w="med" len="med"/>
+                      <a:tailEnd type="none" w="med" len="med"/>
+                    </a:lnB>
+                  </a:tcPr>
+                </a:tc>
+                <a:tc>
+                  <a:txBody>
+                    <a:bodyPr/>
+                    <a:lstStyle/>
+                    <a:p>
+                      <a:pPr indent="0" marL="0">
+                        <a:lnSpc>
+                          <a:spcPts val="1680"/>
+                        </a:lnSpc>
+                        <a:buNone/>
+                      </a:pPr>
+                      <a:r>
+                        <a:rPr lang="en-US" sz="1200" dirty="0">
+                          <a:solidFill>
+                            <a:srgbClr val="3E4A5C"/>
+                          </a:solidFill>
+                          <a:latin typeface="Arial" pitchFamily="34" charset="0"/>
+                          <a:ea typeface="Arial" pitchFamily="34" charset="-122"/>
+                          <a:cs typeface="Arial" pitchFamily="34" charset="-120"/>
+                        </a:rPr>
+                        <a:t>“94 PA” but 17 not reliably PA; no exclusions</a:t>
+                      </a:r>
+                      <a:endParaRPr lang="en-US" sz="1200" dirty="0">
+                        <a:latin typeface="Arial" charset="0"/>
+                        <a:ea typeface="Arial" charset="0"/>
+                        <a:cs typeface="Arial" charset="0"/>
+                      </a:endParaRPr>
+                    </a:p>
+                  </a:txBody>
+                  <a:tcPr marL="53340" marR="53340" marT="53340" marB="53340" anchor="t">
+                    <a:lnL w="12700" cap="flat" cmpd="sng" algn="ctr">
+                      <a:solidFill>
+                        <a:srgbClr val="C5C4C1"/>
+                      </a:solidFill>
+                      <a:prstDash val="solid"/>
+                      <a:round/>
+                      <a:headEnd type="none" w="med" len="med"/>
+                      <a:tailEnd type="none" w="med" len="med"/>
+                    </a:lnL>
+                    <a:lnR w="12700" cap="flat" cmpd="sng" algn="ctr">
+                      <a:solidFill>
+                        <a:srgbClr val="C5C4C1"/>
+                      </a:solidFill>
+                      <a:prstDash val="solid"/>
+                      <a:round/>
+                      <a:headEnd type="none" w="med" len="med"/>
+                      <a:tailEnd type="none" w="med" len="med"/>
+                    </a:lnR>
+                    <a:lnT w="12700" cap="flat" cmpd="sng" algn="ctr">
+                      <a:solidFill>
+                        <a:srgbClr val="C5C4C1"/>
+                      </a:solidFill>
+                      <a:prstDash val="solid"/>
+                      <a:round/>
+                      <a:headEnd type="none" w="med" len="med"/>
+                      <a:tailEnd type="none" w="med" len="med"/>
+                    </a:lnT>
+                    <a:lnB w="12700" cap="flat" cmpd="sng" algn="ctr">
+                      <a:solidFill>
+                        <a:srgbClr val="C5C4C1"/>
+                      </a:solidFill>
+                      <a:prstDash val="solid"/>
+                      <a:round/>
+                      <a:headEnd type="none" w="med" len="med"/>
+                      <a:tailEnd type="none" w="med" len="med"/>
+                    </a:lnB>
+                  </a:tcPr>
+                </a:tc>
+              </a:tr>
+              <a:tr h="332680">
+                <a:tc>
+                  <a:txBody>
+                    <a:bodyPr/>
+                    <a:lstStyle/>
+                    <a:p>
+                      <a:pPr indent="0" marL="0">
+                        <a:lnSpc>
+                          <a:spcPts val="1680"/>
+                        </a:lnSpc>
+                        <a:buNone/>
+                      </a:pPr>
+                      <a:r>
+                        <a:rPr lang="en-US" sz="1200" dirty="0">
+                          <a:solidFill>
+                            <a:srgbClr val="3E4A5C"/>
+                          </a:solidFill>
+                          <a:latin typeface="Arial" pitchFamily="34" charset="0"/>
+                          <a:ea typeface="Arial" pitchFamily="34" charset="-122"/>
+                          <a:cs typeface="Arial" pitchFamily="34" charset="-120"/>
+                        </a:rPr>
+                        <a:t>②</a:t>
+                      </a:r>
+                      <a:endParaRPr lang="en-US" sz="1200" dirty="0">
+                        <a:latin typeface="Arial" charset="0"/>
+                        <a:ea typeface="Arial" charset="0"/>
+                        <a:cs typeface="Arial" charset="0"/>
+                      </a:endParaRPr>
+                    </a:p>
+                  </a:txBody>
+                  <a:tcPr marL="53340" marR="53340" marT="53340" marB="53340" anchor="t">
+                    <a:lnL w="12700" cap="flat" cmpd="sng" algn="ctr">
+                      <a:solidFill>
+                        <a:srgbClr val="C5C4C1"/>
+                      </a:solidFill>
+                      <a:prstDash val="solid"/>
+                      <a:round/>
+                      <a:headEnd type="none" w="med" len="med"/>
+                      <a:tailEnd type="none" w="med" len="med"/>
+                    </a:lnL>
+                    <a:lnR w="12700" cap="flat" cmpd="sng" algn="ctr">
+                      <a:solidFill>
+                        <a:srgbClr val="C5C4C1"/>
+                      </a:solidFill>
+                      <a:prstDash val="solid"/>
+                      <a:round/>
+                      <a:headEnd type="none" w="med" len="med"/>
+                      <a:tailEnd type="none" w="med" len="med"/>
+                    </a:lnR>
+                    <a:lnT w="12700" cap="flat" cmpd="sng" algn="ctr">
+                      <a:solidFill>
+                        <a:srgbClr val="C5C4C1"/>
+                      </a:solidFill>
+                      <a:prstDash val="solid"/>
+                      <a:round/>
+                      <a:headEnd type="none" w="med" len="med"/>
+                      <a:tailEnd type="none" w="med" len="med"/>
+                    </a:lnT>
+                    <a:lnB w="12700" cap="flat" cmpd="sng" algn="ctr">
+                      <a:solidFill>
+                        <a:srgbClr val="C5C4C1"/>
+                      </a:solidFill>
+                      <a:prstDash val="solid"/>
+                      <a:round/>
+                      <a:headEnd type="none" w="med" len="med"/>
+                      <a:tailEnd type="none" w="med" len="med"/>
+                    </a:lnB>
+                  </a:tcPr>
+                </a:tc>
+                <a:tc>
+                  <a:txBody>
+                    <a:bodyPr/>
+                    <a:lstStyle/>
+                    <a:p>
+                      <a:pPr indent="0" marL="0">
+                        <a:lnSpc>
+                          <a:spcPts val="1680"/>
+                        </a:lnSpc>
+                        <a:buNone/>
+                      </a:pPr>
+                      <a:r>
+                        <a:rPr lang="en-US" sz="1200" dirty="0">
+                          <a:solidFill>
+                            <a:srgbClr val="3E4A5C"/>
+                          </a:solidFill>
+                          <a:latin typeface="Arial" pitchFamily="34" charset="0"/>
+                          <a:ea typeface="Arial" pitchFamily="34" charset="-122"/>
+                          <a:cs typeface="Arial" pitchFamily="34" charset="-120"/>
+                        </a:rPr>
+                        <a:t>Missing data reported and handled?</a:t>
+                      </a:r>
+                      <a:endParaRPr lang="en-US" sz="1200" dirty="0">
+                        <a:latin typeface="Arial" charset="0"/>
+                        <a:ea typeface="Arial" charset="0"/>
+                        <a:cs typeface="Arial" charset="0"/>
+                      </a:endParaRPr>
+                    </a:p>
+                  </a:txBody>
+                  <a:tcPr marL="53340" marR="53340" marT="53340" marB="53340" anchor="t">
+                    <a:lnL w="12700" cap="flat" cmpd="sng" algn="ctr">
+                      <a:solidFill>
+                        <a:srgbClr val="C5C4C1"/>
+                      </a:solidFill>
+                      <a:prstDash val="solid"/>
+                      <a:round/>
+                      <a:headEnd type="none" w="med" len="med"/>
+                      <a:tailEnd type="none" w="med" len="med"/>
+                    </a:lnL>
+                    <a:lnR w="12700" cap="flat" cmpd="sng" algn="ctr">
+                      <a:solidFill>
+                        <a:srgbClr val="C5C4C1"/>
+                      </a:solidFill>
+                      <a:prstDash val="solid"/>
+                      <a:round/>
+                      <a:headEnd type="none" w="med" len="med"/>
+                      <a:tailEnd type="none" w="med" len="med"/>
+                    </a:lnR>
+                    <a:lnT w="12700" cap="flat" cmpd="sng" algn="ctr">
+                      <a:solidFill>
+                        <a:srgbClr val="C5C4C1"/>
+                      </a:solidFill>
+                      <a:prstDash val="solid"/>
+                      <a:round/>
+                      <a:headEnd type="none" w="med" len="med"/>
+                      <a:tailEnd type="none" w="med" len="med"/>
+                    </a:lnT>
+                    <a:lnB w="12700" cap="flat" cmpd="sng" algn="ctr">
+                      <a:solidFill>
+                        <a:srgbClr val="C5C4C1"/>
+                      </a:solidFill>
+                      <a:prstDash val="solid"/>
+                      <a:round/>
+                      <a:headEnd type="none" w="med" len="med"/>
+                      <a:tailEnd type="none" w="med" len="med"/>
+                    </a:lnB>
+                  </a:tcPr>
+                </a:tc>
+                <a:tc>
+                  <a:txBody>
+                    <a:bodyPr/>
+                    <a:lstStyle/>
+                    <a:p>
+                      <a:pPr indent="0" marL="0">
+                        <a:lnSpc>
+                          <a:spcPts val="1680"/>
+                        </a:lnSpc>
+                        <a:buNone/>
+                      </a:pPr>
+                      <a:r>
+                        <a:rPr lang="en-US" sz="1200" dirty="0">
+                          <a:solidFill>
+                            <a:srgbClr val="B5521B"/>
+                          </a:solidFill>
+                          <a:latin typeface="Arial" pitchFamily="34" charset="0"/>
+                          <a:ea typeface="Arial" pitchFamily="34" charset="-122"/>
+                          <a:cs typeface="Arial" pitchFamily="34" charset="-120"/>
+                        </a:rPr>
+                        <a:t>Not met</a:t>
+                      </a:r>
+                      <a:endParaRPr lang="en-US" sz="1200" dirty="0">
+                        <a:latin typeface="Arial" charset="0"/>
+                        <a:ea typeface="Arial" charset="0"/>
+                        <a:cs typeface="Arial" charset="0"/>
+                      </a:endParaRPr>
+                    </a:p>
+                  </a:txBody>
+                  <a:tcPr marL="53340" marR="53340" marT="53340" marB="53340" anchor="t">
+                    <a:lnL w="12700" cap="flat" cmpd="sng" algn="ctr">
+                      <a:solidFill>
+                        <a:srgbClr val="C5C4C1"/>
+                      </a:solidFill>
+                      <a:prstDash val="solid"/>
+                      <a:round/>
+                      <a:headEnd type="none" w="med" len="med"/>
+                      <a:tailEnd type="none" w="med" len="med"/>
+                    </a:lnL>
+                    <a:lnR w="12700" cap="flat" cmpd="sng" algn="ctr">
+                      <a:solidFill>
+                        <a:srgbClr val="C5C4C1"/>
+                      </a:solidFill>
+                      <a:prstDash val="solid"/>
+                      <a:round/>
+                      <a:headEnd type="none" w="med" len="med"/>
+                      <a:tailEnd type="none" w="med" len="med"/>
+                    </a:lnR>
+                    <a:lnT w="12700" cap="flat" cmpd="sng" algn="ctr">
+                      <a:solidFill>
+                        <a:srgbClr val="C5C4C1"/>
+                      </a:solidFill>
+                      <a:prstDash val="solid"/>
+                      <a:round/>
+                      <a:headEnd type="none" w="med" len="med"/>
+                      <a:tailEnd type="none" w="med" len="med"/>
+                    </a:lnT>
+                    <a:lnB w="12700" cap="flat" cmpd="sng" algn="ctr">
+                      <a:solidFill>
+                        <a:srgbClr val="C5C4C1"/>
+                      </a:solidFill>
+                      <a:prstDash val="solid"/>
+                      <a:round/>
+                      <a:headEnd type="none" w="med" len="med"/>
+                      <a:tailEnd type="none" w="med" len="med"/>
+                    </a:lnB>
+                  </a:tcPr>
+                </a:tc>
+                <a:tc>
+                  <a:txBody>
+                    <a:bodyPr/>
+                    <a:lstStyle/>
+                    <a:p>
+                      <a:pPr indent="0" marL="0">
+                        <a:lnSpc>
+                          <a:spcPts val="1680"/>
+                        </a:lnSpc>
+                        <a:buNone/>
+                      </a:pPr>
+                      <a:r>
+                        <a:rPr lang="en-US" sz="1200" dirty="0">
+                          <a:solidFill>
+                            <a:srgbClr val="3E4A5C"/>
+                          </a:solidFill>
+                          <a:latin typeface="Arial" pitchFamily="34" charset="0"/>
+                          <a:ea typeface="Arial" pitchFamily="34" charset="-122"/>
+                          <a:cs typeface="Arial" pitchFamily="34" charset="-120"/>
+                        </a:rPr>
+                        <a:t>“No missing data” vs sex 17, age 25 missing</a:t>
+                      </a:r>
+                      <a:endParaRPr lang="en-US" sz="1200" dirty="0">
+                        <a:latin typeface="Arial" charset="0"/>
+                        <a:ea typeface="Arial" charset="0"/>
+                        <a:cs typeface="Arial" charset="0"/>
+                      </a:endParaRPr>
+                    </a:p>
+                  </a:txBody>
+                  <a:tcPr marL="53340" marR="53340" marT="53340" marB="53340" anchor="t">
+                    <a:lnL w="12700" cap="flat" cmpd="sng" algn="ctr">
+                      <a:solidFill>
+                        <a:srgbClr val="C5C4C1"/>
+                      </a:solidFill>
+                      <a:prstDash val="solid"/>
+                      <a:round/>
+                      <a:headEnd type="none" w="med" len="med"/>
+                      <a:tailEnd type="none" w="med" len="med"/>
+                    </a:lnL>
+                    <a:lnR w="12700" cap="flat" cmpd="sng" algn="ctr">
+                      <a:solidFill>
+                        <a:srgbClr val="C5C4C1"/>
+                      </a:solidFill>
+                      <a:prstDash val="solid"/>
+                      <a:round/>
+                      <a:headEnd type="none" w="med" len="med"/>
+                      <a:tailEnd type="none" w="med" len="med"/>
+                    </a:lnR>
+                    <a:lnT w="12700" cap="flat" cmpd="sng" algn="ctr">
+                      <a:solidFill>
+                        <a:srgbClr val="C5C4C1"/>
+                      </a:solidFill>
+                      <a:prstDash val="solid"/>
+                      <a:round/>
+                      <a:headEnd type="none" w="med" len="med"/>
+                      <a:tailEnd type="none" w="med" len="med"/>
+                    </a:lnT>
+                    <a:lnB w="12700" cap="flat" cmpd="sng" algn="ctr">
+                      <a:solidFill>
+                        <a:srgbClr val="C5C4C1"/>
+                      </a:solidFill>
+                      <a:prstDash val="solid"/>
+                      <a:round/>
+                      <a:headEnd type="none" w="med" len="med"/>
+                      <a:tailEnd type="none" w="med" len="med"/>
+                    </a:lnB>
+                  </a:tcPr>
+                </a:tc>
+              </a:tr>
+              <a:tr h="332680">
+                <a:tc>
+                  <a:txBody>
+                    <a:bodyPr/>
+                    <a:lstStyle/>
+                    <a:p>
+                      <a:pPr indent="0" marL="0">
+                        <a:lnSpc>
+                          <a:spcPts val="1680"/>
+                        </a:lnSpc>
+                        <a:buNone/>
+                      </a:pPr>
+                      <a:r>
+                        <a:rPr lang="en-US" sz="1200" dirty="0">
+                          <a:solidFill>
+                            <a:srgbClr val="3E4A5C"/>
+                          </a:solidFill>
+                          <a:latin typeface="Arial" pitchFamily="34" charset="0"/>
+                          <a:ea typeface="Arial" pitchFamily="34" charset="-122"/>
+                          <a:cs typeface="Arial" pitchFamily="34" charset="-120"/>
+                        </a:rPr>
+                        <a:t>②</a:t>
+                      </a:r>
+                      <a:endParaRPr lang="en-US" sz="1200" dirty="0">
+                        <a:latin typeface="Arial" charset="0"/>
+                        <a:ea typeface="Arial" charset="0"/>
+                        <a:cs typeface="Arial" charset="0"/>
+                      </a:endParaRPr>
+                    </a:p>
+                  </a:txBody>
+                  <a:tcPr marL="53340" marR="53340" marT="53340" marB="53340" anchor="t">
+                    <a:lnL w="12700" cap="flat" cmpd="sng" algn="ctr">
+                      <a:solidFill>
+                        <a:srgbClr val="C5C4C1"/>
+                      </a:solidFill>
+                      <a:prstDash val="solid"/>
+                      <a:round/>
+                      <a:headEnd type="none" w="med" len="med"/>
+                      <a:tailEnd type="none" w="med" len="med"/>
+                    </a:lnL>
+                    <a:lnR w="12700" cap="flat" cmpd="sng" algn="ctr">
+                      <a:solidFill>
+                        <a:srgbClr val="C5C4C1"/>
+                      </a:solidFill>
+                      <a:prstDash val="solid"/>
+                      <a:round/>
+                      <a:headEnd type="none" w="med" len="med"/>
+                      <a:tailEnd type="none" w="med" len="med"/>
+                    </a:lnR>
+                    <a:lnT w="12700" cap="flat" cmpd="sng" algn="ctr">
+                      <a:solidFill>
+                        <a:srgbClr val="C5C4C1"/>
+                      </a:solidFill>
+                      <a:prstDash val="solid"/>
+                      <a:round/>
+                      <a:headEnd type="none" w="med" len="med"/>
+                      <a:tailEnd type="none" w="med" len="med"/>
+                    </a:lnT>
+                    <a:lnB w="12700" cap="flat" cmpd="sng" algn="ctr">
+                      <a:solidFill>
+                        <a:srgbClr val="C5C4C1"/>
+                      </a:solidFill>
+                      <a:prstDash val="solid"/>
+                      <a:round/>
+                      <a:headEnd type="none" w="med" len="med"/>
+                      <a:tailEnd type="none" w="med" len="med"/>
+                    </a:lnB>
+                  </a:tcPr>
+                </a:tc>
+                <a:tc>
+                  <a:txBody>
+                    <a:bodyPr/>
+                    <a:lstStyle/>
+                    <a:p>
+                      <a:pPr indent="0" marL="0">
+                        <a:lnSpc>
+                          <a:spcPts val="1680"/>
+                        </a:lnSpc>
+                        <a:buNone/>
+                      </a:pPr>
+                      <a:r>
+                        <a:rPr lang="en-US" sz="1200" dirty="0">
+                          <a:solidFill>
+                            <a:srgbClr val="3E4A5C"/>
+                          </a:solidFill>
+                          <a:latin typeface="Arial" pitchFamily="34" charset="0"/>
+                          <a:ea typeface="Arial" pitchFamily="34" charset="-122"/>
+                          <a:cs typeface="Arial" pitchFamily="34" charset="-120"/>
+                        </a:rPr>
+                        <a:t>Labels validated?</a:t>
+                      </a:r>
+                      <a:endParaRPr lang="en-US" sz="1200" dirty="0">
+                        <a:latin typeface="Arial" charset="0"/>
+                        <a:ea typeface="Arial" charset="0"/>
+                        <a:cs typeface="Arial" charset="0"/>
+                      </a:endParaRPr>
+                    </a:p>
+                  </a:txBody>
+                  <a:tcPr marL="53340" marR="53340" marT="53340" marB="53340" anchor="t">
+                    <a:lnL w="12700" cap="flat" cmpd="sng" algn="ctr">
+                      <a:solidFill>
+                        <a:srgbClr val="C5C4C1"/>
+                      </a:solidFill>
+                      <a:prstDash val="solid"/>
+                      <a:round/>
+                      <a:headEnd type="none" w="med" len="med"/>
+                      <a:tailEnd type="none" w="med" len="med"/>
+                    </a:lnL>
+                    <a:lnR w="12700" cap="flat" cmpd="sng" algn="ctr">
+                      <a:solidFill>
+                        <a:srgbClr val="C5C4C1"/>
+                      </a:solidFill>
+                      <a:prstDash val="solid"/>
+                      <a:round/>
+                      <a:headEnd type="none" w="med" len="med"/>
+                      <a:tailEnd type="none" w="med" len="med"/>
+                    </a:lnR>
+                    <a:lnT w="12700" cap="flat" cmpd="sng" algn="ctr">
+                      <a:solidFill>
+                        <a:srgbClr val="C5C4C1"/>
+                      </a:solidFill>
+                      <a:prstDash val="solid"/>
+                      <a:round/>
+                      <a:headEnd type="none" w="med" len="med"/>
+                      <a:tailEnd type="none" w="med" len="med"/>
+                    </a:lnT>
+                    <a:lnB w="12700" cap="flat" cmpd="sng" algn="ctr">
+                      <a:solidFill>
+                        <a:srgbClr val="C5C4C1"/>
+                      </a:solidFill>
+                      <a:prstDash val="solid"/>
+                      <a:round/>
+                      <a:headEnd type="none" w="med" len="med"/>
+                      <a:tailEnd type="none" w="med" len="med"/>
+                    </a:lnB>
+                  </a:tcPr>
+                </a:tc>
+                <a:tc>
+                  <a:txBody>
+                    <a:bodyPr/>
+                    <a:lstStyle/>
+                    <a:p>
+                      <a:pPr indent="0" marL="0">
+                        <a:lnSpc>
+                          <a:spcPts val="1680"/>
+                        </a:lnSpc>
+                        <a:buNone/>
+                      </a:pPr>
+                      <a:r>
+                        <a:rPr lang="en-US" sz="1200" dirty="0">
+                          <a:solidFill>
+                            <a:srgbClr val="3E4A5C"/>
+                          </a:solidFill>
+                          <a:latin typeface="Arial" pitchFamily="34" charset="0"/>
+                          <a:ea typeface="Arial" pitchFamily="34" charset="-122"/>
+                          <a:cs typeface="Arial" pitchFamily="34" charset="-120"/>
+                        </a:rPr>
+                        <a:t>Partly</a:t>
+                      </a:r>
+                      <a:endParaRPr lang="en-US" sz="1200" dirty="0">
+                        <a:latin typeface="Arial" charset="0"/>
+                        <a:ea typeface="Arial" charset="0"/>
+                        <a:cs typeface="Arial" charset="0"/>
+                      </a:endParaRPr>
+                    </a:p>
+                  </a:txBody>
+                  <a:tcPr marL="53340" marR="53340" marT="53340" marB="53340" anchor="t">
+                    <a:lnL w="12700" cap="flat" cmpd="sng" algn="ctr">
+                      <a:solidFill>
+                        <a:srgbClr val="C5C4C1"/>
+                      </a:solidFill>
+                      <a:prstDash val="solid"/>
+                      <a:round/>
+                      <a:headEnd type="none" w="med" len="med"/>
+                      <a:tailEnd type="none" w="med" len="med"/>
+                    </a:lnL>
+                    <a:lnR w="12700" cap="flat" cmpd="sng" algn="ctr">
+                      <a:solidFill>
+                        <a:srgbClr val="C5C4C1"/>
+                      </a:solidFill>
+                      <a:prstDash val="solid"/>
+                      <a:round/>
+                      <a:headEnd type="none" w="med" len="med"/>
+                      <a:tailEnd type="none" w="med" len="med"/>
+                    </a:lnR>
+                    <a:lnT w="12700" cap="flat" cmpd="sng" algn="ctr">
+                      <a:solidFill>
+                        <a:srgbClr val="C5C4C1"/>
+                      </a:solidFill>
+                      <a:prstDash val="solid"/>
+                      <a:round/>
+                      <a:headEnd type="none" w="med" len="med"/>
+                      <a:tailEnd type="none" w="med" len="med"/>
+                    </a:lnT>
+                    <a:lnB w="12700" cap="flat" cmpd="sng" algn="ctr">
+                      <a:solidFill>
+                        <a:srgbClr val="C5C4C1"/>
+                      </a:solidFill>
+                      <a:prstDash val="solid"/>
+                      <a:round/>
+                      <a:headEnd type="none" w="med" len="med"/>
+                      <a:tailEnd type="none" w="med" len="med"/>
+                    </a:lnB>
+                  </a:tcPr>
+                </a:tc>
+                <a:tc>
+                  <a:txBody>
+                    <a:bodyPr/>
+                    <a:lstStyle/>
+                    <a:p>
+                      <a:pPr indent="0" marL="0">
+                        <a:lnSpc>
+                          <a:spcPts val="1680"/>
+                        </a:lnSpc>
+                        <a:buNone/>
+                      </a:pPr>
+                      <a:r>
+                        <a:rPr lang="en-US" sz="1200" dirty="0">
+                          <a:solidFill>
+                            <a:srgbClr val="3E4A5C"/>
+                          </a:solidFill>
+                          <a:latin typeface="Arial" pitchFamily="34" charset="0"/>
+                          <a:ea typeface="Arial" pitchFamily="34" charset="-122"/>
+                          <a:cs typeface="Arial" pitchFamily="34" charset="-120"/>
+                        </a:rPr>
+                        <a:t>3 blinded experts; κ 0.45 opacity; mean only</a:t>
+                      </a:r>
+                      <a:endParaRPr lang="en-US" sz="1200" dirty="0">
+                        <a:latin typeface="Arial" charset="0"/>
+                        <a:ea typeface="Arial" charset="0"/>
+                        <a:cs typeface="Arial" charset="0"/>
+                      </a:endParaRPr>
+                    </a:p>
+                  </a:txBody>
+                  <a:tcPr marL="53340" marR="53340" marT="53340" marB="53340" anchor="t">
+                    <a:lnL w="12700" cap="flat" cmpd="sng" algn="ctr">
+                      <a:solidFill>
+                        <a:srgbClr val="C5C4C1"/>
+                      </a:solidFill>
+                      <a:prstDash val="solid"/>
+                      <a:round/>
+                      <a:headEnd type="none" w="med" len="med"/>
+                      <a:tailEnd type="none" w="med" len="med"/>
+                    </a:lnL>
+                    <a:lnR w="12700" cap="flat" cmpd="sng" algn="ctr">
+                      <a:solidFill>
+                        <a:srgbClr val="C5C4C1"/>
+                      </a:solidFill>
+                      <a:prstDash val="solid"/>
+                      <a:round/>
+                      <a:headEnd type="none" w="med" len="med"/>
+                      <a:tailEnd type="none" w="med" len="med"/>
+                    </a:lnR>
+                    <a:lnT w="12700" cap="flat" cmpd="sng" algn="ctr">
+                      <a:solidFill>
+                        <a:srgbClr val="C5C4C1"/>
+                      </a:solidFill>
+                      <a:prstDash val="solid"/>
+                      <a:round/>
+                      <a:headEnd type="none" w="med" len="med"/>
+                      <a:tailEnd type="none" w="med" len="med"/>
+                    </a:lnT>
+                    <a:lnB w="12700" cap="flat" cmpd="sng" algn="ctr">
+                      <a:solidFill>
+                        <a:srgbClr val="C5C4C1"/>
+                      </a:solidFill>
+                      <a:prstDash val="solid"/>
+                      <a:round/>
+                      <a:headEnd type="none" w="med" len="med"/>
+                      <a:tailEnd type="none" w="med" len="med"/>
+                    </a:lnB>
+                  </a:tcPr>
+                </a:tc>
+              </a:tr>
+              <a:tr h="332680">
+                <a:tc>
+                  <a:txBody>
+                    <a:bodyPr/>
+                    <a:lstStyle/>
+                    <a:p>
+                      <a:pPr indent="0" marL="0">
+                        <a:lnSpc>
+                          <a:spcPts val="1680"/>
+                        </a:lnSpc>
+                        <a:buNone/>
+                      </a:pPr>
+                      <a:r>
+                        <a:rPr lang="en-US" sz="1200" dirty="0">
+                          <a:solidFill>
+                            <a:srgbClr val="3E4A5C"/>
+                          </a:solidFill>
+                          <a:latin typeface="Arial" pitchFamily="34" charset="0"/>
+                          <a:ea typeface="Arial" pitchFamily="34" charset="-122"/>
+                          <a:cs typeface="Arial" pitchFamily="34" charset="-120"/>
+                        </a:rPr>
+                        <a:t>②</a:t>
+                      </a:r>
+                      <a:endParaRPr lang="en-US" sz="1200" dirty="0">
+                        <a:latin typeface="Arial" charset="0"/>
+                        <a:ea typeface="Arial" charset="0"/>
+                        <a:cs typeface="Arial" charset="0"/>
+                      </a:endParaRPr>
+                    </a:p>
+                  </a:txBody>
+                  <a:tcPr marL="53340" marR="53340" marT="53340" marB="53340" anchor="t">
+                    <a:lnL w="12700" cap="flat" cmpd="sng" algn="ctr">
+                      <a:solidFill>
+                        <a:srgbClr val="C5C4C1"/>
+                      </a:solidFill>
+                      <a:prstDash val="solid"/>
+                      <a:round/>
+                      <a:headEnd type="none" w="med" len="med"/>
+                      <a:tailEnd type="none" w="med" len="med"/>
+                    </a:lnL>
+                    <a:lnR w="12700" cap="flat" cmpd="sng" algn="ctr">
+                      <a:solidFill>
+                        <a:srgbClr val="C5C4C1"/>
+                      </a:solidFill>
+                      <a:prstDash val="solid"/>
+                      <a:round/>
+                      <a:headEnd type="none" w="med" len="med"/>
+                      <a:tailEnd type="none" w="med" len="med"/>
+                    </a:lnR>
+                    <a:lnT w="12700" cap="flat" cmpd="sng" algn="ctr">
+                      <a:solidFill>
+                        <a:srgbClr val="C5C4C1"/>
+                      </a:solidFill>
+                      <a:prstDash val="solid"/>
+                      <a:round/>
+                      <a:headEnd type="none" w="med" len="med"/>
+                      <a:tailEnd type="none" w="med" len="med"/>
+                    </a:lnT>
+                    <a:lnB w="12700" cap="flat" cmpd="sng" algn="ctr">
+                      <a:solidFill>
+                        <a:srgbClr val="C5C4C1"/>
+                      </a:solidFill>
+                      <a:prstDash val="solid"/>
+                      <a:round/>
+                      <a:headEnd type="none" w="med" len="med"/>
+                      <a:tailEnd type="none" w="med" len="med"/>
+                    </a:lnB>
+                  </a:tcPr>
+                </a:tc>
+                <a:tc>
+                  <a:txBody>
+                    <a:bodyPr/>
+                    <a:lstStyle/>
+                    <a:p>
+                      <a:pPr indent="0" marL="0">
+                        <a:lnSpc>
+                          <a:spcPts val="1680"/>
+                        </a:lnSpc>
+                        <a:buNone/>
+                      </a:pPr>
+                      <a:r>
+                        <a:rPr lang="en-US" sz="1200" dirty="0">
+                          <a:solidFill>
+                            <a:srgbClr val="3E4A5C"/>
+                          </a:solidFill>
+                          <a:latin typeface="Arial" pitchFamily="34" charset="0"/>
+                          <a:ea typeface="Arial" pitchFamily="34" charset="-122"/>
+                          <a:cs typeface="Arial" pitchFamily="34" charset="-120"/>
+                        </a:rPr>
+                        <a:t>Preprocessing described?</a:t>
+                      </a:r>
+                      <a:endParaRPr lang="en-US" sz="1200" dirty="0">
+                        <a:latin typeface="Arial" charset="0"/>
+                        <a:ea typeface="Arial" charset="0"/>
+                        <a:cs typeface="Arial" charset="0"/>
+                      </a:endParaRPr>
+                    </a:p>
+                  </a:txBody>
+                  <a:tcPr marL="53340" marR="53340" marT="53340" marB="53340" anchor="t">
+                    <a:lnL w="12700" cap="flat" cmpd="sng" algn="ctr">
+                      <a:solidFill>
+                        <a:srgbClr val="C5C4C1"/>
+                      </a:solidFill>
+                      <a:prstDash val="solid"/>
+                      <a:round/>
+                      <a:headEnd type="none" w="med" len="med"/>
+                      <a:tailEnd type="none" w="med" len="med"/>
+                    </a:lnL>
+                    <a:lnR w="12700" cap="flat" cmpd="sng" algn="ctr">
+                      <a:solidFill>
+                        <a:srgbClr val="C5C4C1"/>
+                      </a:solidFill>
+                      <a:prstDash val="solid"/>
+                      <a:round/>
+                      <a:headEnd type="none" w="med" len="med"/>
+                      <a:tailEnd type="none" w="med" len="med"/>
+                    </a:lnR>
+                    <a:lnT w="12700" cap="flat" cmpd="sng" algn="ctr">
+                      <a:solidFill>
+                        <a:srgbClr val="C5C4C1"/>
+                      </a:solidFill>
+                      <a:prstDash val="solid"/>
+                      <a:round/>
+                      <a:headEnd type="none" w="med" len="med"/>
+                      <a:tailEnd type="none" w="med" len="med"/>
+                    </a:lnT>
+                    <a:lnB w="12700" cap="flat" cmpd="sng" algn="ctr">
+                      <a:solidFill>
+                        <a:srgbClr val="C5C4C1"/>
+                      </a:solidFill>
+                      <a:prstDash val="solid"/>
+                      <a:round/>
+                      <a:headEnd type="none" w="med" len="med"/>
+                      <a:tailEnd type="none" w="med" len="med"/>
+                    </a:lnB>
+                  </a:tcPr>
+                </a:tc>
+                <a:tc>
+                  <a:txBody>
+                    <a:bodyPr/>
+                    <a:lstStyle/>
+                    <a:p>
+                      <a:pPr indent="0" marL="0">
+                        <a:lnSpc>
+                          <a:spcPts val="1680"/>
+                        </a:lnSpc>
+                        <a:buNone/>
+                      </a:pPr>
+                      <a:r>
+                        <a:rPr lang="en-US" sz="1200" dirty="0">
+                          <a:solidFill>
+                            <a:srgbClr val="3E4A5C"/>
+                          </a:solidFill>
+                          <a:latin typeface="Arial" pitchFamily="34" charset="0"/>
+                          <a:ea typeface="Arial" pitchFamily="34" charset="-122"/>
+                          <a:cs typeface="Arial" pitchFamily="34" charset="-120"/>
+                        </a:rPr>
+                        <a:t>Partly</a:t>
+                      </a:r>
+                      <a:endParaRPr lang="en-US" sz="1200" dirty="0">
+                        <a:latin typeface="Arial" charset="0"/>
+                        <a:ea typeface="Arial" charset="0"/>
+                        <a:cs typeface="Arial" charset="0"/>
+                      </a:endParaRPr>
+                    </a:p>
+                  </a:txBody>
+                  <a:tcPr marL="53340" marR="53340" marT="53340" marB="53340" anchor="t">
+                    <a:lnL w="12700" cap="flat" cmpd="sng" algn="ctr">
+                      <a:solidFill>
+                        <a:srgbClr val="C5C4C1"/>
+                      </a:solidFill>
+                      <a:prstDash val="solid"/>
+                      <a:round/>
+                      <a:headEnd type="none" w="med" len="med"/>
+                      <a:tailEnd type="none" w="med" len="med"/>
+                    </a:lnL>
+                    <a:lnR w="12700" cap="flat" cmpd="sng" algn="ctr">
+                      <a:solidFill>
+                        <a:srgbClr val="C5C4C1"/>
+                      </a:solidFill>
+                      <a:prstDash val="solid"/>
+                      <a:round/>
+                      <a:headEnd type="none" w="med" len="med"/>
+                      <a:tailEnd type="none" w="med" len="med"/>
+                    </a:lnR>
+                    <a:lnT w="12700" cap="flat" cmpd="sng" algn="ctr">
+                      <a:solidFill>
+                        <a:srgbClr val="C5C4C1"/>
+                      </a:solidFill>
+                      <a:prstDash val="solid"/>
+                      <a:round/>
+                      <a:headEnd type="none" w="med" len="med"/>
+                      <a:tailEnd type="none" w="med" len="med"/>
+                    </a:lnT>
+                    <a:lnB w="12700" cap="flat" cmpd="sng" algn="ctr">
+                      <a:solidFill>
+                        <a:srgbClr val="C5C4C1"/>
+                      </a:solidFill>
+                      <a:prstDash val="solid"/>
+                      <a:round/>
+                      <a:headEnd type="none" w="med" len="med"/>
+                      <a:tailEnd type="none" w="med" len="med"/>
+                    </a:lnB>
+                  </a:tcPr>
+                </a:tc>
+                <a:tc>
+                  <a:txBody>
+                    <a:bodyPr/>
+                    <a:lstStyle/>
+                    <a:p>
+                      <a:pPr indent="0" marL="0">
+                        <a:lnSpc>
+                          <a:spcPts val="1680"/>
+                        </a:lnSpc>
+                        <a:buNone/>
+                      </a:pPr>
+                      <a:r>
+                        <a:rPr lang="en-US" sz="1200" dirty="0">
+                          <a:solidFill>
+                            <a:srgbClr val="3E4A5C"/>
+                          </a:solidFill>
+                          <a:latin typeface="Arial" pitchFamily="34" charset="0"/>
+                          <a:ea typeface="Arial" pitchFamily="34" charset="-122"/>
+                          <a:cs typeface="Arial" pitchFamily="34" charset="-120"/>
+                        </a:rPr>
+                        <a:t>Crop + resize; burned-in marks kept</a:t>
+                      </a:r>
+                      <a:endParaRPr lang="en-US" sz="1200" dirty="0">
+                        <a:latin typeface="Arial" charset="0"/>
+                        <a:ea typeface="Arial" charset="0"/>
+                        <a:cs typeface="Arial" charset="0"/>
+                      </a:endParaRPr>
+                    </a:p>
+                  </a:txBody>
+                  <a:tcPr marL="53340" marR="53340" marT="53340" marB="53340" anchor="t">
+                    <a:lnL w="12700" cap="flat" cmpd="sng" algn="ctr">
+                      <a:solidFill>
+                        <a:srgbClr val="C5C4C1"/>
+                      </a:solidFill>
+                      <a:prstDash val="solid"/>
+                      <a:round/>
+                      <a:headEnd type="none" w="med" len="med"/>
+                      <a:tailEnd type="none" w="med" len="med"/>
+                    </a:lnL>
+                    <a:lnR w="12700" cap="flat" cmpd="sng" algn="ctr">
+                      <a:solidFill>
+                        <a:srgbClr val="C5C4C1"/>
+                      </a:solidFill>
+                      <a:prstDash val="solid"/>
+                      <a:round/>
+                      <a:headEnd type="none" w="med" len="med"/>
+                      <a:tailEnd type="none" w="med" len="med"/>
+                    </a:lnR>
+                    <a:lnT w="12700" cap="flat" cmpd="sng" algn="ctr">
+                      <a:solidFill>
+                        <a:srgbClr val="C5C4C1"/>
+                      </a:solidFill>
+                      <a:prstDash val="solid"/>
+                      <a:round/>
+                      <a:headEnd type="none" w="med" len="med"/>
+                      <a:tailEnd type="none" w="med" len="med"/>
+                    </a:lnT>
+                    <a:lnB w="12700" cap="flat" cmpd="sng" algn="ctr">
+                      <a:solidFill>
+                        <a:srgbClr val="C5C4C1"/>
+                      </a:solidFill>
+                      <a:prstDash val="solid"/>
+                      <a:round/>
+                      <a:headEnd type="none" w="med" len="med"/>
+                      <a:tailEnd type="none" w="med" len="med"/>
+                    </a:lnB>
+                  </a:tcPr>
+                </a:tc>
+              </a:tr>
+              <a:tr h="332680">
+                <a:tc>
+                  <a:txBody>
+                    <a:bodyPr/>
+                    <a:lstStyle/>
+                    <a:p>
+                      <a:pPr indent="0" marL="0">
+                        <a:lnSpc>
+                          <a:spcPts val="1680"/>
+                        </a:lnSpc>
+                        <a:buNone/>
+                      </a:pPr>
+                      <a:r>
+                        <a:rPr lang="en-US" sz="1200" dirty="0">
+                          <a:solidFill>
+                            <a:srgbClr val="3E4A5C"/>
+                          </a:solidFill>
+                          <a:latin typeface="Arial" pitchFamily="34" charset="0"/>
+                          <a:ea typeface="Arial" pitchFamily="34" charset="-122"/>
+                          <a:cs typeface="Arial" pitchFamily="34" charset="-120"/>
+                        </a:rPr>
+                        <a:t>③</a:t>
+                      </a:r>
+                      <a:endParaRPr lang="en-US" sz="1200" dirty="0">
+                        <a:latin typeface="Arial" charset="0"/>
+                        <a:ea typeface="Arial" charset="0"/>
+                        <a:cs typeface="Arial" charset="0"/>
+                      </a:endParaRPr>
+                    </a:p>
+                  </a:txBody>
+                  <a:tcPr marL="53340" marR="53340" marT="53340" marB="53340" anchor="t">
+                    <a:lnL w="12700" cap="flat" cmpd="sng" algn="ctr">
+                      <a:solidFill>
+                        <a:srgbClr val="C5C4C1"/>
+                      </a:solidFill>
+                      <a:prstDash val="solid"/>
+                      <a:round/>
+                      <a:headEnd type="none" w="med" len="med"/>
+                      <a:tailEnd type="none" w="med" len="med"/>
+                    </a:lnL>
+                    <a:lnR w="12700" cap="flat" cmpd="sng" algn="ctr">
+                      <a:solidFill>
+                        <a:srgbClr val="C5C4C1"/>
+                      </a:solidFill>
+                      <a:prstDash val="solid"/>
+                      <a:round/>
+                      <a:headEnd type="none" w="med" len="med"/>
+                      <a:tailEnd type="none" w="med" len="med"/>
+                    </a:lnR>
+                    <a:lnT w="12700" cap="flat" cmpd="sng" algn="ctr">
+                      <a:solidFill>
+                        <a:srgbClr val="C5C4C1"/>
+                      </a:solidFill>
+                      <a:prstDash val="solid"/>
+                      <a:round/>
+                      <a:headEnd type="none" w="med" len="med"/>
+                      <a:tailEnd type="none" w="med" len="med"/>
+                    </a:lnT>
+                    <a:lnB w="12700" cap="flat" cmpd="sng" algn="ctr">
+                      <a:solidFill>
+                        <a:srgbClr val="C5C4C1"/>
+                      </a:solidFill>
+                      <a:prstDash val="solid"/>
+                      <a:round/>
+                      <a:headEnd type="none" w="med" len="med"/>
+                      <a:tailEnd type="none" w="med" len="med"/>
+                    </a:lnB>
+                  </a:tcPr>
+                </a:tc>
+                <a:tc>
+                  <a:txBody>
+                    <a:bodyPr/>
+                    <a:lstStyle/>
+                    <a:p>
+                      <a:pPr indent="0" marL="0">
+                        <a:lnSpc>
+                          <a:spcPts val="1680"/>
+                        </a:lnSpc>
+                        <a:buNone/>
+                      </a:pPr>
+                      <a:r>
+                        <a:rPr lang="en-US" sz="1200" dirty="0">
+                          <a:solidFill>
+                            <a:srgbClr val="3E4A5C"/>
+                          </a:solidFill>
+                          <a:latin typeface="Arial" pitchFamily="34" charset="0"/>
+                          <a:ea typeface="Arial" pitchFamily="34" charset="-122"/>
+                          <a:cs typeface="Arial" pitchFamily="34" charset="-120"/>
+                        </a:rPr>
+                        <a:t>Models compared with baselines?</a:t>
+                      </a:r>
+                      <a:endParaRPr lang="en-US" sz="1200" dirty="0">
+                        <a:latin typeface="Arial" charset="0"/>
+                        <a:ea typeface="Arial" charset="0"/>
+                        <a:cs typeface="Arial" charset="0"/>
+                      </a:endParaRPr>
+                    </a:p>
+                  </a:txBody>
+                  <a:tcPr marL="53340" marR="53340" marT="53340" marB="53340" anchor="t">
+                    <a:lnL w="12700" cap="flat" cmpd="sng" algn="ctr">
+                      <a:solidFill>
+                        <a:srgbClr val="C5C4C1"/>
+                      </a:solidFill>
+                      <a:prstDash val="solid"/>
+                      <a:round/>
+                      <a:headEnd type="none" w="med" len="med"/>
+                      <a:tailEnd type="none" w="med" len="med"/>
+                    </a:lnL>
+                    <a:lnR w="12700" cap="flat" cmpd="sng" algn="ctr">
+                      <a:solidFill>
+                        <a:srgbClr val="C5C4C1"/>
+                      </a:solidFill>
+                      <a:prstDash val="solid"/>
+                      <a:round/>
+                      <a:headEnd type="none" w="med" len="med"/>
+                      <a:tailEnd type="none" w="med" len="med"/>
+                    </a:lnR>
+                    <a:lnT w="12700" cap="flat" cmpd="sng" algn="ctr">
+                      <a:solidFill>
+                        <a:srgbClr val="C5C4C1"/>
+                      </a:solidFill>
+                      <a:prstDash val="solid"/>
+                      <a:round/>
+                      <a:headEnd type="none" w="med" len="med"/>
+                      <a:tailEnd type="none" w="med" len="med"/>
+                    </a:lnT>
+                    <a:lnB w="12700" cap="flat" cmpd="sng" algn="ctr">
+                      <a:solidFill>
+                        <a:srgbClr val="C5C4C1"/>
+                      </a:solidFill>
+                      <a:prstDash val="solid"/>
+                      <a:round/>
+                      <a:headEnd type="none" w="med" len="med"/>
+                      <a:tailEnd type="none" w="med" len="med"/>
+                    </a:lnB>
+                  </a:tcPr>
+                </a:tc>
+                <a:tc>
+                  <a:txBody>
+                    <a:bodyPr/>
+                    <a:lstStyle/>
+                    <a:p>
+                      <a:pPr indent="0" marL="0">
+                        <a:lnSpc>
+                          <a:spcPts val="1680"/>
+                        </a:lnSpc>
+                        <a:buNone/>
+                      </a:pPr>
+                      <a:r>
+                        <a:rPr lang="en-US" sz="1200" dirty="0">
+                          <a:solidFill>
+                            <a:srgbClr val="B5521B"/>
+                          </a:solidFill>
+                          <a:latin typeface="Arial" pitchFamily="34" charset="0"/>
+                          <a:ea typeface="Arial" pitchFamily="34" charset="-122"/>
+                          <a:cs typeface="Arial" pitchFamily="34" charset="-120"/>
+                        </a:rPr>
+                        <a:t>Not met</a:t>
+                      </a:r>
+                      <a:endParaRPr lang="en-US" sz="1200" dirty="0">
+                        <a:latin typeface="Arial" charset="0"/>
+                        <a:ea typeface="Arial" charset="0"/>
+                        <a:cs typeface="Arial" charset="0"/>
+                      </a:endParaRPr>
+                    </a:p>
+                  </a:txBody>
+                  <a:tcPr marL="53340" marR="53340" marT="53340" marB="53340" anchor="t">
+                    <a:lnL w="12700" cap="flat" cmpd="sng" algn="ctr">
+                      <a:solidFill>
+                        <a:srgbClr val="C5C4C1"/>
+                      </a:solidFill>
+                      <a:prstDash val="solid"/>
+                      <a:round/>
+                      <a:headEnd type="none" w="med" len="med"/>
+                      <a:tailEnd type="none" w="med" len="med"/>
+                    </a:lnL>
+                    <a:lnR w="12700" cap="flat" cmpd="sng" algn="ctr">
+                      <a:solidFill>
+                        <a:srgbClr val="C5C4C1"/>
+                      </a:solidFill>
+                      <a:prstDash val="solid"/>
+                      <a:round/>
+                      <a:headEnd type="none" w="med" len="med"/>
+                      <a:tailEnd type="none" w="med" len="med"/>
+                    </a:lnR>
+                    <a:lnT w="12700" cap="flat" cmpd="sng" algn="ctr">
+                      <a:solidFill>
+                        <a:srgbClr val="C5C4C1"/>
+                      </a:solidFill>
+                      <a:prstDash val="solid"/>
+                      <a:round/>
+                      <a:headEnd type="none" w="med" len="med"/>
+                      <a:tailEnd type="none" w="med" len="med"/>
+                    </a:lnT>
+                    <a:lnB w="12700" cap="flat" cmpd="sng" algn="ctr">
+                      <a:solidFill>
+                        <a:srgbClr val="C5C4C1"/>
+                      </a:solidFill>
+                      <a:prstDash val="solid"/>
+                      <a:round/>
+                      <a:headEnd type="none" w="med" len="med"/>
+                      <a:tailEnd type="none" w="med" len="med"/>
+                    </a:lnB>
+                  </a:tcPr>
+                </a:tc>
+                <a:tc>
+                  <a:txBody>
+                    <a:bodyPr/>
+                    <a:lstStyle/>
+                    <a:p>
+                      <a:pPr indent="0" marL="0">
+                        <a:lnSpc>
+                          <a:spcPts val="1680"/>
+                        </a:lnSpc>
+                        <a:buNone/>
+                      </a:pPr>
+                      <a:r>
+                        <a:rPr lang="en-US" sz="1200" dirty="0">
+                          <a:solidFill>
+                            <a:srgbClr val="3E4A5C"/>
+                          </a:solidFill>
+                          <a:latin typeface="Arial" pitchFamily="34" charset="0"/>
+                          <a:ea typeface="Arial" pitchFamily="34" charset="-122"/>
+                          <a:cs typeface="Arial" pitchFamily="34" charset="-120"/>
+                        </a:rPr>
+                        <a:t>OLS only, against a constant</a:t>
+                      </a:r>
+                      <a:endParaRPr lang="en-US" sz="1200" dirty="0">
+                        <a:latin typeface="Arial" charset="0"/>
+                        <a:ea typeface="Arial" charset="0"/>
+                        <a:cs typeface="Arial" charset="0"/>
+                      </a:endParaRPr>
+                    </a:p>
+                  </a:txBody>
+                  <a:tcPr marL="53340" marR="53340" marT="53340" marB="53340" anchor="t">
+                    <a:lnL w="12700" cap="flat" cmpd="sng" algn="ctr">
+                      <a:solidFill>
+                        <a:srgbClr val="C5C4C1"/>
+                      </a:solidFill>
+                      <a:prstDash val="solid"/>
+                      <a:round/>
+                      <a:headEnd type="none" w="med" len="med"/>
+                      <a:tailEnd type="none" w="med" len="med"/>
+                    </a:lnL>
+                    <a:lnR w="12700" cap="flat" cmpd="sng" algn="ctr">
+                      <a:solidFill>
+                        <a:srgbClr val="C5C4C1"/>
+                      </a:solidFill>
+                      <a:prstDash val="solid"/>
+                      <a:round/>
+                      <a:headEnd type="none" w="med" len="med"/>
+                      <a:tailEnd type="none" w="med" len="med"/>
+                    </a:lnR>
+                    <a:lnT w="12700" cap="flat" cmpd="sng" algn="ctr">
+                      <a:solidFill>
+                        <a:srgbClr val="C5C4C1"/>
+                      </a:solidFill>
+                      <a:prstDash val="solid"/>
+                      <a:round/>
+                      <a:headEnd type="none" w="med" len="med"/>
+                      <a:tailEnd type="none" w="med" len="med"/>
+                    </a:lnT>
+                    <a:lnB w="12700" cap="flat" cmpd="sng" algn="ctr">
+                      <a:solidFill>
+                        <a:srgbClr val="C5C4C1"/>
+                      </a:solidFill>
+                      <a:prstDash val="solid"/>
+                      <a:round/>
+                      <a:headEnd type="none" w="med" len="med"/>
+                      <a:tailEnd type="none" w="med" len="med"/>
+                    </a:lnB>
+                  </a:tcPr>
+                </a:tc>
+              </a:tr>
+              <a:tr h="332680">
+                <a:tc>
+                  <a:txBody>
+                    <a:bodyPr/>
+                    <a:lstStyle/>
+                    <a:p>
+                      <a:pPr indent="0" marL="0">
+                        <a:lnSpc>
+                          <a:spcPts val="1680"/>
+                        </a:lnSpc>
+                        <a:buNone/>
+                      </a:pPr>
+                      <a:r>
+                        <a:rPr lang="en-US" sz="1200" dirty="0">
+                          <a:solidFill>
+                            <a:srgbClr val="3E4A5C"/>
+                          </a:solidFill>
+                          <a:latin typeface="Arial" pitchFamily="34" charset="0"/>
+                          <a:ea typeface="Arial" pitchFamily="34" charset="-122"/>
+                          <a:cs typeface="Arial" pitchFamily="34" charset="-120"/>
+                        </a:rPr>
+                        <a:t>④</a:t>
+                      </a:r>
+                      <a:endParaRPr lang="en-US" sz="1200" dirty="0">
+                        <a:latin typeface="Arial" charset="0"/>
+                        <a:ea typeface="Arial" charset="0"/>
+                        <a:cs typeface="Arial" charset="0"/>
+                      </a:endParaRPr>
+                    </a:p>
+                  </a:txBody>
+                  <a:tcPr marL="53340" marR="53340" marT="53340" marB="53340" anchor="t">
+                    <a:lnL w="12700" cap="flat" cmpd="sng" algn="ctr">
+                      <a:solidFill>
+                        <a:srgbClr val="C5C4C1"/>
+                      </a:solidFill>
+                      <a:prstDash val="solid"/>
+                      <a:round/>
+                      <a:headEnd type="none" w="med" len="med"/>
+                      <a:tailEnd type="none" w="med" len="med"/>
+                    </a:lnL>
+                    <a:lnR w="12700" cap="flat" cmpd="sng" algn="ctr">
+                      <a:solidFill>
+                        <a:srgbClr val="C5C4C1"/>
+                      </a:solidFill>
+                      <a:prstDash val="solid"/>
+                      <a:round/>
+                      <a:headEnd type="none" w="med" len="med"/>
+                      <a:tailEnd type="none" w="med" len="med"/>
+                    </a:lnR>
+                    <a:lnT w="12700" cap="flat" cmpd="sng" algn="ctr">
+                      <a:solidFill>
+                        <a:srgbClr val="C5C4C1"/>
+                      </a:solidFill>
+                      <a:prstDash val="solid"/>
+                      <a:round/>
+                      <a:headEnd type="none" w="med" len="med"/>
+                      <a:tailEnd type="none" w="med" len="med"/>
+                    </a:lnT>
+                    <a:lnB w="12700" cap="flat" cmpd="sng" algn="ctr">
+                      <a:solidFill>
+                        <a:srgbClr val="C5C4C1"/>
+                      </a:solidFill>
+                      <a:prstDash val="solid"/>
+                      <a:round/>
+                      <a:headEnd type="none" w="med" len="med"/>
+                      <a:tailEnd type="none" w="med" len="med"/>
+                    </a:lnB>
+                  </a:tcPr>
+                </a:tc>
+                <a:tc>
+                  <a:txBody>
+                    <a:bodyPr/>
+                    <a:lstStyle/>
+                    <a:p>
+                      <a:pPr indent="0" marL="0">
+                        <a:lnSpc>
+                          <a:spcPts val="1680"/>
+                        </a:lnSpc>
+                        <a:buNone/>
+                      </a:pPr>
+                      <a:r>
+                        <a:rPr lang="en-US" sz="1200" dirty="0">
+                          <a:solidFill>
+                            <a:srgbClr val="3E4A5C"/>
+                          </a:solidFill>
+                          <a:latin typeface="Arial" pitchFamily="34" charset="0"/>
+                          <a:ea typeface="Arial" pitchFamily="34" charset="-122"/>
+                          <a:cs typeface="Arial" pitchFamily="34" charset="-120"/>
+                        </a:rPr>
+                        <a:t>Split without leakage, test kept apart?</a:t>
+                      </a:r>
+                      <a:endParaRPr lang="en-US" sz="1200" dirty="0">
+                        <a:latin typeface="Arial" charset="0"/>
+                        <a:ea typeface="Arial" charset="0"/>
+                        <a:cs typeface="Arial" charset="0"/>
+                      </a:endParaRPr>
+                    </a:p>
+                  </a:txBody>
+                  <a:tcPr marL="53340" marR="53340" marT="53340" marB="53340" anchor="t">
+                    <a:lnL w="12700" cap="flat" cmpd="sng" algn="ctr">
+                      <a:solidFill>
+                        <a:srgbClr val="C5C4C1"/>
+                      </a:solidFill>
+                      <a:prstDash val="solid"/>
+                      <a:round/>
+                      <a:headEnd type="none" w="med" len="med"/>
+                      <a:tailEnd type="none" w="med" len="med"/>
+                    </a:lnL>
+                    <a:lnR w="12700" cap="flat" cmpd="sng" algn="ctr">
+                      <a:solidFill>
+                        <a:srgbClr val="C5C4C1"/>
+                      </a:solidFill>
+                      <a:prstDash val="solid"/>
+                      <a:round/>
+                      <a:headEnd type="none" w="med" len="med"/>
+                      <a:tailEnd type="none" w="med" len="med"/>
+                    </a:lnR>
+                    <a:lnT w="12700" cap="flat" cmpd="sng" algn="ctr">
+                      <a:solidFill>
+                        <a:srgbClr val="C5C4C1"/>
+                      </a:solidFill>
+                      <a:prstDash val="solid"/>
+                      <a:round/>
+                      <a:headEnd type="none" w="med" len="med"/>
+                      <a:tailEnd type="none" w="med" len="med"/>
+                    </a:lnT>
+                    <a:lnB w="12700" cap="flat" cmpd="sng" algn="ctr">
+                      <a:solidFill>
+                        <a:srgbClr val="C5C4C1"/>
+                      </a:solidFill>
+                      <a:prstDash val="solid"/>
+                      <a:round/>
+                      <a:headEnd type="none" w="med" len="med"/>
+                      <a:tailEnd type="none" w="med" len="med"/>
+                    </a:lnB>
+                  </a:tcPr>
+                </a:tc>
+                <a:tc>
+                  <a:txBody>
+                    <a:bodyPr/>
+                    <a:lstStyle/>
+                    <a:p>
+                      <a:pPr indent="0" marL="0">
+                        <a:lnSpc>
+                          <a:spcPts val="1680"/>
+                        </a:lnSpc>
+                        <a:buNone/>
+                      </a:pPr>
+                      <a:r>
+                        <a:rPr lang="en-US" sz="1200" dirty="0">
+                          <a:solidFill>
+                            <a:srgbClr val="3E4A5C"/>
+                          </a:solidFill>
+                          <a:latin typeface="Arial" pitchFamily="34" charset="0"/>
+                          <a:ea typeface="Arial" pitchFamily="34" charset="-122"/>
+                          <a:cs typeface="Arial" pitchFamily="34" charset="-120"/>
+                        </a:rPr>
+                        <a:t>Partly</a:t>
+                      </a:r>
+                      <a:endParaRPr lang="en-US" sz="1200" dirty="0">
+                        <a:latin typeface="Arial" charset="0"/>
+                        <a:ea typeface="Arial" charset="0"/>
+                        <a:cs typeface="Arial" charset="0"/>
+                      </a:endParaRPr>
+                    </a:p>
+                  </a:txBody>
+                  <a:tcPr marL="53340" marR="53340" marT="53340" marB="53340" anchor="t">
+                    <a:lnL w="12700" cap="flat" cmpd="sng" algn="ctr">
+                      <a:solidFill>
+                        <a:srgbClr val="C5C4C1"/>
+                      </a:solidFill>
+                      <a:prstDash val="solid"/>
+                      <a:round/>
+                      <a:headEnd type="none" w="med" len="med"/>
+                      <a:tailEnd type="none" w="med" len="med"/>
+                    </a:lnL>
+                    <a:lnR w="12700" cap="flat" cmpd="sng" algn="ctr">
+                      <a:solidFill>
+                        <a:srgbClr val="C5C4C1"/>
+                      </a:solidFill>
+                      <a:prstDash val="solid"/>
+                      <a:round/>
+                      <a:headEnd type="none" w="med" len="med"/>
+                      <a:tailEnd type="none" w="med" len="med"/>
+                    </a:lnR>
+                    <a:lnT w="12700" cap="flat" cmpd="sng" algn="ctr">
+                      <a:solidFill>
+                        <a:srgbClr val="C5C4C1"/>
+                      </a:solidFill>
+                      <a:prstDash val="solid"/>
+                      <a:round/>
+                      <a:headEnd type="none" w="med" len="med"/>
+                      <a:tailEnd type="none" w="med" len="med"/>
+                    </a:lnT>
+                    <a:lnB w="12700" cap="flat" cmpd="sng" algn="ctr">
+                      <a:solidFill>
+                        <a:srgbClr val="C5C4C1"/>
+                      </a:solidFill>
+                      <a:prstDash val="solid"/>
+                      <a:round/>
+                      <a:headEnd type="none" w="med" len="med"/>
+                      <a:tailEnd type="none" w="med" len="med"/>
+                    </a:lnB>
+                  </a:tcPr>
+                </a:tc>
+                <a:tc>
+                  <a:txBody>
+                    <a:bodyPr/>
+                    <a:lstStyle/>
+                    <a:p>
+                      <a:pPr indent="0" marL="0">
+                        <a:lnSpc>
+                          <a:spcPts val="1680"/>
+                        </a:lnSpc>
+                        <a:buNone/>
+                      </a:pPr>
+                      <a:r>
+                        <a:rPr lang="en-US" sz="1200" dirty="0">
+                          <a:solidFill>
+                            <a:srgbClr val="3E4A5C"/>
+                          </a:solidFill>
+                          <a:latin typeface="Arial" pitchFamily="34" charset="0"/>
+                          <a:ea typeface="Arial" pitchFamily="34" charset="-122"/>
+                          <a:cs typeface="Arial" pitchFamily="34" charset="-120"/>
+                        </a:rPr>
+                        <a:t>Patient-grouped; but selection used test set</a:t>
+                      </a:r>
+                      <a:endParaRPr lang="en-US" sz="1200" dirty="0">
+                        <a:latin typeface="Arial" charset="0"/>
+                        <a:ea typeface="Arial" charset="0"/>
+                        <a:cs typeface="Arial" charset="0"/>
+                      </a:endParaRPr>
+                    </a:p>
+                  </a:txBody>
+                  <a:tcPr marL="53340" marR="53340" marT="53340" marB="53340" anchor="t">
+                    <a:lnL w="12700" cap="flat" cmpd="sng" algn="ctr">
+                      <a:solidFill>
+                        <a:srgbClr val="C5C4C1"/>
+                      </a:solidFill>
+                      <a:prstDash val="solid"/>
+                      <a:round/>
+                      <a:headEnd type="none" w="med" len="med"/>
+                      <a:tailEnd type="none" w="med" len="med"/>
+                    </a:lnL>
+                    <a:lnR w="12700" cap="flat" cmpd="sng" algn="ctr">
+                      <a:solidFill>
+                        <a:srgbClr val="C5C4C1"/>
+                      </a:solidFill>
+                      <a:prstDash val="solid"/>
+                      <a:round/>
+                      <a:headEnd type="none" w="med" len="med"/>
+                      <a:tailEnd type="none" w="med" len="med"/>
+                    </a:lnR>
+                    <a:lnT w="12700" cap="flat" cmpd="sng" algn="ctr">
+                      <a:solidFill>
+                        <a:srgbClr val="C5C4C1"/>
+                      </a:solidFill>
+                      <a:prstDash val="solid"/>
+                      <a:round/>
+                      <a:headEnd type="none" w="med" len="med"/>
+                      <a:tailEnd type="none" w="med" len="med"/>
+                    </a:lnT>
+                    <a:lnB w="12700" cap="flat" cmpd="sng" algn="ctr">
+                      <a:solidFill>
+                        <a:srgbClr val="C5C4C1"/>
+                      </a:solidFill>
+                      <a:prstDash val="solid"/>
+                      <a:round/>
+                      <a:headEnd type="none" w="med" len="med"/>
+                      <a:tailEnd type="none" w="med" len="med"/>
+                    </a:lnB>
+                  </a:tcPr>
+                </a:tc>
+              </a:tr>
+              <a:tr h="332680">
+                <a:tc>
+                  <a:txBody>
+                    <a:bodyPr/>
+                    <a:lstStyle/>
+                    <a:p>
+                      <a:pPr indent="0" marL="0">
+                        <a:lnSpc>
+                          <a:spcPts val="1680"/>
+                        </a:lnSpc>
+                        <a:buNone/>
+                      </a:pPr>
+                      <a:r>
+                        <a:rPr lang="en-US" sz="1200" dirty="0">
+                          <a:solidFill>
+                            <a:srgbClr val="3E4A5C"/>
+                          </a:solidFill>
+                          <a:latin typeface="Arial" pitchFamily="34" charset="0"/>
+                          <a:ea typeface="Arial" pitchFamily="34" charset="-122"/>
+                          <a:cs typeface="Arial" pitchFamily="34" charset="-120"/>
+                        </a:rPr>
+                        <a:t>④</a:t>
+                      </a:r>
+                      <a:endParaRPr lang="en-US" sz="1200" dirty="0">
+                        <a:latin typeface="Arial" charset="0"/>
+                        <a:ea typeface="Arial" charset="0"/>
+                        <a:cs typeface="Arial" charset="0"/>
+                      </a:endParaRPr>
+                    </a:p>
+                  </a:txBody>
+                  <a:tcPr marL="53340" marR="53340" marT="53340" marB="53340" anchor="t">
+                    <a:lnL w="12700" cap="flat" cmpd="sng" algn="ctr">
+                      <a:solidFill>
+                        <a:srgbClr val="C5C4C1"/>
+                      </a:solidFill>
+                      <a:prstDash val="solid"/>
+                      <a:round/>
+                      <a:headEnd type="none" w="med" len="med"/>
+                      <a:tailEnd type="none" w="med" len="med"/>
+                    </a:lnL>
+                    <a:lnR w="12700" cap="flat" cmpd="sng" algn="ctr">
+                      <a:solidFill>
+                        <a:srgbClr val="C5C4C1"/>
+                      </a:solidFill>
+                      <a:prstDash val="solid"/>
+                      <a:round/>
+                      <a:headEnd type="none" w="med" len="med"/>
+                      <a:tailEnd type="none" w="med" len="med"/>
+                    </a:lnR>
+                    <a:lnT w="12700" cap="flat" cmpd="sng" algn="ctr">
+                      <a:solidFill>
+                        <a:srgbClr val="C5C4C1"/>
+                      </a:solidFill>
+                      <a:prstDash val="solid"/>
+                      <a:round/>
+                      <a:headEnd type="none" w="med" len="med"/>
+                      <a:tailEnd type="none" w="med" len="med"/>
+                    </a:lnT>
+                    <a:lnB w="12700" cap="flat" cmpd="sng" algn="ctr">
+                      <a:solidFill>
+                        <a:srgbClr val="C5C4C1"/>
+                      </a:solidFill>
+                      <a:prstDash val="solid"/>
+                      <a:round/>
+                      <a:headEnd type="none" w="med" len="med"/>
+                      <a:tailEnd type="none" w="med" len="med"/>
+                    </a:lnB>
+                  </a:tcPr>
+                </a:tc>
+                <a:tc>
+                  <a:txBody>
+                    <a:bodyPr/>
+                    <a:lstStyle/>
+                    <a:p>
+                      <a:pPr indent="0" marL="0">
+                        <a:lnSpc>
+                          <a:spcPts val="1680"/>
+                        </a:lnSpc>
+                        <a:buNone/>
+                      </a:pPr>
+                      <a:r>
+                        <a:rPr lang="en-US" sz="1200" dirty="0">
+                          <a:solidFill>
+                            <a:srgbClr val="3E4A5C"/>
+                          </a:solidFill>
+                          <a:latin typeface="Arial" pitchFamily="34" charset="0"/>
+                          <a:ea typeface="Arial" pitchFamily="34" charset="-122"/>
+                          <a:cs typeface="Arial" pitchFamily="34" charset="-120"/>
+                        </a:rPr>
+                        <a:t>Metrics, calibration, imbalance?</a:t>
+                      </a:r>
+                      <a:endParaRPr lang="en-US" sz="1200" dirty="0">
+                        <a:latin typeface="Arial" charset="0"/>
+                        <a:ea typeface="Arial" charset="0"/>
+                        <a:cs typeface="Arial" charset="0"/>
+                      </a:endParaRPr>
+                    </a:p>
+                  </a:txBody>
+                  <a:tcPr marL="53340" marR="53340" marT="53340" marB="53340" anchor="t">
+                    <a:lnL w="12700" cap="flat" cmpd="sng" algn="ctr">
+                      <a:solidFill>
+                        <a:srgbClr val="C5C4C1"/>
+                      </a:solidFill>
+                      <a:prstDash val="solid"/>
+                      <a:round/>
+                      <a:headEnd type="none" w="med" len="med"/>
+                      <a:tailEnd type="none" w="med" len="med"/>
+                    </a:lnL>
+                    <a:lnR w="12700" cap="flat" cmpd="sng" algn="ctr">
+                      <a:solidFill>
+                        <a:srgbClr val="C5C4C1"/>
+                      </a:solidFill>
+                      <a:prstDash val="solid"/>
+                      <a:round/>
+                      <a:headEnd type="none" w="med" len="med"/>
+                      <a:tailEnd type="none" w="med" len="med"/>
+                    </a:lnR>
+                    <a:lnT w="12700" cap="flat" cmpd="sng" algn="ctr">
+                      <a:solidFill>
+                        <a:srgbClr val="C5C4C1"/>
+                      </a:solidFill>
+                      <a:prstDash val="solid"/>
+                      <a:round/>
+                      <a:headEnd type="none" w="med" len="med"/>
+                      <a:tailEnd type="none" w="med" len="med"/>
+                    </a:lnT>
+                    <a:lnB w="12700" cap="flat" cmpd="sng" algn="ctr">
+                      <a:solidFill>
+                        <a:srgbClr val="C5C4C1"/>
+                      </a:solidFill>
+                      <a:prstDash val="solid"/>
+                      <a:round/>
+                      <a:headEnd type="none" w="med" len="med"/>
+                      <a:tailEnd type="none" w="med" len="med"/>
+                    </a:lnB>
+                  </a:tcPr>
+                </a:tc>
+                <a:tc>
+                  <a:txBody>
+                    <a:bodyPr/>
+                    <a:lstStyle/>
+                    <a:p>
+                      <a:pPr indent="0" marL="0">
+                        <a:lnSpc>
+                          <a:spcPts val="1680"/>
+                        </a:lnSpc>
+                        <a:buNone/>
+                      </a:pPr>
+                      <a:r>
+                        <a:rPr lang="en-US" sz="1200" dirty="0">
+                          <a:solidFill>
+                            <a:srgbClr val="3E4A5C"/>
+                          </a:solidFill>
+                          <a:latin typeface="Arial" pitchFamily="34" charset="0"/>
+                          <a:ea typeface="Arial" pitchFamily="34" charset="-122"/>
+                          <a:cs typeface="Arial" pitchFamily="34" charset="-120"/>
+                        </a:rPr>
+                        <a:t>Partly</a:t>
+                      </a:r>
+                      <a:endParaRPr lang="en-US" sz="1200" dirty="0">
+                        <a:latin typeface="Arial" charset="0"/>
+                        <a:ea typeface="Arial" charset="0"/>
+                        <a:cs typeface="Arial" charset="0"/>
+                      </a:endParaRPr>
+                    </a:p>
+                  </a:txBody>
+                  <a:tcPr marL="53340" marR="53340" marT="53340" marB="53340" anchor="t">
+                    <a:lnL w="12700" cap="flat" cmpd="sng" algn="ctr">
+                      <a:solidFill>
+                        <a:srgbClr val="C5C4C1"/>
+                      </a:solidFill>
+                      <a:prstDash val="solid"/>
+                      <a:round/>
+                      <a:headEnd type="none" w="med" len="med"/>
+                      <a:tailEnd type="none" w="med" len="med"/>
+                    </a:lnL>
+                    <a:lnR w="12700" cap="flat" cmpd="sng" algn="ctr">
+                      <a:solidFill>
+                        <a:srgbClr val="C5C4C1"/>
+                      </a:solidFill>
+                      <a:prstDash val="solid"/>
+                      <a:round/>
+                      <a:headEnd type="none" w="med" len="med"/>
+                      <a:tailEnd type="none" w="med" len="med"/>
+                    </a:lnR>
+                    <a:lnT w="12700" cap="flat" cmpd="sng" algn="ctr">
+                      <a:solidFill>
+                        <a:srgbClr val="C5C4C1"/>
+                      </a:solidFill>
+                      <a:prstDash val="solid"/>
+                      <a:round/>
+                      <a:headEnd type="none" w="med" len="med"/>
+                      <a:tailEnd type="none" w="med" len="med"/>
+                    </a:lnT>
+                    <a:lnB w="12700" cap="flat" cmpd="sng" algn="ctr">
+                      <a:solidFill>
+                        <a:srgbClr val="C5C4C1"/>
+                      </a:solidFill>
+                      <a:prstDash val="solid"/>
+                      <a:round/>
+                      <a:headEnd type="none" w="med" len="med"/>
+                      <a:tailEnd type="none" w="med" len="med"/>
+                    </a:lnB>
+                  </a:tcPr>
+                </a:tc>
+                <a:tc>
+                  <a:txBody>
+                    <a:bodyPr/>
+                    <a:lstStyle/>
+                    <a:p>
+                      <a:pPr indent="0" marL="0">
+                        <a:lnSpc>
+                          <a:spcPts val="1680"/>
+                        </a:lnSpc>
+                        <a:buNone/>
+                      </a:pPr>
+                      <a:r>
+                        <a:rPr lang="en-US" sz="1200" dirty="0">
+                          <a:solidFill>
+                            <a:srgbClr val="3E4A5C"/>
+                          </a:solidFill>
+                          <a:latin typeface="Arial" pitchFamily="34" charset="0"/>
+                          <a:ea typeface="Arial" pitchFamily="34" charset="-122"/>
+                          <a:cs typeface="Arial" pitchFamily="34" charset="-120"/>
+                        </a:rPr>
+                        <a:t>MAE / MSE / r / R²; no calibration; 7/94 severe</a:t>
+                      </a:r>
+                      <a:endParaRPr lang="en-US" sz="1200" dirty="0">
+                        <a:latin typeface="Arial" charset="0"/>
+                        <a:ea typeface="Arial" charset="0"/>
+                        <a:cs typeface="Arial" charset="0"/>
+                      </a:endParaRPr>
+                    </a:p>
+                  </a:txBody>
+                  <a:tcPr marL="53340" marR="53340" marT="53340" marB="53340" anchor="t">
+                    <a:lnL w="12700" cap="flat" cmpd="sng" algn="ctr">
+                      <a:solidFill>
+                        <a:srgbClr val="C5C4C1"/>
+                      </a:solidFill>
+                      <a:prstDash val="solid"/>
+                      <a:round/>
+                      <a:headEnd type="none" w="med" len="med"/>
+                      <a:tailEnd type="none" w="med" len="med"/>
+                    </a:lnL>
+                    <a:lnR w="12700" cap="flat" cmpd="sng" algn="ctr">
+                      <a:solidFill>
+                        <a:srgbClr val="C5C4C1"/>
+                      </a:solidFill>
+                      <a:prstDash val="solid"/>
+                      <a:round/>
+                      <a:headEnd type="none" w="med" len="med"/>
+                      <a:tailEnd type="none" w="med" len="med"/>
+                    </a:lnR>
+                    <a:lnT w="12700" cap="flat" cmpd="sng" algn="ctr">
+                      <a:solidFill>
+                        <a:srgbClr val="C5C4C1"/>
+                      </a:solidFill>
+                      <a:prstDash val="solid"/>
+                      <a:round/>
+                      <a:headEnd type="none" w="med" len="med"/>
+                      <a:tailEnd type="none" w="med" len="med"/>
+                    </a:lnT>
+                    <a:lnB w="12700" cap="flat" cmpd="sng" algn="ctr">
+                      <a:solidFill>
+                        <a:srgbClr val="C5C4C1"/>
+                      </a:solidFill>
+                      <a:prstDash val="solid"/>
+                      <a:round/>
+                      <a:headEnd type="none" w="med" len="med"/>
+                      <a:tailEnd type="none" w="med" len="med"/>
+                    </a:lnB>
+                  </a:tcPr>
+                </a:tc>
+              </a:tr>
+              <a:tr h="332680">
+                <a:tc>
+                  <a:txBody>
+                    <a:bodyPr/>
+                    <a:lstStyle/>
+                    <a:p>
+                      <a:pPr indent="0" marL="0">
+                        <a:lnSpc>
+                          <a:spcPts val="1680"/>
+                        </a:lnSpc>
+                        <a:buNone/>
+                      </a:pPr>
+                      <a:r>
+                        <a:rPr lang="en-US" sz="1200" dirty="0">
+                          <a:solidFill>
+                            <a:srgbClr val="3E4A5C"/>
+                          </a:solidFill>
+                          <a:latin typeface="Arial" pitchFamily="34" charset="0"/>
+                          <a:ea typeface="Arial" pitchFamily="34" charset="-122"/>
+                          <a:cs typeface="Arial" pitchFamily="34" charset="-120"/>
+                        </a:rPr>
+                        <a:t>④</a:t>
+                      </a:r>
+                      <a:endParaRPr lang="en-US" sz="1200" dirty="0">
+                        <a:latin typeface="Arial" charset="0"/>
+                        <a:ea typeface="Arial" charset="0"/>
+                        <a:cs typeface="Arial" charset="0"/>
+                      </a:endParaRPr>
+                    </a:p>
+                  </a:txBody>
+                  <a:tcPr marL="53340" marR="53340" marT="53340" marB="53340" anchor="t">
+                    <a:lnL w="12700" cap="flat" cmpd="sng" algn="ctr">
+                      <a:solidFill>
+                        <a:srgbClr val="C5C4C1"/>
+                      </a:solidFill>
+                      <a:prstDash val="solid"/>
+                      <a:round/>
+                      <a:headEnd type="none" w="med" len="med"/>
+                      <a:tailEnd type="none" w="med" len="med"/>
+                    </a:lnL>
+                    <a:lnR w="12700" cap="flat" cmpd="sng" algn="ctr">
+                      <a:solidFill>
+                        <a:srgbClr val="C5C4C1"/>
+                      </a:solidFill>
+                      <a:prstDash val="solid"/>
+                      <a:round/>
+                      <a:headEnd type="none" w="med" len="med"/>
+                      <a:tailEnd type="none" w="med" len="med"/>
+                    </a:lnR>
+                    <a:lnT w="12700" cap="flat" cmpd="sng" algn="ctr">
+                      <a:solidFill>
+                        <a:srgbClr val="C5C4C1"/>
+                      </a:solidFill>
+                      <a:prstDash val="solid"/>
+                      <a:round/>
+                      <a:headEnd type="none" w="med" len="med"/>
+                      <a:tailEnd type="none" w="med" len="med"/>
+                    </a:lnT>
+                    <a:lnB w="12700" cap="flat" cmpd="sng" algn="ctr">
+                      <a:solidFill>
+                        <a:srgbClr val="C5C4C1"/>
+                      </a:solidFill>
+                      <a:prstDash val="solid"/>
+                      <a:round/>
+                      <a:headEnd type="none" w="med" len="med"/>
+                      <a:tailEnd type="none" w="med" len="med"/>
+                    </a:lnB>
+                  </a:tcPr>
+                </a:tc>
+                <a:tc>
+                  <a:txBody>
+                    <a:bodyPr/>
+                    <a:lstStyle/>
+                    <a:p>
+                      <a:pPr indent="0" marL="0">
+                        <a:lnSpc>
+                          <a:spcPts val="1680"/>
+                        </a:lnSpc>
+                        <a:buNone/>
+                      </a:pPr>
+                      <a:r>
+                        <a:rPr lang="en-US" sz="1200" dirty="0">
+                          <a:solidFill>
+                            <a:srgbClr val="3E4A5C"/>
+                          </a:solidFill>
+                          <a:latin typeface="Arial" pitchFamily="34" charset="0"/>
+                          <a:ea typeface="Arial" pitchFamily="34" charset="-122"/>
+                          <a:cs typeface="Arial" pitchFamily="34" charset="-120"/>
+                        </a:rPr>
+                        <a:t>Explainable?</a:t>
+                      </a:r>
+                      <a:endParaRPr lang="en-US" sz="1200" dirty="0">
+                        <a:latin typeface="Arial" charset="0"/>
+                        <a:ea typeface="Arial" charset="0"/>
+                        <a:cs typeface="Arial" charset="0"/>
+                      </a:endParaRPr>
+                    </a:p>
+                  </a:txBody>
+                  <a:tcPr marL="53340" marR="53340" marT="53340" marB="53340" anchor="t">
+                    <a:lnL w="12700" cap="flat" cmpd="sng" algn="ctr">
+                      <a:solidFill>
+                        <a:srgbClr val="C5C4C1"/>
+                      </a:solidFill>
+                      <a:prstDash val="solid"/>
+                      <a:round/>
+                      <a:headEnd type="none" w="med" len="med"/>
+                      <a:tailEnd type="none" w="med" len="med"/>
+                    </a:lnL>
+                    <a:lnR w="12700" cap="flat" cmpd="sng" algn="ctr">
+                      <a:solidFill>
+                        <a:srgbClr val="C5C4C1"/>
+                      </a:solidFill>
+                      <a:prstDash val="solid"/>
+                      <a:round/>
+                      <a:headEnd type="none" w="med" len="med"/>
+                      <a:tailEnd type="none" w="med" len="med"/>
+                    </a:lnR>
+                    <a:lnT w="12700" cap="flat" cmpd="sng" algn="ctr">
+                      <a:solidFill>
+                        <a:srgbClr val="C5C4C1"/>
+                      </a:solidFill>
+                      <a:prstDash val="solid"/>
+                      <a:round/>
+                      <a:headEnd type="none" w="med" len="med"/>
+                      <a:tailEnd type="none" w="med" len="med"/>
+                    </a:lnT>
+                    <a:lnB w="12700" cap="flat" cmpd="sng" algn="ctr">
+                      <a:solidFill>
+                        <a:srgbClr val="C5C4C1"/>
+                      </a:solidFill>
+                      <a:prstDash val="solid"/>
+                      <a:round/>
+                      <a:headEnd type="none" w="med" len="med"/>
+                      <a:tailEnd type="none" w="med" len="med"/>
+                    </a:lnB>
+                  </a:tcPr>
+                </a:tc>
+                <a:tc>
+                  <a:txBody>
+                    <a:bodyPr/>
+                    <a:lstStyle/>
+                    <a:p>
+                      <a:pPr indent="0" marL="0">
+                        <a:lnSpc>
+                          <a:spcPts val="1680"/>
+                        </a:lnSpc>
+                        <a:buNone/>
+                      </a:pPr>
+                      <a:r>
+                        <a:rPr lang="en-US" sz="1200" dirty="0">
+                          <a:solidFill>
+                            <a:srgbClr val="B5521B"/>
+                          </a:solidFill>
+                          <a:latin typeface="Arial" pitchFamily="34" charset="0"/>
+                          <a:ea typeface="Arial" pitchFamily="34" charset="-122"/>
+                          <a:cs typeface="Arial" pitchFamily="34" charset="-120"/>
+                        </a:rPr>
+                        <a:t>Not met</a:t>
+                      </a:r>
+                      <a:endParaRPr lang="en-US" sz="1200" dirty="0">
+                        <a:latin typeface="Arial" charset="0"/>
+                        <a:ea typeface="Arial" charset="0"/>
+                        <a:cs typeface="Arial" charset="0"/>
+                      </a:endParaRPr>
+                    </a:p>
+                  </a:txBody>
+                  <a:tcPr marL="53340" marR="53340" marT="53340" marB="53340" anchor="t">
+                    <a:lnL w="12700" cap="flat" cmpd="sng" algn="ctr">
+                      <a:solidFill>
+                        <a:srgbClr val="C5C4C1"/>
+                      </a:solidFill>
+                      <a:prstDash val="solid"/>
+                      <a:round/>
+                      <a:headEnd type="none" w="med" len="med"/>
+                      <a:tailEnd type="none" w="med" len="med"/>
+                    </a:lnL>
+                    <a:lnR w="12700" cap="flat" cmpd="sng" algn="ctr">
+                      <a:solidFill>
+                        <a:srgbClr val="C5C4C1"/>
+                      </a:solidFill>
+                      <a:prstDash val="solid"/>
+                      <a:round/>
+                      <a:headEnd type="none" w="med" len="med"/>
+                      <a:tailEnd type="none" w="med" len="med"/>
+                    </a:lnR>
+                    <a:lnT w="12700" cap="flat" cmpd="sng" algn="ctr">
+                      <a:solidFill>
+                        <a:srgbClr val="C5C4C1"/>
+                      </a:solidFill>
+                      <a:prstDash val="solid"/>
+                      <a:round/>
+                      <a:headEnd type="none" w="med" len="med"/>
+                      <a:tailEnd type="none" w="med" len="med"/>
+                    </a:lnT>
+                    <a:lnB w="12700" cap="flat" cmpd="sng" algn="ctr">
+                      <a:solidFill>
+                        <a:srgbClr val="C5C4C1"/>
+                      </a:solidFill>
+                      <a:prstDash val="solid"/>
+                      <a:round/>
+                      <a:headEnd type="none" w="med" len="med"/>
+                      <a:tailEnd type="none" w="med" len="med"/>
+                    </a:lnB>
+                  </a:tcPr>
+                </a:tc>
+                <a:tc>
+                  <a:txBody>
+                    <a:bodyPr/>
+                    <a:lstStyle/>
+                    <a:p>
+                      <a:pPr indent="0" marL="0">
+                        <a:lnSpc>
+                          <a:spcPts val="1680"/>
+                        </a:lnSpc>
+                        <a:buNone/>
+                      </a:pPr>
+                      <a:r>
+                        <a:rPr lang="en-US" sz="1200" dirty="0">
+                          <a:solidFill>
+                            <a:srgbClr val="3E4A5C"/>
+                          </a:solidFill>
+                          <a:latin typeface="Arial" pitchFamily="34" charset="0"/>
+                          <a:ea typeface="Arial" pitchFamily="34" charset="-122"/>
+                          <a:cs typeface="Arial" pitchFamily="34" charset="-120"/>
+                        </a:rPr>
+                        <a:t>4 hand-picked saliency maps, no SHAP</a:t>
+                      </a:r>
+                      <a:endParaRPr lang="en-US" sz="1200" dirty="0">
+                        <a:latin typeface="Arial" charset="0"/>
+                        <a:ea typeface="Arial" charset="0"/>
+                        <a:cs typeface="Arial" charset="0"/>
+                      </a:endParaRPr>
+                    </a:p>
+                  </a:txBody>
+                  <a:tcPr marL="53340" marR="53340" marT="53340" marB="53340" anchor="t">
+                    <a:lnL w="12700" cap="flat" cmpd="sng" algn="ctr">
+                      <a:solidFill>
+                        <a:srgbClr val="C5C4C1"/>
+                      </a:solidFill>
+                      <a:prstDash val="solid"/>
+                      <a:round/>
+                      <a:headEnd type="none" w="med" len="med"/>
+                      <a:tailEnd type="none" w="med" len="med"/>
+                    </a:lnL>
+                    <a:lnR w="12700" cap="flat" cmpd="sng" algn="ctr">
+                      <a:solidFill>
+                        <a:srgbClr val="C5C4C1"/>
+                      </a:solidFill>
+                      <a:prstDash val="solid"/>
+                      <a:round/>
+                      <a:headEnd type="none" w="med" len="med"/>
+                      <a:tailEnd type="none" w="med" len="med"/>
+                    </a:lnR>
+                    <a:lnT w="12700" cap="flat" cmpd="sng" algn="ctr">
+                      <a:solidFill>
+                        <a:srgbClr val="C5C4C1"/>
+                      </a:solidFill>
+                      <a:prstDash val="solid"/>
+                      <a:round/>
+                      <a:headEnd type="none" w="med" len="med"/>
+                      <a:tailEnd type="none" w="med" len="med"/>
+                    </a:lnT>
+                    <a:lnB w="12700" cap="flat" cmpd="sng" algn="ctr">
+                      <a:solidFill>
+                        <a:srgbClr val="C5C4C1"/>
+                      </a:solidFill>
+                      <a:prstDash val="solid"/>
+                      <a:round/>
+                      <a:headEnd type="none" w="med" len="med"/>
+                      <a:tailEnd type="none" w="med" len="med"/>
+                    </a:lnB>
+                  </a:tcPr>
+                </a:tc>
+              </a:tr>
+              <a:tr h="332680">
+                <a:tc>
+                  <a:txBody>
+                    <a:bodyPr/>
+                    <a:lstStyle/>
+                    <a:p>
+                      <a:pPr indent="0" marL="0">
+                        <a:lnSpc>
+                          <a:spcPts val="1680"/>
+                        </a:lnSpc>
+                        <a:buNone/>
+                      </a:pPr>
+                      <a:r>
+                        <a:rPr lang="en-US" sz="1200" dirty="0">
+                          <a:solidFill>
+                            <a:srgbClr val="3E4A5C"/>
+                          </a:solidFill>
+                          <a:latin typeface="Arial" pitchFamily="34" charset="0"/>
+                          <a:ea typeface="Arial" pitchFamily="34" charset="-122"/>
+                          <a:cs typeface="Arial" pitchFamily="34" charset="-120"/>
+                        </a:rPr>
+                        <a:t>④</a:t>
+                      </a:r>
+                      <a:endParaRPr lang="en-US" sz="1200" dirty="0">
+                        <a:latin typeface="Arial" charset="0"/>
+                        <a:ea typeface="Arial" charset="0"/>
+                        <a:cs typeface="Arial" charset="0"/>
+                      </a:endParaRPr>
+                    </a:p>
+                  </a:txBody>
+                  <a:tcPr marL="53340" marR="53340" marT="53340" marB="53340" anchor="t">
+                    <a:lnL w="12700" cap="flat" cmpd="sng" algn="ctr">
+                      <a:solidFill>
+                        <a:srgbClr val="C5C4C1"/>
+                      </a:solidFill>
+                      <a:prstDash val="solid"/>
+                      <a:round/>
+                      <a:headEnd type="none" w="med" len="med"/>
+                      <a:tailEnd type="none" w="med" len="med"/>
+                    </a:lnL>
+                    <a:lnR w="12700" cap="flat" cmpd="sng" algn="ctr">
+                      <a:solidFill>
+                        <a:srgbClr val="C5C4C1"/>
+                      </a:solidFill>
+                      <a:prstDash val="solid"/>
+                      <a:round/>
+                      <a:headEnd type="none" w="med" len="med"/>
+                      <a:tailEnd type="none" w="med" len="med"/>
+                    </a:lnR>
+                    <a:lnT w="12700" cap="flat" cmpd="sng" algn="ctr">
+                      <a:solidFill>
+                        <a:srgbClr val="C5C4C1"/>
+                      </a:solidFill>
+                      <a:prstDash val="solid"/>
+                      <a:round/>
+                      <a:headEnd type="none" w="med" len="med"/>
+                      <a:tailEnd type="none" w="med" len="med"/>
+                    </a:lnT>
+                    <a:lnB w="12700" cap="flat" cmpd="sng" algn="ctr">
+                      <a:solidFill>
+                        <a:srgbClr val="C5C4C1"/>
+                      </a:solidFill>
+                      <a:prstDash val="solid"/>
+                      <a:round/>
+                      <a:headEnd type="none" w="med" len="med"/>
+                      <a:tailEnd type="none" w="med" len="med"/>
+                    </a:lnB>
+                  </a:tcPr>
+                </a:tc>
+                <a:tc>
+                  <a:txBody>
+                    <a:bodyPr/>
+                    <a:lstStyle/>
+                    <a:p>
+                      <a:pPr indent="0" marL="0">
+                        <a:lnSpc>
+                          <a:spcPts val="1680"/>
+                        </a:lnSpc>
+                        <a:buNone/>
+                      </a:pPr>
+                      <a:r>
+                        <a:rPr lang="en-US" sz="1200" dirty="0">
+                          <a:solidFill>
+                            <a:srgbClr val="3E4A5C"/>
+                          </a:solidFill>
+                          <a:latin typeface="Arial" pitchFamily="34" charset="0"/>
+                          <a:ea typeface="Arial" pitchFamily="34" charset="-122"/>
+                          <a:cs typeface="Arial" pitchFamily="34" charset="-120"/>
+                        </a:rPr>
+                        <a:t>Reproducible / generalisable?</a:t>
+                      </a:r>
+                      <a:endParaRPr lang="en-US" sz="1200" dirty="0">
+                        <a:latin typeface="Arial" charset="0"/>
+                        <a:ea typeface="Arial" charset="0"/>
+                        <a:cs typeface="Arial" charset="0"/>
+                      </a:endParaRPr>
+                    </a:p>
+                  </a:txBody>
+                  <a:tcPr marL="53340" marR="53340" marT="53340" marB="53340" anchor="t">
+                    <a:lnL w="12700" cap="flat" cmpd="sng" algn="ctr">
+                      <a:solidFill>
+                        <a:srgbClr val="C5C4C1"/>
+                      </a:solidFill>
+                      <a:prstDash val="solid"/>
+                      <a:round/>
+                      <a:headEnd type="none" w="med" len="med"/>
+                      <a:tailEnd type="none" w="med" len="med"/>
+                    </a:lnL>
+                    <a:lnR w="12700" cap="flat" cmpd="sng" algn="ctr">
+                      <a:solidFill>
+                        <a:srgbClr val="C5C4C1"/>
+                      </a:solidFill>
+                      <a:prstDash val="solid"/>
+                      <a:round/>
+                      <a:headEnd type="none" w="med" len="med"/>
+                      <a:tailEnd type="none" w="med" len="med"/>
+                    </a:lnR>
+                    <a:lnT w="12700" cap="flat" cmpd="sng" algn="ctr">
+                      <a:solidFill>
+                        <a:srgbClr val="C5C4C1"/>
+                      </a:solidFill>
+                      <a:prstDash val="solid"/>
+                      <a:round/>
+                      <a:headEnd type="none" w="med" len="med"/>
+                      <a:tailEnd type="none" w="med" len="med"/>
+                    </a:lnT>
+                    <a:lnB w="12700" cap="flat" cmpd="sng" algn="ctr">
+                      <a:solidFill>
+                        <a:srgbClr val="C5C4C1"/>
+                      </a:solidFill>
+                      <a:prstDash val="solid"/>
+                      <a:round/>
+                      <a:headEnd type="none" w="med" len="med"/>
+                      <a:tailEnd type="none" w="med" len="med"/>
+                    </a:lnB>
+                  </a:tcPr>
+                </a:tc>
+                <a:tc>
+                  <a:txBody>
+                    <a:bodyPr/>
+                    <a:lstStyle/>
+                    <a:p>
+                      <a:pPr indent="0" marL="0">
+                        <a:lnSpc>
+                          <a:spcPts val="1680"/>
+                        </a:lnSpc>
+                        <a:buNone/>
+                      </a:pPr>
+                      <a:r>
+                        <a:rPr lang="en-US" sz="1200" dirty="0">
+                          <a:solidFill>
+                            <a:srgbClr val="14213D"/>
+                          </a:solidFill>
+                          <a:latin typeface="Arial" pitchFamily="34" charset="0"/>
+                          <a:ea typeface="Arial" pitchFamily="34" charset="-122"/>
+                          <a:cs typeface="Arial" pitchFamily="34" charset="-120"/>
+                        </a:rPr>
+                        <a:t>Met / Not met</a:t>
+                      </a:r>
+                      <a:endParaRPr lang="en-US" sz="1200" dirty="0">
+                        <a:latin typeface="Arial" charset="0"/>
+                        <a:ea typeface="Arial" charset="0"/>
+                        <a:cs typeface="Arial" charset="0"/>
+                      </a:endParaRPr>
+                    </a:p>
+                  </a:txBody>
+                  <a:tcPr marL="53340" marR="53340" marT="53340" marB="53340" anchor="t">
+                    <a:lnL w="12700" cap="flat" cmpd="sng" algn="ctr">
+                      <a:solidFill>
+                        <a:srgbClr val="C5C4C1"/>
+                      </a:solidFill>
+                      <a:prstDash val="solid"/>
+                      <a:round/>
+                      <a:headEnd type="none" w="med" len="med"/>
+                      <a:tailEnd type="none" w="med" len="med"/>
+                    </a:lnL>
+                    <a:lnR w="12700" cap="flat" cmpd="sng" algn="ctr">
+                      <a:solidFill>
+                        <a:srgbClr val="C5C4C1"/>
+                      </a:solidFill>
+                      <a:prstDash val="solid"/>
+                      <a:round/>
+                      <a:headEnd type="none" w="med" len="med"/>
+                      <a:tailEnd type="none" w="med" len="med"/>
+                    </a:lnR>
+                    <a:lnT w="12700" cap="flat" cmpd="sng" algn="ctr">
+                      <a:solidFill>
+                        <a:srgbClr val="C5C4C1"/>
+                      </a:solidFill>
+                      <a:prstDash val="solid"/>
+                      <a:round/>
+                      <a:headEnd type="none" w="med" len="med"/>
+                      <a:tailEnd type="none" w="med" len="med"/>
+                    </a:lnT>
+                    <a:lnB w="12700" cap="flat" cmpd="sng" algn="ctr">
+                      <a:solidFill>
+                        <a:srgbClr val="C5C4C1"/>
+                      </a:solidFill>
+                      <a:prstDash val="solid"/>
+                      <a:round/>
+                      <a:headEnd type="none" w="med" len="med"/>
+                      <a:tailEnd type="none" w="med" len="med"/>
+                    </a:lnB>
+                  </a:tcPr>
+                </a:tc>
+                <a:tc>
+                  <a:txBody>
+                    <a:bodyPr/>
+                    <a:lstStyle/>
+                    <a:p>
+                      <a:pPr indent="0" marL="0">
+                        <a:lnSpc>
+                          <a:spcPts val="1680"/>
+                        </a:lnSpc>
+                        <a:buNone/>
+                      </a:pPr>
+                      <a:r>
+                        <a:rPr lang="en-US" sz="1200" dirty="0">
+                          <a:solidFill>
+                            <a:srgbClr val="3E4A5C"/>
+                          </a:solidFill>
+                          <a:latin typeface="Arial" pitchFamily="34" charset="0"/>
+                          <a:ea typeface="Arial" pitchFamily="34" charset="-122"/>
+                          <a:cs typeface="Arial" pitchFamily="34" charset="-120"/>
+                        </a:rPr>
+                        <a:t>Code + data open, Part I within 0.02 MAE; no external cohort</a:t>
+                      </a:r>
+                      <a:endParaRPr lang="en-US" sz="1200" dirty="0">
+                        <a:latin typeface="Arial" charset="0"/>
+                        <a:ea typeface="Arial" charset="0"/>
+                        <a:cs typeface="Arial" charset="0"/>
+                      </a:endParaRPr>
+                    </a:p>
+                  </a:txBody>
+                  <a:tcPr marL="53340" marR="53340" marT="53340" marB="53340" anchor="t">
+                    <a:lnL w="12700" cap="flat" cmpd="sng" algn="ctr">
+                      <a:solidFill>
+                        <a:srgbClr val="C5C4C1"/>
+                      </a:solidFill>
+                      <a:prstDash val="solid"/>
+                      <a:round/>
+                      <a:headEnd type="none" w="med" len="med"/>
+                      <a:tailEnd type="none" w="med" len="med"/>
+                    </a:lnL>
+                    <a:lnR w="12700" cap="flat" cmpd="sng" algn="ctr">
+                      <a:solidFill>
+                        <a:srgbClr val="C5C4C1"/>
+                      </a:solidFill>
+                      <a:prstDash val="solid"/>
+                      <a:round/>
+                      <a:headEnd type="none" w="med" len="med"/>
+                      <a:tailEnd type="none" w="med" len="med"/>
+                    </a:lnR>
+                    <a:lnT w="12700" cap="flat" cmpd="sng" algn="ctr">
+                      <a:solidFill>
+                        <a:srgbClr val="C5C4C1"/>
+                      </a:solidFill>
+                      <a:prstDash val="solid"/>
+                      <a:round/>
+                      <a:headEnd type="none" w="med" len="med"/>
+                      <a:tailEnd type="none" w="med" len="med"/>
+                    </a:lnT>
+                    <a:lnB w="12700" cap="flat" cmpd="sng" algn="ctr">
+                      <a:solidFill>
+                        <a:srgbClr val="C5C4C1"/>
+                      </a:solidFill>
+                      <a:prstDash val="solid"/>
+                      <a:round/>
+                      <a:headEnd type="none" w="med" len="med"/>
+                      <a:tailEnd type="none" w="med" len="med"/>
+                    </a:lnB>
+                  </a:tcPr>
+                </a:tc>
+              </a:tr>
+              <a:tr h="332680">
+                <a:tc>
+                  <a:txBody>
+                    <a:bodyPr/>
+                    <a:lstStyle/>
+                    <a:p>
+                      <a:pPr indent="0" marL="0">
+                        <a:lnSpc>
+                          <a:spcPts val="1680"/>
+                        </a:lnSpc>
+                        <a:buNone/>
+                      </a:pPr>
+                      <a:r>
+                        <a:rPr lang="en-US" sz="1200" dirty="0">
+                          <a:solidFill>
+                            <a:srgbClr val="3E4A5C"/>
+                          </a:solidFill>
+                          <a:latin typeface="Arial" pitchFamily="34" charset="0"/>
+                          <a:ea typeface="Arial" pitchFamily="34" charset="-122"/>
+                          <a:cs typeface="Arial" pitchFamily="34" charset="-120"/>
+                        </a:rPr>
+                        <a:t>⑤</a:t>
+                      </a:r>
+                      <a:endParaRPr lang="en-US" sz="1200" dirty="0">
+                        <a:latin typeface="Arial" charset="0"/>
+                        <a:ea typeface="Arial" charset="0"/>
+                        <a:cs typeface="Arial" charset="0"/>
+                      </a:endParaRPr>
+                    </a:p>
+                  </a:txBody>
+                  <a:tcPr marL="53340" marR="53340" marT="53340" marB="53340" anchor="t">
+                    <a:lnL w="12700" cap="flat" cmpd="sng" algn="ctr">
+                      <a:solidFill>
+                        <a:srgbClr val="C5C4C1"/>
+                      </a:solidFill>
+                      <a:prstDash val="solid"/>
+                      <a:round/>
+                      <a:headEnd type="none" w="med" len="med"/>
+                      <a:tailEnd type="none" w="med" len="med"/>
+                    </a:lnL>
+                    <a:lnR w="12700" cap="flat" cmpd="sng" algn="ctr">
+                      <a:solidFill>
+                        <a:srgbClr val="C5C4C1"/>
+                      </a:solidFill>
+                      <a:prstDash val="solid"/>
+                      <a:round/>
+                      <a:headEnd type="none" w="med" len="med"/>
+                      <a:tailEnd type="none" w="med" len="med"/>
+                    </a:lnR>
+                    <a:lnT w="12700" cap="flat" cmpd="sng" algn="ctr">
+                      <a:solidFill>
+                        <a:srgbClr val="C5C4C1"/>
+                      </a:solidFill>
+                      <a:prstDash val="solid"/>
+                      <a:round/>
+                      <a:headEnd type="none" w="med" len="med"/>
+                      <a:tailEnd type="none" w="med" len="med"/>
+                    </a:lnT>
+                    <a:lnB w="12700" cap="flat" cmpd="sng" algn="ctr">
+                      <a:solidFill>
+                        <a:srgbClr val="C5C4C1"/>
+                      </a:solidFill>
+                      <a:prstDash val="solid"/>
+                      <a:round/>
+                      <a:headEnd type="none" w="med" len="med"/>
+                      <a:tailEnd type="none" w="med" len="med"/>
+                    </a:lnB>
+                  </a:tcPr>
+                </a:tc>
+                <a:tc>
+                  <a:txBody>
+                    <a:bodyPr/>
+                    <a:lstStyle/>
+                    <a:p>
+                      <a:pPr indent="0" marL="0">
+                        <a:lnSpc>
+                          <a:spcPts val="1680"/>
+                        </a:lnSpc>
+                        <a:buNone/>
+                      </a:pPr>
+                      <a:r>
+                        <a:rPr lang="en-US" sz="1200" dirty="0">
+                          <a:solidFill>
+                            <a:srgbClr val="3E4A5C"/>
+                          </a:solidFill>
+                          <a:latin typeface="Arial" pitchFamily="34" charset="0"/>
+                          <a:ea typeface="Arial" pitchFamily="34" charset="-122"/>
+                          <a:cs typeface="Arial" pitchFamily="34" charset="-120"/>
+                        </a:rPr>
+                        <a:t>Clinical context, limits, ready?</a:t>
+                      </a:r>
+                      <a:endParaRPr lang="en-US" sz="1200" dirty="0">
+                        <a:latin typeface="Arial" charset="0"/>
+                        <a:ea typeface="Arial" charset="0"/>
+                        <a:cs typeface="Arial" charset="0"/>
+                      </a:endParaRPr>
+                    </a:p>
+                  </a:txBody>
+                  <a:tcPr marL="53340" marR="53340" marT="53340" marB="53340" anchor="t">
+                    <a:lnL w="12700" cap="flat" cmpd="sng" algn="ctr">
+                      <a:solidFill>
+                        <a:srgbClr val="C5C4C1"/>
+                      </a:solidFill>
+                      <a:prstDash val="solid"/>
+                      <a:round/>
+                      <a:headEnd type="none" w="med" len="med"/>
+                      <a:tailEnd type="none" w="med" len="med"/>
+                    </a:lnL>
+                    <a:lnR w="12700" cap="flat" cmpd="sng" algn="ctr">
+                      <a:solidFill>
+                        <a:srgbClr val="C5C4C1"/>
+                      </a:solidFill>
+                      <a:prstDash val="solid"/>
+                      <a:round/>
+                      <a:headEnd type="none" w="med" len="med"/>
+                      <a:tailEnd type="none" w="med" len="med"/>
+                    </a:lnR>
+                    <a:lnT w="12700" cap="flat" cmpd="sng" algn="ctr">
+                      <a:solidFill>
+                        <a:srgbClr val="C5C4C1"/>
+                      </a:solidFill>
+                      <a:prstDash val="solid"/>
+                      <a:round/>
+                      <a:headEnd type="none" w="med" len="med"/>
+                      <a:tailEnd type="none" w="med" len="med"/>
+                    </a:lnT>
+                    <a:lnB w="12700" cap="flat" cmpd="sng" algn="ctr">
+                      <a:solidFill>
+                        <a:srgbClr val="C5C4C1"/>
+                      </a:solidFill>
+                      <a:prstDash val="solid"/>
+                      <a:round/>
+                      <a:headEnd type="none" w="med" len="med"/>
+                      <a:tailEnd type="none" w="med" len="med"/>
+                    </a:lnB>
+                  </a:tcPr>
+                </a:tc>
+                <a:tc>
+                  <a:txBody>
+                    <a:bodyPr/>
+                    <a:lstStyle/>
+                    <a:p>
+                      <a:pPr indent="0" marL="0">
+                        <a:lnSpc>
+                          <a:spcPts val="1680"/>
+                        </a:lnSpc>
+                        <a:buNone/>
+                      </a:pPr>
+                      <a:r>
+                        <a:rPr lang="en-US" sz="1200" dirty="0">
+                          <a:solidFill>
+                            <a:srgbClr val="B5521B"/>
+                          </a:solidFill>
+                          <a:latin typeface="Arial" pitchFamily="34" charset="0"/>
+                          <a:ea typeface="Arial" pitchFamily="34" charset="-122"/>
+                          <a:cs typeface="Arial" pitchFamily="34" charset="-120"/>
+                        </a:rPr>
+                        <a:t>Not ready</a:t>
+                      </a:r>
+                      <a:endParaRPr lang="en-US" sz="1200" dirty="0">
+                        <a:latin typeface="Arial" charset="0"/>
+                        <a:ea typeface="Arial" charset="0"/>
+                        <a:cs typeface="Arial" charset="0"/>
+                      </a:endParaRPr>
+                    </a:p>
+                  </a:txBody>
+                  <a:tcPr marL="53340" marR="53340" marT="53340" marB="53340" anchor="t">
+                    <a:lnL w="12700" cap="flat" cmpd="sng" algn="ctr">
+                      <a:solidFill>
+                        <a:srgbClr val="C5C4C1"/>
+                      </a:solidFill>
+                      <a:prstDash val="solid"/>
+                      <a:round/>
+                      <a:headEnd type="none" w="med" len="med"/>
+                      <a:tailEnd type="none" w="med" len="med"/>
+                    </a:lnL>
+                    <a:lnR w="12700" cap="flat" cmpd="sng" algn="ctr">
+                      <a:solidFill>
+                        <a:srgbClr val="C5C4C1"/>
+                      </a:solidFill>
+                      <a:prstDash val="solid"/>
+                      <a:round/>
+                      <a:headEnd type="none" w="med" len="med"/>
+                      <a:tailEnd type="none" w="med" len="med"/>
+                    </a:lnR>
+                    <a:lnT w="12700" cap="flat" cmpd="sng" algn="ctr">
+                      <a:solidFill>
+                        <a:srgbClr val="C5C4C1"/>
+                      </a:solidFill>
+                      <a:prstDash val="solid"/>
+                      <a:round/>
+                      <a:headEnd type="none" w="med" len="med"/>
+                      <a:tailEnd type="none" w="med" len="med"/>
+                    </a:lnT>
+                    <a:lnB w="12700" cap="flat" cmpd="sng" algn="ctr">
+                      <a:solidFill>
+                        <a:srgbClr val="C5C4C1"/>
+                      </a:solidFill>
+                      <a:prstDash val="solid"/>
+                      <a:round/>
+                      <a:headEnd type="none" w="med" len="med"/>
+                      <a:tailEnd type="none" w="med" len="med"/>
+                    </a:lnB>
+                  </a:tcPr>
+                </a:tc>
+                <a:tc>
+                  <a:txBody>
+                    <a:bodyPr/>
+                    <a:lstStyle/>
+                    <a:p>
+                      <a:pPr indent="0" marL="0">
+                        <a:lnSpc>
+                          <a:spcPts val="1680"/>
+                        </a:lnSpc>
+                        <a:buNone/>
+                      </a:pPr>
+                      <a:r>
+                        <a:rPr lang="en-US" sz="1200" dirty="0">
+                          <a:solidFill>
+                            <a:srgbClr val="3E4A5C"/>
+                          </a:solidFill>
+                          <a:latin typeface="Arial" pitchFamily="34" charset="0"/>
+                          <a:ea typeface="Arial" pitchFamily="34" charset="-122"/>
+                          <a:cs typeface="Arial" pitchFamily="34" charset="-120"/>
+                        </a:rPr>
+                        <a:t>ICU use claimed, PA-only; 5 limits unstated</a:t>
+                      </a:r>
+                      <a:endParaRPr lang="en-US" sz="1200" dirty="0">
+                        <a:latin typeface="Arial" charset="0"/>
+                        <a:ea typeface="Arial" charset="0"/>
+                        <a:cs typeface="Arial" charset="0"/>
+                      </a:endParaRPr>
+                    </a:p>
+                  </a:txBody>
+                  <a:tcPr marL="53340" marR="53340" marT="53340" marB="53340" anchor="t">
+                    <a:lnL w="12700" cap="flat" cmpd="sng" algn="ctr">
+                      <a:solidFill>
+                        <a:srgbClr val="C5C4C1"/>
+                      </a:solidFill>
+                      <a:prstDash val="solid"/>
+                      <a:round/>
+                      <a:headEnd type="none" w="med" len="med"/>
+                      <a:tailEnd type="none" w="med" len="med"/>
+                    </a:lnL>
+                    <a:lnR w="12700" cap="flat" cmpd="sng" algn="ctr">
+                      <a:solidFill>
+                        <a:srgbClr val="C5C4C1"/>
+                      </a:solidFill>
+                      <a:prstDash val="solid"/>
+                      <a:round/>
+                      <a:headEnd type="none" w="med" len="med"/>
+                      <a:tailEnd type="none" w="med" len="med"/>
+                    </a:lnR>
+                    <a:lnT w="12700" cap="flat" cmpd="sng" algn="ctr">
+                      <a:solidFill>
+                        <a:srgbClr val="C5C4C1"/>
+                      </a:solidFill>
+                      <a:prstDash val="solid"/>
+                      <a:round/>
+                      <a:headEnd type="none" w="med" len="med"/>
+                      <a:tailEnd type="none" w="med" len="med"/>
+                    </a:lnT>
+                    <a:lnB w="12700" cap="flat" cmpd="sng" algn="ctr">
+                      <a:solidFill>
+                        <a:srgbClr val="C5C4C1"/>
+                      </a:solidFill>
+                      <a:prstDash val="solid"/>
+                      <a:round/>
+                      <a:headEnd type="none" w="med" len="med"/>
+                      <a:tailEnd type="none" w="med" len="med"/>
+                    </a:lnB>
+                  </a:tcPr>
+                </a:tc>
+              </a:tr>
+            </a:tbl>
+          </a:graphicData>
+        </a:graphic>
+      </p:graphicFrame>
     </p:spTree>
   </p:cSld>
   <p:clrMapOvr>
@@ -5685,16 +10469,16 @@
         <a:srgbClr val="3E4A5C"/>
       </a:accent2>
       <a:accent3>
-        <a:srgbClr val="9AA0A6"/>
+        <a:srgbClr val="F3E3D8"/>
       </a:accent3>
       <a:accent4>
-        <a:srgbClr val="6F7685"/>
+        <a:srgbClr val="9AA0A6"/>
       </a:accent4>
       <a:accent5>
-        <a:srgbClr val="9196A1"/>
+        <a:srgbClr val="6F7685"/>
       </a:accent5>
       <a:accent6>
-        <a:srgbClr val="B3B6BC"/>
+        <a:srgbClr val="9196A1"/>
       </a:accent6>
       <a:hlink>
         <a:srgbClr val="0563C1"/>
